--- a/Air Project.pptx
+++ b/Air Project.pptx
@@ -10,11 +10,12 @@
     <p:sldId id="259" r:id="rId4"/>
     <p:sldId id="260" r:id="rId5"/>
     <p:sldId id="261" r:id="rId6"/>
-    <p:sldId id="264" r:id="rId7"/>
-    <p:sldId id="263" r:id="rId8"/>
-    <p:sldId id="265" r:id="rId9"/>
-    <p:sldId id="257" r:id="rId10"/>
-    <p:sldId id="266" r:id="rId11"/>
+    <p:sldId id="267" r:id="rId7"/>
+    <p:sldId id="268" r:id="rId8"/>
+    <p:sldId id="264" r:id="rId9"/>
+    <p:sldId id="265" r:id="rId10"/>
+    <p:sldId id="263" r:id="rId11"/>
+    <p:sldId id="266" r:id="rId12"/>
   </p:sldIdLst>
   <p:sldSz cx="12192000" cy="6858000"/>
   <p:notesSz cx="6858000" cy="9144000"/>
@@ -132,6 +133,855 @@
 </p:presentation>
 </file>
 
+<file path=ppt/charts/chart1.xml><?xml version="1.0" encoding="utf-8"?>
+<c:chartSpace xmlns:c="http://schemas.openxmlformats.org/drawingml/2006/chart" xmlns:a="http://schemas.openxmlformats.org/drawingml/2006/main" xmlns:r="http://schemas.openxmlformats.org/officeDocument/2006/relationships" xmlns:c16r2="http://schemas.microsoft.com/office/drawing/2015/06/chart">
+  <c:date1904 val="0"/>
+  <c:lang val="ru-RU"/>
+  <c:roundedCorners val="0"/>
+  <mc:AlternateContent xmlns:mc="http://schemas.openxmlformats.org/markup-compatibility/2006">
+    <mc:Choice xmlns:c14="http://schemas.microsoft.com/office/drawing/2007/8/2/chart" Requires="c14">
+      <c14:style val="102"/>
+    </mc:Choice>
+    <mc:Fallback>
+      <c:style val="2"/>
+    </mc:Fallback>
+  </mc:AlternateContent>
+  <c:chart>
+    <c:title>
+      <c:tx>
+        <c:rich>
+          <a:bodyPr rot="0" spcFirstLastPara="1" vertOverflow="ellipsis" vert="horz" wrap="square" anchor="ctr" anchorCtr="1"/>
+          <a:lstStyle/>
+          <a:p>
+            <a:pPr>
+              <a:defRPr sz="1862" b="0" i="0" u="none" strike="noStrike" kern="1200" spc="0" baseline="0">
+                <a:solidFill>
+                  <a:schemeClr val="tx1">
+                    <a:lumMod val="65000"/>
+                    <a:lumOff val="35000"/>
+                  </a:schemeClr>
+                </a:solidFill>
+                <a:latin typeface="+mn-lt"/>
+                <a:ea typeface="+mn-ea"/>
+                <a:cs typeface="+mn-cs"/>
+              </a:defRPr>
+            </a:pPr>
+            <a:r>
+              <a:rPr lang="ru-RU" dirty="0"/>
+              <a:t>Затраты</a:t>
+            </a:r>
+          </a:p>
+        </c:rich>
+      </c:tx>
+      <c:overlay val="0"/>
+      <c:spPr>
+        <a:noFill/>
+        <a:ln>
+          <a:noFill/>
+        </a:ln>
+        <a:effectLst/>
+      </c:spPr>
+      <c:txPr>
+        <a:bodyPr rot="0" spcFirstLastPara="1" vertOverflow="ellipsis" vert="horz" wrap="square" anchor="ctr" anchorCtr="1"/>
+        <a:lstStyle/>
+        <a:p>
+          <a:pPr>
+            <a:defRPr sz="1862" b="0" i="0" u="none" strike="noStrike" kern="1200" spc="0" baseline="0">
+              <a:solidFill>
+                <a:schemeClr val="tx1">
+                  <a:lumMod val="65000"/>
+                  <a:lumOff val="35000"/>
+                </a:schemeClr>
+              </a:solidFill>
+              <a:latin typeface="+mn-lt"/>
+              <a:ea typeface="+mn-ea"/>
+              <a:cs typeface="+mn-cs"/>
+            </a:defRPr>
+          </a:pPr>
+          <a:endParaRPr lang="ru-RU"/>
+        </a:p>
+      </c:txPr>
+    </c:title>
+    <c:autoTitleDeleted val="0"/>
+    <c:plotArea>
+      <c:layout>
+        <c:manualLayout>
+          <c:layoutTarget val="inner"/>
+          <c:xMode val="edge"/>
+          <c:yMode val="edge"/>
+          <c:x val="0.37222375589505491"/>
+          <c:y val="0.18971176222118347"/>
+          <c:w val="0.27414489025525196"/>
+          <c:h val="0.60249858779069798"/>
+        </c:manualLayout>
+      </c:layout>
+      <c:doughnutChart>
+        <c:varyColors val="1"/>
+        <c:ser>
+          <c:idx val="0"/>
+          <c:order val="0"/>
+          <c:tx>
+            <c:strRef>
+              <c:f>Лист1!$B$1</c:f>
+              <c:strCache>
+                <c:ptCount val="1"/>
+                <c:pt idx="0">
+                  <c:v>Продажи</c:v>
+                </c:pt>
+              </c:strCache>
+            </c:strRef>
+          </c:tx>
+          <c:dPt>
+            <c:idx val="0"/>
+            <c:bubble3D val="0"/>
+            <c:spPr>
+              <a:solidFill>
+                <a:schemeClr val="accent1"/>
+              </a:solidFill>
+              <a:ln w="19050">
+                <a:solidFill>
+                  <a:schemeClr val="lt1"/>
+                </a:solidFill>
+              </a:ln>
+              <a:effectLst/>
+            </c:spPr>
+          </c:dPt>
+          <c:dPt>
+            <c:idx val="1"/>
+            <c:bubble3D val="0"/>
+            <c:spPr>
+              <a:solidFill>
+                <a:schemeClr val="accent2"/>
+              </a:solidFill>
+              <a:ln w="19050">
+                <a:solidFill>
+                  <a:schemeClr val="lt1"/>
+                </a:solidFill>
+              </a:ln>
+              <a:effectLst/>
+            </c:spPr>
+          </c:dPt>
+          <c:dPt>
+            <c:idx val="2"/>
+            <c:bubble3D val="0"/>
+            <c:spPr>
+              <a:solidFill>
+                <a:schemeClr val="accent3"/>
+              </a:solidFill>
+              <a:ln w="19050">
+                <a:solidFill>
+                  <a:schemeClr val="lt1"/>
+                </a:solidFill>
+              </a:ln>
+              <a:effectLst/>
+            </c:spPr>
+          </c:dPt>
+          <c:dPt>
+            <c:idx val="3"/>
+            <c:bubble3D val="0"/>
+            <c:spPr>
+              <a:solidFill>
+                <a:schemeClr val="accent4"/>
+              </a:solidFill>
+              <a:ln w="19050">
+                <a:solidFill>
+                  <a:schemeClr val="lt1"/>
+                </a:solidFill>
+              </a:ln>
+              <a:effectLst/>
+            </c:spPr>
+          </c:dPt>
+          <c:cat>
+            <c:strRef>
+              <c:f>Лист1!$A$2:$A$5</c:f>
+              <c:strCache>
+                <c:ptCount val="4"/>
+                <c:pt idx="0">
+                  <c:v>Реклама</c:v>
+                </c:pt>
+                <c:pt idx="1">
+                  <c:v>Оборудование</c:v>
+                </c:pt>
+                <c:pt idx="2">
+                  <c:v>Разработка</c:v>
+                </c:pt>
+                <c:pt idx="3">
+                  <c:v>Сервера</c:v>
+                </c:pt>
+              </c:strCache>
+            </c:strRef>
+          </c:cat>
+          <c:val>
+            <c:numRef>
+              <c:f>Лист1!$B$2:$B$5</c:f>
+              <c:numCache>
+                <c:formatCode>General</c:formatCode>
+                <c:ptCount val="4"/>
+                <c:pt idx="0">
+                  <c:v>200000</c:v>
+                </c:pt>
+                <c:pt idx="1">
+                  <c:v>300000</c:v>
+                </c:pt>
+                <c:pt idx="2">
+                  <c:v>300000</c:v>
+                </c:pt>
+                <c:pt idx="3">
+                  <c:v>120000</c:v>
+                </c:pt>
+              </c:numCache>
+            </c:numRef>
+          </c:val>
+          <c:extLst>
+            <c:ext xmlns:c16="http://schemas.microsoft.com/office/drawing/2014/chart" uri="{C3380CC4-5D6E-409C-BE32-E72D297353CC}">
+              <c16:uniqueId val="{00000000-1B35-4564-ABA0-12024F7FA4F2}"/>
+            </c:ext>
+          </c:extLst>
+        </c:ser>
+        <c:dLbls>
+          <c:showLegendKey val="0"/>
+          <c:showVal val="0"/>
+          <c:showCatName val="0"/>
+          <c:showSerName val="0"/>
+          <c:showPercent val="0"/>
+          <c:showBubbleSize val="0"/>
+          <c:showLeaderLines val="1"/>
+        </c:dLbls>
+        <c:firstSliceAng val="0"/>
+        <c:holeSize val="75"/>
+      </c:doughnutChart>
+      <c:spPr>
+        <a:noFill/>
+        <a:ln>
+          <a:noFill/>
+        </a:ln>
+        <a:effectLst/>
+      </c:spPr>
+    </c:plotArea>
+    <c:legend>
+      <c:legendPos val="b"/>
+      <c:overlay val="0"/>
+      <c:spPr>
+        <a:noFill/>
+        <a:ln>
+          <a:noFill/>
+        </a:ln>
+        <a:effectLst/>
+      </c:spPr>
+      <c:txPr>
+        <a:bodyPr rot="0" spcFirstLastPara="1" vertOverflow="ellipsis" vert="horz" wrap="square" anchor="ctr" anchorCtr="1"/>
+        <a:lstStyle/>
+        <a:p>
+          <a:pPr>
+            <a:defRPr sz="1197" b="0" i="0" u="none" strike="noStrike" kern="1200" baseline="0">
+              <a:solidFill>
+                <a:schemeClr val="tx1">
+                  <a:lumMod val="65000"/>
+                  <a:lumOff val="35000"/>
+                </a:schemeClr>
+              </a:solidFill>
+              <a:latin typeface="+mn-lt"/>
+              <a:ea typeface="+mn-ea"/>
+              <a:cs typeface="+mn-cs"/>
+            </a:defRPr>
+          </a:pPr>
+          <a:endParaRPr lang="ru-RU"/>
+        </a:p>
+      </c:txPr>
+    </c:legend>
+    <c:plotVisOnly val="1"/>
+    <c:dispBlanksAs val="gap"/>
+    <c:showDLblsOverMax val="0"/>
+    <c:extLst>
+      <c:ext xmlns:c16r3="http://schemas.microsoft.com/office/drawing/2017/03/chart" uri="{56B9EC1D-385E-4148-901F-78D8002777C0}">
+        <c16r3:dataDisplayOptions16>
+          <c16r3:dispNaAsBlank val="1"/>
+        </c16r3:dataDisplayOptions16>
+      </c:ext>
+    </c:extLst>
+  </c:chart>
+  <c:spPr>
+    <a:noFill/>
+    <a:ln>
+      <a:noFill/>
+    </a:ln>
+    <a:effectLst/>
+  </c:spPr>
+  <c:txPr>
+    <a:bodyPr/>
+    <a:lstStyle/>
+    <a:p>
+      <a:pPr>
+        <a:defRPr/>
+      </a:pPr>
+      <a:endParaRPr lang="ru-RU"/>
+    </a:p>
+  </c:txPr>
+  <c:externalData r:id="rId3">
+    <c:autoUpdate val="0"/>
+  </c:externalData>
+</c:chartSpace>
+</file>
+
+<file path=ppt/charts/colors1.xml><?xml version="1.0" encoding="utf-8"?>
+<cs:colorStyle xmlns:cs="http://schemas.microsoft.com/office/drawing/2012/chartStyle" xmlns:a="http://schemas.openxmlformats.org/drawingml/2006/main" meth="cycle" id="10">
+  <a:schemeClr val="accent1"/>
+  <a:schemeClr val="accent2"/>
+  <a:schemeClr val="accent3"/>
+  <a:schemeClr val="accent4"/>
+  <a:schemeClr val="accent5"/>
+  <a:schemeClr val="accent6"/>
+  <cs:variation/>
+  <cs:variation>
+    <a:lumMod val="60000"/>
+  </cs:variation>
+  <cs:variation>
+    <a:lumMod val="80000"/>
+    <a:lumOff val="20000"/>
+  </cs:variation>
+  <cs:variation>
+    <a:lumMod val="80000"/>
+  </cs:variation>
+  <cs:variation>
+    <a:lumMod val="60000"/>
+    <a:lumOff val="40000"/>
+  </cs:variation>
+  <cs:variation>
+    <a:lumMod val="50000"/>
+  </cs:variation>
+  <cs:variation>
+    <a:lumMod val="70000"/>
+    <a:lumOff val="30000"/>
+  </cs:variation>
+  <cs:variation>
+    <a:lumMod val="70000"/>
+  </cs:variation>
+  <cs:variation>
+    <a:lumMod val="50000"/>
+    <a:lumOff val="50000"/>
+  </cs:variation>
+</cs:colorStyle>
+</file>
+
+<file path=ppt/charts/style1.xml><?xml version="1.0" encoding="utf-8"?>
+<cs:chartStyle xmlns:cs="http://schemas.microsoft.com/office/drawing/2012/chartStyle" xmlns:a="http://schemas.openxmlformats.org/drawingml/2006/main" id="251">
+  <cs:axisTitle>
+    <cs:lnRef idx="0"/>
+    <cs:fillRef idx="0"/>
+    <cs:effectRef idx="0"/>
+    <cs:fontRef idx="minor">
+      <a:schemeClr val="tx1">
+        <a:lumMod val="65000"/>
+        <a:lumOff val="35000"/>
+      </a:schemeClr>
+    </cs:fontRef>
+    <cs:defRPr sz="1330" kern="1200"/>
+  </cs:axisTitle>
+  <cs:categoryAxis>
+    <cs:lnRef idx="0"/>
+    <cs:fillRef idx="0"/>
+    <cs:effectRef idx="0"/>
+    <cs:fontRef idx="minor">
+      <a:schemeClr val="tx1">
+        <a:lumMod val="65000"/>
+        <a:lumOff val="35000"/>
+      </a:schemeClr>
+    </cs:fontRef>
+    <cs:spPr>
+      <a:ln w="9525" cap="flat" cmpd="sng" algn="ctr">
+        <a:solidFill>
+          <a:schemeClr val="tx1">
+            <a:lumMod val="15000"/>
+            <a:lumOff val="85000"/>
+          </a:schemeClr>
+        </a:solidFill>
+        <a:round/>
+      </a:ln>
+    </cs:spPr>
+    <cs:defRPr sz="1197" kern="1200"/>
+  </cs:categoryAxis>
+  <cs:chartArea mods="allowNoFillOverride allowNoLineOverride">
+    <cs:lnRef idx="0"/>
+    <cs:fillRef idx="0"/>
+    <cs:effectRef idx="0"/>
+    <cs:fontRef idx="minor">
+      <a:schemeClr val="tx1"/>
+    </cs:fontRef>
+    <cs:spPr>
+      <a:solidFill>
+        <a:schemeClr val="bg1"/>
+      </a:solidFill>
+      <a:ln w="9525" cap="flat" cmpd="sng" algn="ctr">
+        <a:solidFill>
+          <a:schemeClr val="tx1">
+            <a:lumMod val="15000"/>
+            <a:lumOff val="85000"/>
+          </a:schemeClr>
+        </a:solidFill>
+        <a:round/>
+      </a:ln>
+    </cs:spPr>
+    <cs:defRPr sz="1197" kern="1200"/>
+  </cs:chartArea>
+  <cs:dataLabel>
+    <cs:lnRef idx="0"/>
+    <cs:fillRef idx="0"/>
+    <cs:effectRef idx="0"/>
+    <cs:fontRef idx="minor">
+      <a:schemeClr val="tx1">
+        <a:lumMod val="75000"/>
+        <a:lumOff val="25000"/>
+      </a:schemeClr>
+    </cs:fontRef>
+    <cs:defRPr sz="1197" kern="1200"/>
+  </cs:dataLabel>
+  <cs:dataLabelCallout>
+    <cs:lnRef idx="0"/>
+    <cs:fillRef idx="0"/>
+    <cs:effectRef idx="0"/>
+    <cs:fontRef idx="minor">
+      <a:schemeClr val="dk1">
+        <a:lumMod val="65000"/>
+        <a:lumOff val="35000"/>
+      </a:schemeClr>
+    </cs:fontRef>
+    <cs:spPr>
+      <a:solidFill>
+        <a:schemeClr val="lt1"/>
+      </a:solidFill>
+      <a:ln>
+        <a:solidFill>
+          <a:schemeClr val="dk1">
+            <a:lumMod val="25000"/>
+            <a:lumOff val="75000"/>
+          </a:schemeClr>
+        </a:solidFill>
+      </a:ln>
+    </cs:spPr>
+    <cs:defRPr sz="1197" kern="1200"/>
+    <cs:bodyPr rot="0" spcFirstLastPara="1" vertOverflow="clip" horzOverflow="clip" vert="horz" wrap="square" lIns="36576" tIns="18288" rIns="36576" bIns="18288" anchor="ctr" anchorCtr="1">
+      <a:spAutoFit/>
+    </cs:bodyPr>
+  </cs:dataLabelCallout>
+  <cs:dataPoint>
+    <cs:lnRef idx="0"/>
+    <cs:fillRef idx="1">
+      <cs:styleClr val="auto"/>
+    </cs:fillRef>
+    <cs:effectRef idx="0"/>
+    <cs:fontRef idx="minor">
+      <a:schemeClr val="tx1"/>
+    </cs:fontRef>
+    <cs:spPr>
+      <a:ln w="19050">
+        <a:solidFill>
+          <a:schemeClr val="lt1"/>
+        </a:solidFill>
+      </a:ln>
+    </cs:spPr>
+  </cs:dataPoint>
+  <cs:dataPoint3D>
+    <cs:lnRef idx="0"/>
+    <cs:fillRef idx="1">
+      <cs:styleClr val="auto"/>
+    </cs:fillRef>
+    <cs:effectRef idx="0"/>
+    <cs:fontRef idx="minor">
+      <a:schemeClr val="tx1"/>
+    </cs:fontRef>
+    <cs:spPr>
+      <a:ln w="25400">
+        <a:solidFill>
+          <a:schemeClr val="lt1"/>
+        </a:solidFill>
+      </a:ln>
+    </cs:spPr>
+  </cs:dataPoint3D>
+  <cs:dataPointLine>
+    <cs:lnRef idx="0">
+      <cs:styleClr val="auto"/>
+    </cs:lnRef>
+    <cs:fillRef idx="0"/>
+    <cs:effectRef idx="0"/>
+    <cs:fontRef idx="minor">
+      <a:schemeClr val="tx1"/>
+    </cs:fontRef>
+    <cs:spPr>
+      <a:ln w="28575" cap="rnd">
+        <a:solidFill>
+          <a:schemeClr val="phClr"/>
+        </a:solidFill>
+        <a:round/>
+      </a:ln>
+    </cs:spPr>
+  </cs:dataPointLine>
+  <cs:dataPointMarker>
+    <cs:lnRef idx="0">
+      <cs:styleClr val="auto"/>
+    </cs:lnRef>
+    <cs:fillRef idx="1">
+      <cs:styleClr val="auto"/>
+    </cs:fillRef>
+    <cs:effectRef idx="0"/>
+    <cs:fontRef idx="minor">
+      <a:schemeClr val="tx1"/>
+    </cs:fontRef>
+    <cs:spPr>
+      <a:ln w="9525">
+        <a:solidFill>
+          <a:schemeClr val="phClr"/>
+        </a:solidFill>
+      </a:ln>
+    </cs:spPr>
+  </cs:dataPointMarker>
+  <cs:dataPointMarkerLayout symbol="circle" size="5"/>
+  <cs:dataPointWireframe>
+    <cs:lnRef idx="0">
+      <cs:styleClr val="auto"/>
+    </cs:lnRef>
+    <cs:fillRef idx="0"/>
+    <cs:effectRef idx="0"/>
+    <cs:fontRef idx="minor">
+      <a:schemeClr val="tx1"/>
+    </cs:fontRef>
+    <cs:spPr>
+      <a:ln w="9525" cap="rnd">
+        <a:solidFill>
+          <a:schemeClr val="phClr"/>
+        </a:solidFill>
+        <a:round/>
+      </a:ln>
+    </cs:spPr>
+  </cs:dataPointWireframe>
+  <cs:dataTable>
+    <cs:lnRef idx="0"/>
+    <cs:fillRef idx="0"/>
+    <cs:effectRef idx="0"/>
+    <cs:fontRef idx="minor">
+      <a:schemeClr val="tx1">
+        <a:lumMod val="65000"/>
+        <a:lumOff val="35000"/>
+      </a:schemeClr>
+    </cs:fontRef>
+    <cs:spPr>
+      <a:noFill/>
+      <a:ln w="9525" cap="flat" cmpd="sng" algn="ctr">
+        <a:solidFill>
+          <a:schemeClr val="tx1">
+            <a:lumMod val="15000"/>
+            <a:lumOff val="85000"/>
+          </a:schemeClr>
+        </a:solidFill>
+        <a:round/>
+      </a:ln>
+    </cs:spPr>
+    <cs:defRPr sz="1197" kern="1200"/>
+  </cs:dataTable>
+  <cs:downBar>
+    <cs:lnRef idx="0"/>
+    <cs:fillRef idx="0"/>
+    <cs:effectRef idx="0"/>
+    <cs:fontRef idx="minor">
+      <a:schemeClr val="tx1"/>
+    </cs:fontRef>
+    <cs:spPr>
+      <a:solidFill>
+        <a:schemeClr val="dk1">
+          <a:lumMod val="75000"/>
+          <a:lumOff val="25000"/>
+        </a:schemeClr>
+      </a:solidFill>
+      <a:ln w="9525" cap="flat" cmpd="sng" algn="ctr">
+        <a:solidFill>
+          <a:schemeClr val="tx1">
+            <a:lumMod val="65000"/>
+            <a:lumOff val="35000"/>
+          </a:schemeClr>
+        </a:solidFill>
+        <a:round/>
+      </a:ln>
+    </cs:spPr>
+  </cs:downBar>
+  <cs:dropLine>
+    <cs:lnRef idx="0"/>
+    <cs:fillRef idx="0"/>
+    <cs:effectRef idx="0"/>
+    <cs:fontRef idx="minor">
+      <a:schemeClr val="tx1"/>
+    </cs:fontRef>
+    <cs:spPr>
+      <a:ln w="9525" cap="flat" cmpd="sng" algn="ctr">
+        <a:solidFill>
+          <a:schemeClr val="tx1">
+            <a:lumMod val="35000"/>
+            <a:lumOff val="65000"/>
+          </a:schemeClr>
+        </a:solidFill>
+        <a:round/>
+      </a:ln>
+    </cs:spPr>
+  </cs:dropLine>
+  <cs:errorBar>
+    <cs:lnRef idx="0"/>
+    <cs:fillRef idx="0"/>
+    <cs:effectRef idx="0"/>
+    <cs:fontRef idx="minor">
+      <a:schemeClr val="tx1"/>
+    </cs:fontRef>
+    <cs:spPr>
+      <a:ln w="9525" cap="flat" cmpd="sng" algn="ctr">
+        <a:solidFill>
+          <a:schemeClr val="tx1">
+            <a:lumMod val="65000"/>
+            <a:lumOff val="35000"/>
+          </a:schemeClr>
+        </a:solidFill>
+        <a:round/>
+      </a:ln>
+    </cs:spPr>
+  </cs:errorBar>
+  <cs:floor>
+    <cs:lnRef idx="0"/>
+    <cs:fillRef idx="0"/>
+    <cs:effectRef idx="0"/>
+    <cs:fontRef idx="minor">
+      <a:schemeClr val="tx1"/>
+    </cs:fontRef>
+    <cs:spPr>
+      <a:noFill/>
+      <a:ln>
+        <a:noFill/>
+      </a:ln>
+    </cs:spPr>
+  </cs:floor>
+  <cs:gridlineMajor>
+    <cs:lnRef idx="0"/>
+    <cs:fillRef idx="0"/>
+    <cs:effectRef idx="0"/>
+    <cs:fontRef idx="minor">
+      <a:schemeClr val="tx1"/>
+    </cs:fontRef>
+    <cs:spPr>
+      <a:ln w="9525" cap="flat" cmpd="sng" algn="ctr">
+        <a:solidFill>
+          <a:schemeClr val="tx1">
+            <a:lumMod val="15000"/>
+            <a:lumOff val="85000"/>
+          </a:schemeClr>
+        </a:solidFill>
+        <a:round/>
+      </a:ln>
+    </cs:spPr>
+  </cs:gridlineMajor>
+  <cs:gridlineMinor>
+    <cs:lnRef idx="0"/>
+    <cs:fillRef idx="0"/>
+    <cs:effectRef idx="0"/>
+    <cs:fontRef idx="minor">
+      <a:schemeClr val="tx1"/>
+    </cs:fontRef>
+    <cs:spPr>
+      <a:ln w="9525" cap="flat" cmpd="sng" algn="ctr">
+        <a:solidFill>
+          <a:schemeClr val="tx1">
+            <a:lumMod val="5000"/>
+            <a:lumOff val="95000"/>
+          </a:schemeClr>
+        </a:solidFill>
+        <a:round/>
+      </a:ln>
+    </cs:spPr>
+  </cs:gridlineMinor>
+  <cs:hiLoLine>
+    <cs:lnRef idx="0"/>
+    <cs:fillRef idx="0"/>
+    <cs:effectRef idx="0"/>
+    <cs:fontRef idx="minor">
+      <a:schemeClr val="tx1"/>
+    </cs:fontRef>
+    <cs:spPr>
+      <a:ln w="9525" cap="flat" cmpd="sng" algn="ctr">
+        <a:solidFill>
+          <a:schemeClr val="tx1">
+            <a:lumMod val="50000"/>
+            <a:lumOff val="50000"/>
+          </a:schemeClr>
+        </a:solidFill>
+        <a:round/>
+      </a:ln>
+    </cs:spPr>
+  </cs:hiLoLine>
+  <cs:leaderLine>
+    <cs:lnRef idx="0"/>
+    <cs:fillRef idx="0"/>
+    <cs:effectRef idx="0"/>
+    <cs:fontRef idx="minor">
+      <a:schemeClr val="tx1"/>
+    </cs:fontRef>
+    <cs:spPr>
+      <a:ln w="9525" cap="flat" cmpd="sng" algn="ctr">
+        <a:solidFill>
+          <a:schemeClr val="tx1">
+            <a:lumMod val="35000"/>
+            <a:lumOff val="65000"/>
+          </a:schemeClr>
+        </a:solidFill>
+        <a:round/>
+      </a:ln>
+    </cs:spPr>
+  </cs:leaderLine>
+  <cs:legend>
+    <cs:lnRef idx="0"/>
+    <cs:fillRef idx="0"/>
+    <cs:effectRef idx="0"/>
+    <cs:fontRef idx="minor">
+      <a:schemeClr val="tx1">
+        <a:lumMod val="65000"/>
+        <a:lumOff val="35000"/>
+      </a:schemeClr>
+    </cs:fontRef>
+    <cs:defRPr sz="1197" kern="1200"/>
+  </cs:legend>
+  <cs:plotArea mods="allowNoFillOverride allowNoLineOverride">
+    <cs:lnRef idx="0"/>
+    <cs:fillRef idx="0"/>
+    <cs:effectRef idx="0"/>
+    <cs:fontRef idx="minor">
+      <a:schemeClr val="tx1"/>
+    </cs:fontRef>
+  </cs:plotArea>
+  <cs:plotArea3D mods="allowNoFillOverride allowNoLineOverride">
+    <cs:lnRef idx="0"/>
+    <cs:fillRef idx="0"/>
+    <cs:effectRef idx="0"/>
+    <cs:fontRef idx="minor">
+      <a:schemeClr val="tx1"/>
+    </cs:fontRef>
+  </cs:plotArea3D>
+  <cs:seriesAxis>
+    <cs:lnRef idx="0"/>
+    <cs:fillRef idx="0"/>
+    <cs:effectRef idx="0"/>
+    <cs:fontRef idx="minor">
+      <a:schemeClr val="tx1">
+        <a:lumMod val="65000"/>
+        <a:lumOff val="35000"/>
+      </a:schemeClr>
+    </cs:fontRef>
+    <cs:defRPr sz="1197" kern="1200"/>
+  </cs:seriesAxis>
+  <cs:seriesLine>
+    <cs:lnRef idx="0"/>
+    <cs:fillRef idx="0"/>
+    <cs:effectRef idx="0"/>
+    <cs:fontRef idx="minor">
+      <a:schemeClr val="tx1"/>
+    </cs:fontRef>
+    <cs:spPr>
+      <a:ln w="9525" cap="flat" cmpd="sng" algn="ctr">
+        <a:solidFill>
+          <a:schemeClr val="tx1">
+            <a:lumMod val="35000"/>
+            <a:lumOff val="65000"/>
+          </a:schemeClr>
+        </a:solidFill>
+        <a:round/>
+      </a:ln>
+    </cs:spPr>
+  </cs:seriesLine>
+  <cs:title>
+    <cs:lnRef idx="0"/>
+    <cs:fillRef idx="0"/>
+    <cs:effectRef idx="0"/>
+    <cs:fontRef idx="minor">
+      <a:schemeClr val="tx1">
+        <a:lumMod val="65000"/>
+        <a:lumOff val="35000"/>
+      </a:schemeClr>
+    </cs:fontRef>
+    <cs:defRPr sz="1862" b="0" kern="1200" spc="0" baseline="0"/>
+  </cs:title>
+  <cs:trendline>
+    <cs:lnRef idx="0">
+      <cs:styleClr val="auto"/>
+    </cs:lnRef>
+    <cs:fillRef idx="0"/>
+    <cs:effectRef idx="0"/>
+    <cs:fontRef idx="minor">
+      <a:schemeClr val="tx1"/>
+    </cs:fontRef>
+    <cs:spPr>
+      <a:ln w="19050" cap="rnd">
+        <a:solidFill>
+          <a:schemeClr val="phClr"/>
+        </a:solidFill>
+        <a:prstDash val="sysDot"/>
+      </a:ln>
+    </cs:spPr>
+  </cs:trendline>
+  <cs:trendlineLabel>
+    <cs:lnRef idx="0"/>
+    <cs:fillRef idx="0"/>
+    <cs:effectRef idx="0"/>
+    <cs:fontRef idx="minor">
+      <a:schemeClr val="tx1">
+        <a:lumMod val="65000"/>
+        <a:lumOff val="35000"/>
+      </a:schemeClr>
+    </cs:fontRef>
+    <cs:defRPr sz="1197" kern="1200"/>
+  </cs:trendlineLabel>
+  <cs:upBar>
+    <cs:lnRef idx="0"/>
+    <cs:fillRef idx="0"/>
+    <cs:effectRef idx="0"/>
+    <cs:fontRef idx="minor">
+      <a:schemeClr val="tx1"/>
+    </cs:fontRef>
+    <cs:spPr>
+      <a:solidFill>
+        <a:schemeClr val="lt1"/>
+      </a:solidFill>
+      <a:ln w="9525" cap="flat" cmpd="sng" algn="ctr">
+        <a:solidFill>
+          <a:schemeClr val="tx1">
+            <a:lumMod val="65000"/>
+            <a:lumOff val="35000"/>
+          </a:schemeClr>
+        </a:solidFill>
+        <a:round/>
+      </a:ln>
+    </cs:spPr>
+  </cs:upBar>
+  <cs:valueAxis>
+    <cs:lnRef idx="0"/>
+    <cs:fillRef idx="0"/>
+    <cs:effectRef idx="0"/>
+    <cs:fontRef idx="minor">
+      <a:schemeClr val="tx1">
+        <a:lumMod val="65000"/>
+        <a:lumOff val="35000"/>
+      </a:schemeClr>
+    </cs:fontRef>
+    <cs:defRPr sz="1197" kern="1200"/>
+  </cs:valueAxis>
+  <cs:wall>
+    <cs:lnRef idx="0"/>
+    <cs:fillRef idx="0"/>
+    <cs:effectRef idx="0"/>
+    <cs:fontRef idx="minor">
+      <a:schemeClr val="tx1"/>
+    </cs:fontRef>
+    <cs:spPr>
+      <a:noFill/>
+      <a:ln>
+        <a:noFill/>
+      </a:ln>
+    </cs:spPr>
+  </cs:wall>
+</cs:chartStyle>
+</file>
+
 <file path=ppt/slideLayouts/slideLayout1.xml><?xml version="1.0" encoding="utf-8"?>
 <p:sldLayout xmlns:a="http://schemas.openxmlformats.org/drawingml/2006/main" xmlns:r="http://schemas.openxmlformats.org/officeDocument/2006/relationships" xmlns:p="http://schemas.openxmlformats.org/presentationml/2006/main" type="title" preserve="1">
   <p:cSld name="Титульный слайд">
@@ -297,7 +1147,7 @@
           <a:p>
             <a:fld id="{7905CEE2-44D1-4C01-BD46-E6EDC2585EF5}" type="datetimeFigureOut">
               <a:rPr lang="ru-RU" smtClean="0"/>
-              <a:t>24.04.2026</a:t>
+              <a:t>02.05.2026</a:t>
             </a:fld>
             <a:endParaRPr lang="ru-RU"/>
           </a:p>
@@ -557,7 +1407,7 @@
           <a:p>
             <a:fld id="{7905CEE2-44D1-4C01-BD46-E6EDC2585EF5}" type="datetimeFigureOut">
               <a:rPr lang="ru-RU" smtClean="0"/>
-              <a:t>24.04.2026</a:t>
+              <a:t>02.05.2026</a:t>
             </a:fld>
             <a:endParaRPr lang="ru-RU"/>
           </a:p>
@@ -777,7 +1627,7 @@
           <a:p>
             <a:fld id="{7905CEE2-44D1-4C01-BD46-E6EDC2585EF5}" type="datetimeFigureOut">
               <a:rPr lang="ru-RU" smtClean="0"/>
-              <a:t>24.04.2026</a:t>
+              <a:t>02.05.2026</a:t>
             </a:fld>
             <a:endParaRPr lang="ru-RU"/>
           </a:p>
@@ -1011,7 +1861,7 @@
           <a:p>
             <a:fld id="{7905CEE2-44D1-4C01-BD46-E6EDC2585EF5}" type="datetimeFigureOut">
               <a:rPr lang="ru-RU" smtClean="0"/>
-              <a:t>24.04.2026</a:t>
+              <a:t>02.05.2026</a:t>
             </a:fld>
             <a:endParaRPr lang="ru-RU"/>
           </a:p>
@@ -1348,7 +2198,7 @@
           <a:p>
             <a:fld id="{7905CEE2-44D1-4C01-BD46-E6EDC2585EF5}" type="datetimeFigureOut">
               <a:rPr lang="ru-RU" smtClean="0"/>
-              <a:t>24.04.2026</a:t>
+              <a:t>02.05.2026</a:t>
             </a:fld>
             <a:endParaRPr lang="ru-RU"/>
           </a:p>
@@ -1625,7 +2475,7 @@
           <a:p>
             <a:fld id="{7905CEE2-44D1-4C01-BD46-E6EDC2585EF5}" type="datetimeFigureOut">
               <a:rPr lang="ru-RU" smtClean="0"/>
-              <a:t>24.04.2026</a:t>
+              <a:t>02.05.2026</a:t>
             </a:fld>
             <a:endParaRPr lang="ru-RU"/>
           </a:p>
@@ -2049,7 +2899,7 @@
           <a:p>
             <a:fld id="{7905CEE2-44D1-4C01-BD46-E6EDC2585EF5}" type="datetimeFigureOut">
               <a:rPr lang="ru-RU" smtClean="0"/>
-              <a:t>24.04.2026</a:t>
+              <a:t>02.05.2026</a:t>
             </a:fld>
             <a:endParaRPr lang="ru-RU"/>
           </a:p>
@@ -2202,7 +3052,7 @@
           <a:p>
             <a:fld id="{7905CEE2-44D1-4C01-BD46-E6EDC2585EF5}" type="datetimeFigureOut">
               <a:rPr lang="ru-RU" smtClean="0"/>
-              <a:t>24.04.2026</a:t>
+              <a:t>02.05.2026</a:t>
             </a:fld>
             <a:endParaRPr lang="ru-RU"/>
           </a:p>
@@ -2327,7 +3177,7 @@
           <a:p>
             <a:fld id="{7905CEE2-44D1-4C01-BD46-E6EDC2585EF5}" type="datetimeFigureOut">
               <a:rPr lang="ru-RU" smtClean="0"/>
-              <a:t>24.04.2026</a:t>
+              <a:t>02.05.2026</a:t>
             </a:fld>
             <a:endParaRPr lang="ru-RU"/>
           </a:p>
@@ -2650,7 +3500,7 @@
           <a:p>
             <a:fld id="{7905CEE2-44D1-4C01-BD46-E6EDC2585EF5}" type="datetimeFigureOut">
               <a:rPr lang="ru-RU" smtClean="0"/>
-              <a:t>24.04.2026</a:t>
+              <a:t>02.05.2026</a:t>
             </a:fld>
             <a:endParaRPr lang="ru-RU"/>
           </a:p>
@@ -2950,7 +3800,7 @@
           <a:p>
             <a:fld id="{7905CEE2-44D1-4C01-BD46-E6EDC2585EF5}" type="datetimeFigureOut">
               <a:rPr lang="ru-RU" smtClean="0"/>
-              <a:t>24.04.2026</a:t>
+              <a:t>02.05.2026</a:t>
             </a:fld>
             <a:endParaRPr lang="ru-RU"/>
           </a:p>
@@ -3203,7 +4053,7 @@
           <a:p>
             <a:fld id="{7905CEE2-44D1-4C01-BD46-E6EDC2585EF5}" type="datetimeFigureOut">
               <a:rPr lang="ru-RU" smtClean="0"/>
-              <a:t>24.04.2026</a:t>
+              <a:t>02.05.2026</a:t>
             </a:fld>
             <a:endParaRPr lang="ru-RU"/>
           </a:p>
@@ -3876,6 +4726,197 @@
       </p:grpSpPr>
       <p:sp>
         <p:nvSpPr>
+          <p:cNvPr id="2" name="Заголовок 1">
+            <a:extLst>
+              <a:ext uri="{FF2B5EF4-FFF2-40B4-BE49-F238E27FC236}">
+                <a16:creationId xmlns:a16="http://schemas.microsoft.com/office/drawing/2014/main" id="{14260471-CF37-41A6-A525-02DD85A555CF}"/>
+              </a:ext>
+            </a:extLst>
+          </p:cNvPr>
+          <p:cNvSpPr>
+            <a:spLocks noGrp="1"/>
+          </p:cNvSpPr>
+          <p:nvPr>
+            <p:ph type="title"/>
+          </p:nvPr>
+        </p:nvSpPr>
+        <p:spPr/>
+        <p:txBody>
+          <a:bodyPr/>
+          <a:lstStyle/>
+          <a:p>
+            <a:r>
+              <a:rPr lang="ru-RU" dirty="0"/>
+              <a:t>Сильные стороны проекта</a:t>
+            </a:r>
+          </a:p>
+        </p:txBody>
+      </p:sp>
+      <p:sp>
+        <p:nvSpPr>
+          <p:cNvPr id="4" name="Нижний колонтитул 4">
+            <a:extLst>
+              <a:ext uri="{FF2B5EF4-FFF2-40B4-BE49-F238E27FC236}">
+                <a16:creationId xmlns:a16="http://schemas.microsoft.com/office/drawing/2014/main" id="{E08C957F-4112-4133-9044-85BF400516CF}"/>
+              </a:ext>
+            </a:extLst>
+          </p:cNvPr>
+          <p:cNvSpPr>
+            <a:spLocks noGrp="1"/>
+          </p:cNvSpPr>
+          <p:nvPr>
+            <p:ph type="ftr" sz="quarter" idx="11"/>
+          </p:nvPr>
+        </p:nvSpPr>
+        <p:spPr>
+          <a:xfrm>
+            <a:off x="2271000" y="6590454"/>
+            <a:ext cx="7650000" cy="365126"/>
+          </a:xfrm>
+        </p:spPr>
+        <p:txBody>
+          <a:bodyPr/>
+          <a:lstStyle/>
+          <a:p>
+            <a:r>
+              <a:rPr lang="ru-RU" dirty="0">
+                <a:solidFill>
+                  <a:schemeClr val="tx1"/>
+                </a:solidFill>
+              </a:rPr>
+              <a:t>Шаблоны презентаций с сайта </a:t>
+            </a:r>
+            <a:r>
+              <a:rPr lang="en-US" dirty="0">
+                <a:hlinkClick r:id="rId2">
+                  <a:extLst>
+                    <a:ext uri="{A12FA001-AC4F-418D-AE19-62706E023703}">
+                      <ahyp:hlinkClr xmlns:ahyp="http://schemas.microsoft.com/office/drawing/2018/hyperlinkcolor" val="tx"/>
+                    </a:ext>
+                  </a:extLst>
+                </a:hlinkClick>
+              </a:rPr>
+              <a:t>presentation-creation.ru</a:t>
+            </a:r>
+            <a:endParaRPr lang="ru-RU" dirty="0"/>
+          </a:p>
+        </p:txBody>
+      </p:sp>
+      <p:sp>
+        <p:nvSpPr>
+          <p:cNvPr id="3" name="TextBox 2">
+            <a:extLst>
+              <a:ext uri="{FF2B5EF4-FFF2-40B4-BE49-F238E27FC236}">
+                <a16:creationId xmlns:a16="http://schemas.microsoft.com/office/drawing/2014/main" id="{AA504A93-B98E-7B6F-424E-255FACCF13FA}"/>
+              </a:ext>
+            </a:extLst>
+          </p:cNvPr>
+          <p:cNvSpPr txBox="1"/>
+          <p:nvPr/>
+        </p:nvSpPr>
+        <p:spPr>
+          <a:xfrm>
+            <a:off x="390618" y="1855432"/>
+            <a:ext cx="8673483" cy="3046988"/>
+          </a:xfrm>
+          <a:prstGeom prst="rect">
+            <a:avLst/>
+          </a:prstGeom>
+          <a:noFill/>
+        </p:spPr>
+        <p:txBody>
+          <a:bodyPr wrap="square" rtlCol="0">
+            <a:spAutoFit/>
+          </a:bodyPr>
+          <a:lstStyle/>
+          <a:p>
+            <a:r>
+              <a:rPr lang="ru-RU" sz="2400" dirty="0"/>
+              <a:t>Очень точные прогноз</a:t>
+            </a:r>
+            <a:r>
+              <a:rPr lang="en-US" sz="2400" dirty="0"/>
+              <a:t>:</a:t>
+            </a:r>
+          </a:p>
+          <a:p>
+            <a:r>
+              <a:rPr lang="ru-RU" sz="2400" dirty="0"/>
+              <a:t>	Из за локальной работы сервиса прогноз становиться 	крайне точным</a:t>
+            </a:r>
+          </a:p>
+          <a:p>
+            <a:r>
+              <a:rPr lang="ru-RU" sz="2400" dirty="0"/>
+              <a:t>Один из немногих Российских аналогов</a:t>
+            </a:r>
+            <a:r>
+              <a:rPr lang="en-US" sz="2400" dirty="0"/>
+              <a:t>:</a:t>
+            </a:r>
+          </a:p>
+          <a:p>
+            <a:r>
+              <a:rPr lang="en-US" sz="2400" dirty="0"/>
+              <a:t>	</a:t>
+            </a:r>
+            <a:r>
+              <a:rPr lang="ru-RU" sz="2400" dirty="0"/>
+              <a:t>Основную конкуренцию составляют только иностранные 	аналоги </a:t>
+            </a:r>
+          </a:p>
+          <a:p>
+            <a:endParaRPr lang="ru-RU" sz="2400" dirty="0"/>
+          </a:p>
+          <a:p>
+            <a:endParaRPr lang="ru-RU" sz="2400" dirty="0"/>
+          </a:p>
+        </p:txBody>
+      </p:sp>
+    </p:spTree>
+    <p:extLst>
+      <p:ext uri="{BB962C8B-B14F-4D97-AF65-F5344CB8AC3E}">
+        <p14:creationId xmlns:p14="http://schemas.microsoft.com/office/powerpoint/2010/main" val="2086386438"/>
+      </p:ext>
+    </p:extLst>
+  </p:cSld>
+  <p:clrMapOvr>
+    <a:masterClrMapping/>
+  </p:clrMapOvr>
+  <mc:AlternateContent xmlns:mc="http://schemas.openxmlformats.org/markup-compatibility/2006" xmlns:p14="http://schemas.microsoft.com/office/powerpoint/2010/main">
+    <mc:Choice Requires="p14">
+      <p:transition spd="med" p14:dur="700">
+        <p:fade/>
+      </p:transition>
+    </mc:Choice>
+    <mc:Fallback xmlns="">
+      <p:transition spd="med">
+        <p:fade/>
+      </p:transition>
+    </mc:Fallback>
+  </mc:AlternateContent>
+</p:sld>
+</file>
+
+<file path=ppt/slides/slide11.xml><?xml version="1.0" encoding="utf-8"?>
+<p:sld xmlns:a="http://schemas.openxmlformats.org/drawingml/2006/main" xmlns:r="http://schemas.openxmlformats.org/officeDocument/2006/relationships" xmlns:p="http://schemas.openxmlformats.org/presentationml/2006/main">
+  <p:cSld>
+    <p:spTree>
+      <p:nvGrpSpPr>
+        <p:cNvPr id="1" name=""/>
+        <p:cNvGrpSpPr/>
+        <p:nvPr/>
+      </p:nvGrpSpPr>
+      <p:grpSpPr>
+        <a:xfrm>
+          <a:off x="0" y="0"/>
+          <a:ext cx="0" cy="0"/>
+          <a:chOff x="0" y="0"/>
+          <a:chExt cx="0" cy="0"/>
+        </a:xfrm>
+      </p:grpSpPr>
+      <p:sp>
+        <p:nvSpPr>
           <p:cNvPr id="4" name="Заголовок 9">
             <a:extLst>
               <a:ext uri="{FF2B5EF4-FFF2-40B4-BE49-F238E27FC236}">
@@ -5605,11 +6646,19 @@
           </a:lstStyle>
           <a:p>
             <a:r>
-              <a:rPr lang="ru-RU" sz="2400" dirty="0"/>
+              <a:rPr lang="ru-RU" sz="2400" dirty="0">
+                <a:solidFill>
+                  <a:schemeClr val="bg1"/>
+                </a:solidFill>
+              </a:rPr>
               <a:t>приложение строит </a:t>
             </a:r>
             <a:r>
-              <a:rPr lang="ru-RU" sz="2400" b="1" dirty="0"/>
+              <a:rPr lang="ru-RU" sz="2400" b="1" dirty="0">
+                <a:solidFill>
+                  <a:schemeClr val="bg1"/>
+                </a:solidFill>
+              </a:rPr>
               <a:t>прогноз качества воздуха на 24 часа</a:t>
             </a:r>
             <a:endParaRPr lang="ru-RU" sz="2400" dirty="0">
@@ -5992,7 +7041,7 @@
           <p:cNvPr id="2" name="Заголовок 1">
             <a:extLst>
               <a:ext uri="{FF2B5EF4-FFF2-40B4-BE49-F238E27FC236}">
-                <a16:creationId xmlns:a16="http://schemas.microsoft.com/office/drawing/2014/main" id="{14260471-CF37-41A6-A525-02DD85A555CF}"/>
+                <a16:creationId xmlns:a16="http://schemas.microsoft.com/office/drawing/2014/main" id="{300FFB5B-1AC5-DE4D-D0A2-DDA71EF36D89}"/>
               </a:ext>
             </a:extLst>
           </p:cNvPr>
@@ -6010,17 +7059,303 @@
           <a:p>
             <a:r>
               <a:rPr lang="ru-RU" dirty="0"/>
-              <a:t>Аналоги</a:t>
-            </a:r>
-          </a:p>
-        </p:txBody>
-      </p:sp>
-      <p:sp>
-        <p:nvSpPr>
-          <p:cNvPr id="4" name="Нижний колонтитул 4">
-            <a:extLst>
-              <a:ext uri="{FF2B5EF4-FFF2-40B4-BE49-F238E27FC236}">
-                <a16:creationId xmlns:a16="http://schemas.microsoft.com/office/drawing/2014/main" id="{E08C957F-4112-4133-9044-85BF400516CF}"/>
+              <a:t>Экономика</a:t>
+            </a:r>
+          </a:p>
+        </p:txBody>
+      </p:sp>
+      <p:graphicFrame>
+        <p:nvGraphicFramePr>
+          <p:cNvPr id="7" name="Объект 6">
+            <a:extLst>
+              <a:ext uri="{FF2B5EF4-FFF2-40B4-BE49-F238E27FC236}">
+                <a16:creationId xmlns:a16="http://schemas.microsoft.com/office/drawing/2014/main" id="{043BFE52-9438-6909-7380-C9806776671C}"/>
+              </a:ext>
+            </a:extLst>
+          </p:cNvPr>
+          <p:cNvGraphicFramePr>
+            <a:graphicFrameLocks noGrp="1"/>
+          </p:cNvGraphicFramePr>
+          <p:nvPr>
+            <p:ph idx="1"/>
+            <p:extLst>
+              <p:ext uri="{D42A27DB-BD31-4B8C-83A1-F6EECF244321}">
+                <p14:modId xmlns:p14="http://schemas.microsoft.com/office/powerpoint/2010/main" val="2809498876"/>
+              </p:ext>
+            </p:extLst>
+          </p:nvPr>
+        </p:nvGraphicFramePr>
+        <p:xfrm>
+          <a:off x="2798886" y="152501"/>
+          <a:ext cx="8307079" cy="3842450"/>
+        </p:xfrm>
+        <a:graphic>
+          <a:graphicData uri="http://schemas.openxmlformats.org/drawingml/2006/chart">
+            <c:chart xmlns:c="http://schemas.openxmlformats.org/drawingml/2006/chart" xmlns:r="http://schemas.openxmlformats.org/officeDocument/2006/relationships" r:id="rId2"/>
+          </a:graphicData>
+        </a:graphic>
+      </p:graphicFrame>
+      <p:sp>
+        <p:nvSpPr>
+          <p:cNvPr id="8" name="TextBox 7">
+            <a:extLst>
+              <a:ext uri="{FF2B5EF4-FFF2-40B4-BE49-F238E27FC236}">
+                <a16:creationId xmlns:a16="http://schemas.microsoft.com/office/drawing/2014/main" id="{0E5C3C2E-E2C5-74EA-FB49-1693003EB914}"/>
+              </a:ext>
+            </a:extLst>
+          </p:cNvPr>
+          <p:cNvSpPr txBox="1"/>
+          <p:nvPr/>
+        </p:nvSpPr>
+        <p:spPr>
+          <a:xfrm>
+            <a:off x="559293" y="1748901"/>
+            <a:ext cx="3302493" cy="1477328"/>
+          </a:xfrm>
+          <a:prstGeom prst="rect">
+            <a:avLst/>
+          </a:prstGeom>
+          <a:noFill/>
+        </p:spPr>
+        <p:txBody>
+          <a:bodyPr wrap="square" rtlCol="0">
+            <a:spAutoFit/>
+          </a:bodyPr>
+          <a:lstStyle/>
+          <a:p>
+            <a:r>
+              <a:rPr lang="ru-RU" dirty="0"/>
+              <a:t>Затраты</a:t>
+            </a:r>
+            <a:r>
+              <a:rPr lang="en-US" dirty="0"/>
+              <a:t>:</a:t>
+            </a:r>
+            <a:br>
+              <a:rPr lang="en-US" dirty="0"/>
+            </a:br>
+            <a:r>
+              <a:rPr lang="ru-RU" dirty="0"/>
+              <a:t>Реклама</a:t>
+            </a:r>
+            <a:r>
+              <a:rPr lang="en-US" dirty="0"/>
+              <a:t>: </a:t>
+            </a:r>
+            <a:r>
+              <a:rPr lang="ru-RU" dirty="0"/>
+              <a:t>200000р</a:t>
+            </a:r>
+          </a:p>
+          <a:p>
+            <a:r>
+              <a:rPr lang="ru-RU" dirty="0"/>
+              <a:t>Оборудование</a:t>
+            </a:r>
+            <a:r>
+              <a:rPr lang="en-US" dirty="0"/>
+              <a:t>: </a:t>
+            </a:r>
+            <a:r>
+              <a:rPr lang="ru-RU" dirty="0"/>
+              <a:t>30</a:t>
+            </a:r>
+            <a:r>
+              <a:rPr lang="en-US" dirty="0"/>
+              <a:t>0000</a:t>
+            </a:r>
+            <a:r>
+              <a:rPr lang="ru-RU" dirty="0"/>
+              <a:t>р</a:t>
+            </a:r>
+          </a:p>
+          <a:p>
+            <a:r>
+              <a:rPr lang="ru-RU" dirty="0"/>
+              <a:t>Разработка</a:t>
+            </a:r>
+            <a:r>
+              <a:rPr lang="en-US" dirty="0"/>
+              <a:t>: 300000</a:t>
+            </a:r>
+            <a:r>
+              <a:rPr lang="ru-RU" dirty="0"/>
+              <a:t>р</a:t>
+            </a:r>
+          </a:p>
+          <a:p>
+            <a:r>
+              <a:rPr lang="ru-RU" dirty="0"/>
+              <a:t>Сервера</a:t>
+            </a:r>
+            <a:r>
+              <a:rPr lang="en-US" dirty="0"/>
+              <a:t>:</a:t>
+            </a:r>
+            <a:r>
+              <a:rPr lang="ru-RU" dirty="0"/>
+              <a:t> 6</a:t>
+            </a:r>
+            <a:r>
+              <a:rPr lang="en-US" dirty="0"/>
+              <a:t>0000</a:t>
+            </a:r>
+            <a:r>
+              <a:rPr lang="ru-RU" dirty="0"/>
+              <a:t>р</a:t>
+            </a:r>
+          </a:p>
+        </p:txBody>
+      </p:sp>
+      <p:sp>
+        <p:nvSpPr>
+          <p:cNvPr id="9" name="TextBox 8">
+            <a:extLst>
+              <a:ext uri="{FF2B5EF4-FFF2-40B4-BE49-F238E27FC236}">
+                <a16:creationId xmlns:a16="http://schemas.microsoft.com/office/drawing/2014/main" id="{86BDA1E4-7254-81BF-25C7-AEFED712ACBD}"/>
+              </a:ext>
+            </a:extLst>
+          </p:cNvPr>
+          <p:cNvSpPr txBox="1"/>
+          <p:nvPr/>
+        </p:nvSpPr>
+        <p:spPr>
+          <a:xfrm>
+            <a:off x="559293" y="4279037"/>
+            <a:ext cx="3932808" cy="923330"/>
+          </a:xfrm>
+          <a:prstGeom prst="rect">
+            <a:avLst/>
+          </a:prstGeom>
+          <a:noFill/>
+        </p:spPr>
+        <p:txBody>
+          <a:bodyPr wrap="square" rtlCol="0">
+            <a:spAutoFit/>
+          </a:bodyPr>
+          <a:lstStyle/>
+          <a:p>
+            <a:r>
+              <a:rPr lang="ru-RU" dirty="0"/>
+              <a:t>Прибыль</a:t>
+            </a:r>
+            <a:r>
+              <a:rPr lang="en-US" dirty="0"/>
+              <a:t>:</a:t>
+            </a:r>
+          </a:p>
+          <a:p>
+            <a:r>
+              <a:rPr lang="en-US" dirty="0"/>
+              <a:t>B2C </a:t>
+            </a:r>
+            <a:r>
+              <a:rPr lang="ru-RU" dirty="0"/>
+              <a:t>Подписки</a:t>
+            </a:r>
+            <a:r>
+              <a:rPr lang="en-US" dirty="0"/>
+              <a:t>: 50000</a:t>
+            </a:r>
+            <a:r>
+              <a:rPr lang="ru-RU" dirty="0"/>
+              <a:t>р</a:t>
+            </a:r>
+            <a:r>
+              <a:rPr lang="en-US" dirty="0"/>
+              <a:t>/</a:t>
+            </a:r>
+            <a:r>
+              <a:rPr lang="ru-RU" dirty="0" err="1"/>
+              <a:t>мес</a:t>
+            </a:r>
+            <a:endParaRPr lang="ru-RU" dirty="0"/>
+          </a:p>
+          <a:p>
+            <a:r>
+              <a:rPr lang="en-US" dirty="0"/>
+              <a:t>B2B </a:t>
+            </a:r>
+            <a:r>
+              <a:rPr lang="ru-RU" dirty="0"/>
+              <a:t>клиенты(компании)</a:t>
+            </a:r>
+            <a:r>
+              <a:rPr lang="en-US" dirty="0"/>
+              <a:t>: 10</a:t>
+            </a:r>
+            <a:r>
+              <a:rPr lang="ru-RU" dirty="0"/>
+              <a:t>0</a:t>
+            </a:r>
+            <a:r>
+              <a:rPr lang="en-US" dirty="0"/>
+              <a:t>000</a:t>
+            </a:r>
+            <a:r>
+              <a:rPr lang="ru-RU" dirty="0"/>
+              <a:t>р</a:t>
+            </a:r>
+            <a:r>
+              <a:rPr lang="en-US" dirty="0"/>
+              <a:t>/</a:t>
+            </a:r>
+            <a:r>
+              <a:rPr lang="ru-RU" dirty="0" err="1"/>
+              <a:t>мес</a:t>
+            </a:r>
+            <a:endParaRPr lang="en-US" dirty="0"/>
+          </a:p>
+        </p:txBody>
+      </p:sp>
+    </p:spTree>
+    <p:extLst>
+      <p:ext uri="{BB962C8B-B14F-4D97-AF65-F5344CB8AC3E}">
+        <p14:creationId xmlns:p14="http://schemas.microsoft.com/office/powerpoint/2010/main" val="3594709994"/>
+      </p:ext>
+    </p:extLst>
+  </p:cSld>
+  <p:clrMapOvr>
+    <a:masterClrMapping/>
+  </p:clrMapOvr>
+  <mc:AlternateContent xmlns:mc="http://schemas.openxmlformats.org/markup-compatibility/2006" xmlns:p14="http://schemas.microsoft.com/office/powerpoint/2010/main">
+    <mc:Choice Requires="p14">
+      <p:transition spd="med" p14:dur="700">
+        <p:fade/>
+      </p:transition>
+    </mc:Choice>
+    <mc:Fallback xmlns="">
+      <p:transition spd="med">
+        <p:fade/>
+      </p:transition>
+    </mc:Fallback>
+  </mc:AlternateContent>
+</p:sld>
+</file>
+
+<file path=ppt/slides/slide7.xml><?xml version="1.0" encoding="utf-8"?>
+<p:sld xmlns:a="http://schemas.openxmlformats.org/drawingml/2006/main" xmlns:r="http://schemas.openxmlformats.org/officeDocument/2006/relationships" xmlns:p="http://schemas.openxmlformats.org/presentationml/2006/main">
+  <p:cSld>
+    <p:spTree>
+      <p:nvGrpSpPr>
+        <p:cNvPr id="1" name=""/>
+        <p:cNvGrpSpPr/>
+        <p:nvPr/>
+      </p:nvGrpSpPr>
+      <p:grpSpPr>
+        <a:xfrm>
+          <a:off x="0" y="0"/>
+          <a:ext cx="0" cy="0"/>
+          <a:chOff x="0" y="0"/>
+          <a:chExt cx="0" cy="0"/>
+        </a:xfrm>
+      </p:grpSpPr>
+      <p:sp>
+        <p:nvSpPr>
+          <p:cNvPr id="2" name="Заголовок 1">
+            <a:extLst>
+              <a:ext uri="{FF2B5EF4-FFF2-40B4-BE49-F238E27FC236}">
+                <a16:creationId xmlns:a16="http://schemas.microsoft.com/office/drawing/2014/main" id="{16A7BA92-48F3-C9AC-93A9-511A781A5DEC}"/>
               </a:ext>
             </a:extLst>
           </p:cNvPr>
@@ -6028,40 +7363,215 @@
             <a:spLocks noGrp="1"/>
           </p:cNvSpPr>
           <p:nvPr>
-            <p:ph type="ftr" sz="quarter" idx="11"/>
+            <p:ph type="title"/>
+          </p:nvPr>
+        </p:nvSpPr>
+        <p:spPr/>
+        <p:txBody>
+          <a:bodyPr/>
+          <a:lstStyle/>
+          <a:p>
+            <a:r>
+              <a:rPr lang="ru-RU" dirty="0"/>
+              <a:t>Окупаемость</a:t>
+            </a:r>
+          </a:p>
+        </p:txBody>
+      </p:sp>
+      <p:sp>
+        <p:nvSpPr>
+          <p:cNvPr id="21" name="Объект 20">
+            <a:extLst>
+              <a:ext uri="{FF2B5EF4-FFF2-40B4-BE49-F238E27FC236}">
+                <a16:creationId xmlns:a16="http://schemas.microsoft.com/office/drawing/2014/main" id="{D6A4D913-98E0-9210-A2A4-4CC47C578CFE}"/>
+              </a:ext>
+            </a:extLst>
+          </p:cNvPr>
+          <p:cNvSpPr>
+            <a:spLocks noGrp="1"/>
+          </p:cNvSpPr>
+          <p:nvPr>
+            <p:ph idx="1"/>
           </p:nvPr>
         </p:nvSpPr>
         <p:spPr>
           <a:xfrm>
-            <a:off x="2271000" y="6590454"/>
-            <a:ext cx="7650000" cy="365126"/>
+            <a:off x="149988" y="1815442"/>
+            <a:ext cx="5946012" cy="4351338"/>
           </a:xfrm>
         </p:spPr>
         <p:txBody>
+          <a:bodyPr>
+            <a:normAutofit/>
+          </a:bodyPr>
+          <a:lstStyle/>
+          <a:p>
+            <a:r>
+              <a:rPr lang="ru-RU" sz="1600" dirty="0"/>
+              <a:t>Прогноз на первый год:</a:t>
+            </a:r>
+          </a:p>
+          <a:p>
+            <a:r>
+              <a:rPr lang="ru-RU" sz="1600" dirty="0"/>
+              <a:t>Пользователи (B2C): 10 000 человек. • Платные подписчики: 500 человек × 149 руб. = 74 500 руб./мес.</a:t>
+            </a:r>
+          </a:p>
+          <a:p>
+            <a:r>
+              <a:rPr lang="ru-RU" sz="1600" dirty="0"/>
+              <a:t>B2B Клиенты: 5 компаний × 20 000 руб. = 100 000 руб./мес.</a:t>
+            </a:r>
+          </a:p>
+          <a:p>
+            <a:r>
+              <a:rPr lang="ru-RU" sz="1600" dirty="0"/>
+              <a:t>Итого доход: ~174 500 руб./мес.</a:t>
+            </a:r>
+          </a:p>
+          <a:p>
+            <a:endParaRPr lang="ru-RU" sz="1600" dirty="0"/>
+          </a:p>
+          <a:p>
+            <a:r>
+              <a:rPr lang="ru-RU" sz="1600" dirty="0"/>
+              <a:t>Расчет окупаемости:</a:t>
+            </a:r>
+          </a:p>
+          <a:p>
+            <a:r>
+              <a:rPr lang="ru-RU" sz="1600" dirty="0"/>
+              <a:t>Ежемесячная чистая прибыль (Доход - OPEX): 174 500 - 120 000 = 54 500 руб. </a:t>
+            </a:r>
+          </a:p>
+          <a:p>
+            <a:r>
+              <a:rPr lang="ru-RU" sz="1600" i="1" dirty="0"/>
+              <a:t>Примечание:</a:t>
+            </a:r>
+            <a:r>
+              <a:rPr lang="ru-RU" sz="1600" dirty="0"/>
+              <a:t> На этапе роста прибыль небольшая, так как основная цель — захват рынка. </a:t>
+            </a:r>
+          </a:p>
+          <a:p>
+            <a:r>
+              <a:rPr lang="ru-RU" sz="1600" dirty="0"/>
+              <a:t>Точка безубыточности: Достигается при масштабировании до 20 000 пользователей и 15 B2B клиентов (~350 000 руб. дохода в месяц).</a:t>
+            </a:r>
+          </a:p>
+        </p:txBody>
+      </p:sp>
+      <p:sp>
+        <p:nvSpPr>
+          <p:cNvPr id="22" name="TextBox 21">
+            <a:extLst>
+              <a:ext uri="{FF2B5EF4-FFF2-40B4-BE49-F238E27FC236}">
+                <a16:creationId xmlns:a16="http://schemas.microsoft.com/office/drawing/2014/main" id="{1148CD01-B147-82E5-D216-6BC2D6CB4820}"/>
+              </a:ext>
+            </a:extLst>
+          </p:cNvPr>
+          <p:cNvSpPr txBox="1"/>
+          <p:nvPr/>
+        </p:nvSpPr>
+        <p:spPr>
+          <a:xfrm>
+            <a:off x="6427433" y="2086252"/>
+            <a:ext cx="2592280" cy="1200329"/>
+          </a:xfrm>
+          <a:prstGeom prst="rect">
+            <a:avLst/>
+          </a:prstGeom>
+          <a:noFill/>
+        </p:spPr>
+        <p:txBody>
+          <a:bodyPr wrap="square" rtlCol="0">
+            <a:spAutoFit/>
+          </a:bodyPr>
+          <a:lstStyle/>
+          <a:p>
+            <a:r>
+              <a:rPr lang="ru-RU" dirty="0"/>
+              <a:t>Срок окупаемости инвестиций</a:t>
+            </a:r>
+            <a:r>
+              <a:rPr lang="en-US" dirty="0"/>
+              <a:t>: </a:t>
+            </a:r>
+            <a:r>
+              <a:rPr lang="ru-RU" dirty="0"/>
+              <a:t>18–24 месяца с момента запуска.</a:t>
+            </a:r>
+          </a:p>
+        </p:txBody>
+      </p:sp>
+    </p:spTree>
+    <p:extLst>
+      <p:ext uri="{BB962C8B-B14F-4D97-AF65-F5344CB8AC3E}">
+        <p14:creationId xmlns:p14="http://schemas.microsoft.com/office/powerpoint/2010/main" val="3483484117"/>
+      </p:ext>
+    </p:extLst>
+  </p:cSld>
+  <p:clrMapOvr>
+    <a:masterClrMapping/>
+  </p:clrMapOvr>
+  <mc:AlternateContent xmlns:mc="http://schemas.openxmlformats.org/markup-compatibility/2006" xmlns:p14="http://schemas.microsoft.com/office/powerpoint/2010/main">
+    <mc:Choice Requires="p14">
+      <p:transition spd="med" p14:dur="700">
+        <p:fade/>
+      </p:transition>
+    </mc:Choice>
+    <mc:Fallback xmlns="">
+      <p:transition spd="med">
+        <p:fade/>
+      </p:transition>
+    </mc:Fallback>
+  </mc:AlternateContent>
+</p:sld>
+</file>
+
+<file path=ppt/slides/slide8.xml><?xml version="1.0" encoding="utf-8"?>
+<p:sld xmlns:a="http://schemas.openxmlformats.org/drawingml/2006/main" xmlns:r="http://schemas.openxmlformats.org/officeDocument/2006/relationships" xmlns:p="http://schemas.openxmlformats.org/presentationml/2006/main">
+  <p:cSld>
+    <p:spTree>
+      <p:nvGrpSpPr>
+        <p:cNvPr id="1" name=""/>
+        <p:cNvGrpSpPr/>
+        <p:nvPr/>
+      </p:nvGrpSpPr>
+      <p:grpSpPr>
+        <a:xfrm>
+          <a:off x="0" y="0"/>
+          <a:ext cx="0" cy="0"/>
+          <a:chOff x="0" y="0"/>
+          <a:chExt cx="0" cy="0"/>
+        </a:xfrm>
+      </p:grpSpPr>
+      <p:sp>
+        <p:nvSpPr>
+          <p:cNvPr id="2" name="Заголовок 1">
+            <a:extLst>
+              <a:ext uri="{FF2B5EF4-FFF2-40B4-BE49-F238E27FC236}">
+                <a16:creationId xmlns:a16="http://schemas.microsoft.com/office/drawing/2014/main" id="{14260471-CF37-41A6-A525-02DD85A555CF}"/>
+              </a:ext>
+            </a:extLst>
+          </p:cNvPr>
+          <p:cNvSpPr>
+            <a:spLocks noGrp="1"/>
+          </p:cNvSpPr>
+          <p:nvPr>
+            <p:ph type="title"/>
+          </p:nvPr>
+        </p:nvSpPr>
+        <p:spPr/>
+        <p:txBody>
           <a:bodyPr/>
           <a:lstStyle/>
           <a:p>
             <a:r>
-              <a:rPr lang="ru-RU" dirty="0">
-                <a:solidFill>
-                  <a:schemeClr val="tx1"/>
-                </a:solidFill>
-              </a:rPr>
-              <a:t>Шаблоны презентаций с сайта </a:t>
-            </a:r>
-            <a:r>
-              <a:rPr lang="en-US" dirty="0">
-                <a:hlinkClick r:id="rId2">
-                  <a:extLst>
-                    <a:ext uri="{A12FA001-AC4F-418D-AE19-62706E023703}">
-                      <ahyp:hlinkClr xmlns:ahyp="http://schemas.microsoft.com/office/drawing/2018/hyperlinkcolor" val="tx"/>
-                    </a:ext>
-                  </a:extLst>
-                </a:hlinkClick>
-              </a:rPr>
-              <a:t>presentation-creation.ru</a:t>
-            </a:r>
-            <a:endParaRPr lang="ru-RU" dirty="0"/>
+              <a:rPr lang="ru-RU" dirty="0"/>
+              <a:t>Аналоги</a:t>
+            </a:r>
           </a:p>
         </p:txBody>
       </p:sp>
@@ -6080,14 +7590,14 @@
           <p:nvPr>
             <p:extLst>
               <p:ext uri="{D42A27DB-BD31-4B8C-83A1-F6EECF244321}">
-                <p14:modId xmlns:p14="http://schemas.microsoft.com/office/powerpoint/2010/main" val="1893481964"/>
+                <p14:modId xmlns:p14="http://schemas.microsoft.com/office/powerpoint/2010/main" val="2858120832"/>
               </p:ext>
             </p:extLst>
           </p:nvPr>
         </p:nvGraphicFramePr>
         <p:xfrm>
-          <a:off x="328556" y="2024321"/>
-          <a:ext cx="8814967" cy="2560320"/>
+          <a:off x="328556" y="2024320"/>
+          <a:ext cx="8814967" cy="3568612"/>
         </p:xfrm>
         <a:graphic>
           <a:graphicData uri="http://schemas.openxmlformats.org/drawingml/2006/table">
@@ -6125,7 +7635,7 @@
                   </a:extLst>
                 </a:gridCol>
               </a:tblGrid>
-              <a:tr h="413122">
+              <a:tr h="892153">
                 <a:tc>
                   <a:txBody>
                     <a:bodyPr/>
@@ -6251,7 +7761,7 @@
                   </a:ext>
                 </a:extLst>
               </a:tr>
-              <a:tr h="413122">
+              <a:tr h="892153">
                 <a:tc>
                   <a:txBody>
                     <a:bodyPr/>
@@ -6356,7 +7866,7 @@
                   </a:ext>
                 </a:extLst>
               </a:tr>
-              <a:tr h="413122">
+              <a:tr h="892153">
                 <a:tc>
                   <a:txBody>
                     <a:bodyPr/>
@@ -6448,7 +7958,7 @@
                   </a:ext>
                 </a:extLst>
               </a:tr>
-              <a:tr h="413122">
+              <a:tr h="892153">
                 <a:tc>
                   <a:txBody>
                     <a:bodyPr/>
@@ -6581,411 +8091,6 @@
 </p:sld>
 </file>
 
-<file path=ppt/slides/slide7.xml><?xml version="1.0" encoding="utf-8"?>
-<p:sld xmlns:a="http://schemas.openxmlformats.org/drawingml/2006/main" xmlns:r="http://schemas.openxmlformats.org/officeDocument/2006/relationships" xmlns:p="http://schemas.openxmlformats.org/presentationml/2006/main">
-  <p:cSld>
-    <p:spTree>
-      <p:nvGrpSpPr>
-        <p:cNvPr id="1" name=""/>
-        <p:cNvGrpSpPr/>
-        <p:nvPr/>
-      </p:nvGrpSpPr>
-      <p:grpSpPr>
-        <a:xfrm>
-          <a:off x="0" y="0"/>
-          <a:ext cx="0" cy="0"/>
-          <a:chOff x="0" y="0"/>
-          <a:chExt cx="0" cy="0"/>
-        </a:xfrm>
-      </p:grpSpPr>
-      <p:sp>
-        <p:nvSpPr>
-          <p:cNvPr id="2" name="Заголовок 1">
-            <a:extLst>
-              <a:ext uri="{FF2B5EF4-FFF2-40B4-BE49-F238E27FC236}">
-                <a16:creationId xmlns:a16="http://schemas.microsoft.com/office/drawing/2014/main" id="{14260471-CF37-41A6-A525-02DD85A555CF}"/>
-              </a:ext>
-            </a:extLst>
-          </p:cNvPr>
-          <p:cNvSpPr>
-            <a:spLocks noGrp="1"/>
-          </p:cNvSpPr>
-          <p:nvPr>
-            <p:ph type="title"/>
-          </p:nvPr>
-        </p:nvSpPr>
-        <p:spPr/>
-        <p:txBody>
-          <a:bodyPr/>
-          <a:lstStyle/>
-          <a:p>
-            <a:r>
-              <a:rPr lang="ru-RU" dirty="0"/>
-              <a:t>Сильные стороны проекта</a:t>
-            </a:r>
-          </a:p>
-        </p:txBody>
-      </p:sp>
-      <p:sp>
-        <p:nvSpPr>
-          <p:cNvPr id="4" name="Нижний колонтитул 4">
-            <a:extLst>
-              <a:ext uri="{FF2B5EF4-FFF2-40B4-BE49-F238E27FC236}">
-                <a16:creationId xmlns:a16="http://schemas.microsoft.com/office/drawing/2014/main" id="{E08C957F-4112-4133-9044-85BF400516CF}"/>
-              </a:ext>
-            </a:extLst>
-          </p:cNvPr>
-          <p:cNvSpPr>
-            <a:spLocks noGrp="1"/>
-          </p:cNvSpPr>
-          <p:nvPr>
-            <p:ph type="ftr" sz="quarter" idx="11"/>
-          </p:nvPr>
-        </p:nvSpPr>
-        <p:spPr>
-          <a:xfrm>
-            <a:off x="2271000" y="6590454"/>
-            <a:ext cx="7650000" cy="365126"/>
-          </a:xfrm>
-        </p:spPr>
-        <p:txBody>
-          <a:bodyPr/>
-          <a:lstStyle/>
-          <a:p>
-            <a:r>
-              <a:rPr lang="ru-RU" dirty="0">
-                <a:solidFill>
-                  <a:schemeClr val="tx1"/>
-                </a:solidFill>
-              </a:rPr>
-              <a:t>Шаблоны презентаций с сайта </a:t>
-            </a:r>
-            <a:r>
-              <a:rPr lang="en-US" dirty="0">
-                <a:hlinkClick r:id="rId2">
-                  <a:extLst>
-                    <a:ext uri="{A12FA001-AC4F-418D-AE19-62706E023703}">
-                      <ahyp:hlinkClr xmlns:ahyp="http://schemas.microsoft.com/office/drawing/2018/hyperlinkcolor" val="tx"/>
-                    </a:ext>
-                  </a:extLst>
-                </a:hlinkClick>
-              </a:rPr>
-              <a:t>presentation-creation.ru</a:t>
-            </a:r>
-            <a:endParaRPr lang="ru-RU" dirty="0"/>
-          </a:p>
-        </p:txBody>
-      </p:sp>
-      <p:sp>
-        <p:nvSpPr>
-          <p:cNvPr id="3" name="TextBox 2">
-            <a:extLst>
-              <a:ext uri="{FF2B5EF4-FFF2-40B4-BE49-F238E27FC236}">
-                <a16:creationId xmlns:a16="http://schemas.microsoft.com/office/drawing/2014/main" id="{AA504A93-B98E-7B6F-424E-255FACCF13FA}"/>
-              </a:ext>
-            </a:extLst>
-          </p:cNvPr>
-          <p:cNvSpPr txBox="1"/>
-          <p:nvPr/>
-        </p:nvSpPr>
-        <p:spPr>
-          <a:xfrm>
-            <a:off x="390618" y="1855432"/>
-            <a:ext cx="8673483" cy="3046988"/>
-          </a:xfrm>
-          <a:prstGeom prst="rect">
-            <a:avLst/>
-          </a:prstGeom>
-          <a:noFill/>
-        </p:spPr>
-        <p:txBody>
-          <a:bodyPr wrap="square" rtlCol="0">
-            <a:spAutoFit/>
-          </a:bodyPr>
-          <a:lstStyle/>
-          <a:p>
-            <a:r>
-              <a:rPr lang="ru-RU" sz="2400" dirty="0"/>
-              <a:t>Очень точные прогноз</a:t>
-            </a:r>
-            <a:r>
-              <a:rPr lang="en-US" sz="2400" dirty="0"/>
-              <a:t>:</a:t>
-            </a:r>
-          </a:p>
-          <a:p>
-            <a:r>
-              <a:rPr lang="ru-RU" sz="2400" dirty="0"/>
-              <a:t>	Из за локальной работы сервиса прогноз становиться 	крайне точным</a:t>
-            </a:r>
-          </a:p>
-          <a:p>
-            <a:r>
-              <a:rPr lang="ru-RU" sz="2400" dirty="0"/>
-              <a:t>Один из немногих Российских аналогов</a:t>
-            </a:r>
-            <a:r>
-              <a:rPr lang="en-US" sz="2400" dirty="0"/>
-              <a:t>:</a:t>
-            </a:r>
-          </a:p>
-          <a:p>
-            <a:r>
-              <a:rPr lang="en-US" sz="2400" dirty="0"/>
-              <a:t>	</a:t>
-            </a:r>
-            <a:r>
-              <a:rPr lang="ru-RU" sz="2400" dirty="0"/>
-              <a:t>Основную конкуренцию составляют только иностранные 	аналоги </a:t>
-            </a:r>
-          </a:p>
-          <a:p>
-            <a:endParaRPr lang="ru-RU" sz="2400" dirty="0"/>
-          </a:p>
-          <a:p>
-            <a:endParaRPr lang="ru-RU" sz="2400" dirty="0"/>
-          </a:p>
-        </p:txBody>
-      </p:sp>
-    </p:spTree>
-    <p:extLst>
-      <p:ext uri="{BB962C8B-B14F-4D97-AF65-F5344CB8AC3E}">
-        <p14:creationId xmlns:p14="http://schemas.microsoft.com/office/powerpoint/2010/main" val="2086386438"/>
-      </p:ext>
-    </p:extLst>
-  </p:cSld>
-  <p:clrMapOvr>
-    <a:masterClrMapping/>
-  </p:clrMapOvr>
-  <mc:AlternateContent xmlns:mc="http://schemas.openxmlformats.org/markup-compatibility/2006" xmlns:p14="http://schemas.microsoft.com/office/powerpoint/2010/main">
-    <mc:Choice Requires="p14">
-      <p:transition spd="med" p14:dur="700">
-        <p:fade/>
-      </p:transition>
-    </mc:Choice>
-    <mc:Fallback xmlns="">
-      <p:transition spd="med">
-        <p:fade/>
-      </p:transition>
-    </mc:Fallback>
-  </mc:AlternateContent>
-</p:sld>
-</file>
-
-<file path=ppt/slides/slide8.xml><?xml version="1.0" encoding="utf-8"?>
-<p:sld xmlns:a="http://schemas.openxmlformats.org/drawingml/2006/main" xmlns:r="http://schemas.openxmlformats.org/officeDocument/2006/relationships" xmlns:p="http://schemas.openxmlformats.org/presentationml/2006/main">
-  <p:cSld>
-    <p:spTree>
-      <p:nvGrpSpPr>
-        <p:cNvPr id="1" name=""/>
-        <p:cNvGrpSpPr/>
-        <p:nvPr/>
-      </p:nvGrpSpPr>
-      <p:grpSpPr>
-        <a:xfrm>
-          <a:off x="0" y="0"/>
-          <a:ext cx="0" cy="0"/>
-          <a:chOff x="0" y="0"/>
-          <a:chExt cx="0" cy="0"/>
-        </a:xfrm>
-      </p:grpSpPr>
-      <p:sp>
-        <p:nvSpPr>
-          <p:cNvPr id="2" name="Заголовок 1">
-            <a:extLst>
-              <a:ext uri="{FF2B5EF4-FFF2-40B4-BE49-F238E27FC236}">
-                <a16:creationId xmlns:a16="http://schemas.microsoft.com/office/drawing/2014/main" id="{14260471-CF37-41A6-A525-02DD85A555CF}"/>
-              </a:ext>
-            </a:extLst>
-          </p:cNvPr>
-          <p:cNvSpPr>
-            <a:spLocks noGrp="1"/>
-          </p:cNvSpPr>
-          <p:nvPr>
-            <p:ph type="title"/>
-          </p:nvPr>
-        </p:nvSpPr>
-        <p:spPr/>
-        <p:txBody>
-          <a:bodyPr/>
-          <a:lstStyle/>
-          <a:p>
-            <a:r>
-              <a:rPr lang="ru-RU" dirty="0"/>
-              <a:t>Недостатки</a:t>
-            </a:r>
-          </a:p>
-        </p:txBody>
-      </p:sp>
-      <p:sp>
-        <p:nvSpPr>
-          <p:cNvPr id="4" name="Нижний колонтитул 4">
-            <a:extLst>
-              <a:ext uri="{FF2B5EF4-FFF2-40B4-BE49-F238E27FC236}">
-                <a16:creationId xmlns:a16="http://schemas.microsoft.com/office/drawing/2014/main" id="{E08C957F-4112-4133-9044-85BF400516CF}"/>
-              </a:ext>
-            </a:extLst>
-          </p:cNvPr>
-          <p:cNvSpPr>
-            <a:spLocks noGrp="1"/>
-          </p:cNvSpPr>
-          <p:nvPr>
-            <p:ph type="ftr" sz="quarter" idx="11"/>
-          </p:nvPr>
-        </p:nvSpPr>
-        <p:spPr>
-          <a:xfrm>
-            <a:off x="2271000" y="6590454"/>
-            <a:ext cx="7650000" cy="365126"/>
-          </a:xfrm>
-        </p:spPr>
-        <p:txBody>
-          <a:bodyPr/>
-          <a:lstStyle/>
-          <a:p>
-            <a:r>
-              <a:rPr lang="ru-RU" dirty="0">
-                <a:solidFill>
-                  <a:schemeClr val="tx1"/>
-                </a:solidFill>
-              </a:rPr>
-              <a:t>Шаблоны презентаций с сайта </a:t>
-            </a:r>
-            <a:r>
-              <a:rPr lang="en-US" dirty="0">
-                <a:hlinkClick r:id="rId2">
-                  <a:extLst>
-                    <a:ext uri="{A12FA001-AC4F-418D-AE19-62706E023703}">
-                      <ahyp:hlinkClr xmlns:ahyp="http://schemas.microsoft.com/office/drawing/2018/hyperlinkcolor" val="tx"/>
-                    </a:ext>
-                  </a:extLst>
-                </a:hlinkClick>
-              </a:rPr>
-              <a:t>presentation-creation.ru</a:t>
-            </a:r>
-            <a:endParaRPr lang="ru-RU" dirty="0"/>
-          </a:p>
-        </p:txBody>
-      </p:sp>
-      <p:sp>
-        <p:nvSpPr>
-          <p:cNvPr id="7" name="Объект 2">
-            <a:extLst>
-              <a:ext uri="{FF2B5EF4-FFF2-40B4-BE49-F238E27FC236}">
-                <a16:creationId xmlns:a16="http://schemas.microsoft.com/office/drawing/2014/main" id="{240D9285-B0C6-4610-955E-F20B74601DB9}"/>
-              </a:ext>
-            </a:extLst>
-          </p:cNvPr>
-          <p:cNvSpPr>
-            <a:spLocks noGrp="1"/>
-          </p:cNvSpPr>
-          <p:nvPr>
-            <p:ph idx="1"/>
-          </p:nvPr>
-        </p:nvSpPr>
-        <p:spPr>
-          <a:xfrm>
-            <a:off x="422941" y="2124386"/>
-            <a:ext cx="5794880" cy="3719196"/>
-          </a:xfrm>
-        </p:spPr>
-        <p:txBody>
-          <a:bodyPr>
-            <a:normAutofit/>
-          </a:bodyPr>
-          <a:lstStyle/>
-          <a:p>
-            <a:pPr marL="0" indent="0">
-              <a:buNone/>
-            </a:pPr>
-            <a:r>
-              <a:rPr lang="ru-RU" sz="2000" dirty="0"/>
-              <a:t>Очень сложно создавать прогноз для других городов</a:t>
-            </a:r>
-            <a:r>
-              <a:rPr lang="en-US" sz="2000" dirty="0"/>
-              <a:t>:</a:t>
-            </a:r>
-          </a:p>
-          <a:p>
-            <a:pPr marL="0" indent="0">
-              <a:buNone/>
-            </a:pPr>
-            <a:r>
-              <a:rPr lang="ru-RU" sz="2000" dirty="0"/>
-              <a:t>	Это связано с тем что ИИ учитывает 	мельчайшие детали характерные для 	определённых регионов</a:t>
-            </a:r>
-          </a:p>
-          <a:p>
-            <a:pPr marL="0" indent="0">
-              <a:buNone/>
-            </a:pPr>
-            <a:r>
-              <a:rPr lang="ru-RU" sz="2000" dirty="0"/>
-              <a:t>Сложность монетизации</a:t>
-            </a:r>
-            <a:r>
-              <a:rPr lang="en-US" sz="2000" dirty="0"/>
-              <a:t>:</a:t>
-            </a:r>
-          </a:p>
-          <a:p>
-            <a:pPr marL="0" indent="0">
-              <a:buNone/>
-            </a:pPr>
-            <a:r>
-              <a:rPr lang="en-US" sz="2000" dirty="0"/>
-              <a:t>	</a:t>
-            </a:r>
-            <a:r>
-              <a:rPr lang="ru-RU" sz="2000" dirty="0"/>
-              <a:t>Люди в промышленных городах уже 	привыкли к теме </a:t>
-            </a:r>
-            <a:r>
-              <a:rPr lang="en-US" sz="2000" dirty="0"/>
-              <a:t>’’</a:t>
-            </a:r>
-            <a:r>
-              <a:rPr lang="ru-RU" sz="2000" dirty="0"/>
-              <a:t>Чёрного неба</a:t>
-            </a:r>
-            <a:r>
-              <a:rPr lang="en-US" sz="2000" dirty="0"/>
-              <a:t>’’ </a:t>
-            </a:r>
-            <a:r>
-              <a:rPr lang="ru-RU" sz="2000" dirty="0"/>
-              <a:t>и не все 	готовы платить за эту информацию</a:t>
-            </a:r>
-            <a:endParaRPr lang="en-US" sz="2000" dirty="0"/>
-          </a:p>
-        </p:txBody>
-      </p:sp>
-    </p:spTree>
-    <p:extLst>
-      <p:ext uri="{BB962C8B-B14F-4D97-AF65-F5344CB8AC3E}">
-        <p14:creationId xmlns:p14="http://schemas.microsoft.com/office/powerpoint/2010/main" val="692898452"/>
-      </p:ext>
-    </p:extLst>
-  </p:cSld>
-  <p:clrMapOvr>
-    <a:masterClrMapping/>
-  </p:clrMapOvr>
-  <mc:AlternateContent xmlns:mc="http://schemas.openxmlformats.org/markup-compatibility/2006" xmlns:p14="http://schemas.microsoft.com/office/powerpoint/2010/main">
-    <mc:Choice Requires="p14">
-      <p:transition spd="med" p14:dur="700">
-        <p:fade/>
-      </p:transition>
-    </mc:Choice>
-    <mc:Fallback xmlns="">
-      <p:transition spd="med">
-        <p:fade/>
-      </p:transition>
-    </mc:Fallback>
-  </mc:AlternateContent>
-</p:sld>
-</file>
-
 <file path=ppt/slides/slide9.xml><?xml version="1.0" encoding="utf-8"?>
 <p:sld xmlns:a="http://schemas.openxmlformats.org/drawingml/2006/main" xmlns:r="http://schemas.openxmlformats.org/officeDocument/2006/relationships" xmlns:p="http://schemas.openxmlformats.org/presentationml/2006/main">
   <p:cSld>
@@ -7008,7 +8113,7 @@
           <p:cNvPr id="2" name="Заголовок 1">
             <a:extLst>
               <a:ext uri="{FF2B5EF4-FFF2-40B4-BE49-F238E27FC236}">
-                <a16:creationId xmlns:a16="http://schemas.microsoft.com/office/drawing/2014/main" id="{EC5FF812-1BC1-47CA-B0CB-99EAEC2C72BD}"/>
+                <a16:creationId xmlns:a16="http://schemas.microsoft.com/office/drawing/2014/main" id="{14260471-CF37-41A6-A525-02DD85A555CF}"/>
               </a:ext>
             </a:extLst>
           </p:cNvPr>
@@ -7026,17 +8131,67 @@
           <a:p>
             <a:r>
               <a:rPr lang="ru-RU" dirty="0"/>
-              <a:t>Плюсы для города</a:t>
-            </a:r>
-          </a:p>
-        </p:txBody>
-      </p:sp>
-      <p:sp>
-        <p:nvSpPr>
-          <p:cNvPr id="3" name="Объект 2">
-            <a:extLst>
-              <a:ext uri="{FF2B5EF4-FFF2-40B4-BE49-F238E27FC236}">
-                <a16:creationId xmlns:a16="http://schemas.microsoft.com/office/drawing/2014/main" id="{5A6A23B9-9A27-40FC-81A7-B848684D061E}"/>
+              <a:t>Недостатки</a:t>
+            </a:r>
+          </a:p>
+        </p:txBody>
+      </p:sp>
+      <p:sp>
+        <p:nvSpPr>
+          <p:cNvPr id="4" name="Нижний колонтитул 4">
+            <a:extLst>
+              <a:ext uri="{FF2B5EF4-FFF2-40B4-BE49-F238E27FC236}">
+                <a16:creationId xmlns:a16="http://schemas.microsoft.com/office/drawing/2014/main" id="{E08C957F-4112-4133-9044-85BF400516CF}"/>
+              </a:ext>
+            </a:extLst>
+          </p:cNvPr>
+          <p:cNvSpPr>
+            <a:spLocks noGrp="1"/>
+          </p:cNvSpPr>
+          <p:nvPr>
+            <p:ph type="ftr" sz="quarter" idx="11"/>
+          </p:nvPr>
+        </p:nvSpPr>
+        <p:spPr>
+          <a:xfrm>
+            <a:off x="2271000" y="6590454"/>
+            <a:ext cx="7650000" cy="365126"/>
+          </a:xfrm>
+        </p:spPr>
+        <p:txBody>
+          <a:bodyPr/>
+          <a:lstStyle/>
+          <a:p>
+            <a:r>
+              <a:rPr lang="ru-RU" dirty="0">
+                <a:solidFill>
+                  <a:schemeClr val="tx1"/>
+                </a:solidFill>
+              </a:rPr>
+              <a:t>Шаблоны презентаций с сайта </a:t>
+            </a:r>
+            <a:r>
+              <a:rPr lang="en-US" dirty="0">
+                <a:hlinkClick r:id="rId2">
+                  <a:extLst>
+                    <a:ext uri="{A12FA001-AC4F-418D-AE19-62706E023703}">
+                      <ahyp:hlinkClr xmlns:ahyp="http://schemas.microsoft.com/office/drawing/2018/hyperlinkcolor" val="tx"/>
+                    </a:ext>
+                  </a:extLst>
+                </a:hlinkClick>
+              </a:rPr>
+              <a:t>presentation-creation.ru</a:t>
+            </a:r>
+            <a:endParaRPr lang="ru-RU" dirty="0"/>
+          </a:p>
+        </p:txBody>
+      </p:sp>
+      <p:sp>
+        <p:nvSpPr>
+          <p:cNvPr id="7" name="Объект 2">
+            <a:extLst>
+              <a:ext uri="{FF2B5EF4-FFF2-40B4-BE49-F238E27FC236}">
+                <a16:creationId xmlns:a16="http://schemas.microsoft.com/office/drawing/2014/main" id="{240D9285-B0C6-4610-955E-F20B74601DB9}"/>
               </a:ext>
             </a:extLst>
           </p:cNvPr>
@@ -7049,43 +8204,86 @@
         </p:nvSpPr>
         <p:spPr>
           <a:xfrm>
-            <a:off x="149988" y="1815442"/>
-            <a:ext cx="9295854" cy="4351338"/>
+            <a:off x="422941" y="2124386"/>
+            <a:ext cx="5794880" cy="3719196"/>
           </a:xfrm>
         </p:spPr>
         <p:txBody>
-          <a:bodyPr/>
+          <a:bodyPr>
+            <a:normAutofit/>
+          </a:bodyPr>
           <a:lstStyle/>
-          <a:p>
-            <a:r>
-              <a:rPr lang="ru-RU" dirty="0"/>
-              <a:t>Уменьшение случаев обострения респираторных заболеваний.</a:t>
-            </a:r>
-          </a:p>
-          <a:p>
-            <a:r>
-              <a:rPr lang="ru-RU" dirty="0"/>
-              <a:t>Повышение экологической грамотности населения.</a:t>
-            </a:r>
-          </a:p>
-          <a:p>
-            <a:r>
-              <a:rPr lang="ru-RU" dirty="0"/>
-              <a:t>Объективный контроль ситуации в динамике, а не в статике.</a:t>
-            </a:r>
-          </a:p>
           <a:p>
             <a:pPr marL="0" indent="0">
               <a:buNone/>
             </a:pPr>
-            <a:endParaRPr lang="ru-RU" dirty="0"/>
+            <a:r>
+              <a:rPr lang="ru-RU" sz="2000" dirty="0"/>
+              <a:t>Очень сложно создавать прогноз для других городов</a:t>
+            </a:r>
+            <a:r>
+              <a:rPr lang="en-US" sz="2000" dirty="0"/>
+              <a:t>:</a:t>
+            </a:r>
+          </a:p>
+          <a:p>
+            <a:pPr marL="0" indent="0">
+              <a:buNone/>
+            </a:pPr>
+            <a:r>
+              <a:rPr lang="ru-RU" sz="2000" dirty="0"/>
+              <a:t>	Это связано с тем что ИИ учитывает 	мельчайшие детали характерные для 	определённых регионов</a:t>
+            </a:r>
+          </a:p>
+          <a:p>
+            <a:pPr marL="0" indent="0">
+              <a:buNone/>
+            </a:pPr>
+            <a:r>
+              <a:rPr lang="ru-RU" sz="2000" dirty="0"/>
+              <a:t>Сложность монетизации</a:t>
+            </a:r>
+            <a:r>
+              <a:rPr lang="en-US" sz="2000" dirty="0"/>
+              <a:t>:</a:t>
+            </a:r>
+          </a:p>
+          <a:p>
+            <a:pPr marL="0" indent="0">
+              <a:buNone/>
+            </a:pPr>
+            <a:r>
+              <a:rPr lang="en-US" sz="2000" dirty="0"/>
+              <a:t>	</a:t>
+            </a:r>
+            <a:r>
+              <a:rPr lang="ru-RU" sz="2000" dirty="0"/>
+              <a:t>Люди в промышленных городах уже 	привыкли к теме </a:t>
+            </a:r>
+            <a:r>
+              <a:rPr lang="en-US" sz="2000" dirty="0"/>
+              <a:t>’’</a:t>
+            </a:r>
+            <a:r>
+              <a:rPr lang="ru-RU" sz="2000" dirty="0"/>
+              <a:t>Чёрного неба</a:t>
+            </a:r>
+            <a:r>
+              <a:rPr lang="en-US" sz="2000" dirty="0"/>
+              <a:t>’’ </a:t>
+            </a:r>
+            <a:r>
+              <a:rPr lang="ru-RU" sz="2000" dirty="0"/>
+              <a:t>и не все 	готовы платить за эту информацию</a:t>
+            </a:r>
+            <a:endParaRPr lang="en-US" sz="2000" dirty="0"/>
           </a:p>
         </p:txBody>
       </p:sp>
     </p:spTree>
     <p:extLst>
       <p:ext uri="{BB962C8B-B14F-4D97-AF65-F5344CB8AC3E}">
-        <p14:creationId xmlns:p14="http://schemas.microsoft.com/office/powerpoint/2010/main" val="1391160550"/>
+        <p14:creationId xmlns:p14="http://schemas.microsoft.com/office/powerpoint/2010/main" val="692898452"/>
       </p:ext>
     </p:extLst>
   </p:cSld>

--- a/Air Project.pptx
+++ b/Air Project.pptx
@@ -6,16 +6,15 @@
   </p:sldMasterIdLst>
   <p:sldIdLst>
     <p:sldId id="256" r:id="rId2"/>
-    <p:sldId id="258" r:id="rId3"/>
-    <p:sldId id="259" r:id="rId4"/>
-    <p:sldId id="260" r:id="rId5"/>
-    <p:sldId id="261" r:id="rId6"/>
-    <p:sldId id="267" r:id="rId7"/>
-    <p:sldId id="268" r:id="rId8"/>
-    <p:sldId id="264" r:id="rId9"/>
-    <p:sldId id="265" r:id="rId10"/>
-    <p:sldId id="263" r:id="rId11"/>
-    <p:sldId id="266" r:id="rId12"/>
+    <p:sldId id="269" r:id="rId3"/>
+    <p:sldId id="258" r:id="rId4"/>
+    <p:sldId id="259" r:id="rId5"/>
+    <p:sldId id="260" r:id="rId6"/>
+    <p:sldId id="261" r:id="rId7"/>
+    <p:sldId id="267" r:id="rId8"/>
+    <p:sldId id="268" r:id="rId9"/>
+    <p:sldId id="264" r:id="rId10"/>
+    <p:sldId id="266" r:id="rId11"/>
   </p:sldIdLst>
   <p:sldSz cx="12192000" cy="6858000"/>
   <p:notesSz cx="6858000" cy="9144000"/>
@@ -245,6 +244,11 @@
               </a:ln>
               <a:effectLst/>
             </c:spPr>
+            <c:extLst>
+              <c:ext xmlns:c16="http://schemas.microsoft.com/office/drawing/2014/chart" uri="{C3380CC4-5D6E-409C-BE32-E72D297353CC}">
+                <c16:uniqueId val="{00000001-FA76-4146-88CF-7C6C8AF5EFA1}"/>
+              </c:ext>
+            </c:extLst>
           </c:dPt>
           <c:dPt>
             <c:idx val="1"/>
@@ -260,6 +264,11 @@
               </a:ln>
               <a:effectLst/>
             </c:spPr>
+            <c:extLst>
+              <c:ext xmlns:c16="http://schemas.microsoft.com/office/drawing/2014/chart" uri="{C3380CC4-5D6E-409C-BE32-E72D297353CC}">
+                <c16:uniqueId val="{00000003-FA76-4146-88CF-7C6C8AF5EFA1}"/>
+              </c:ext>
+            </c:extLst>
           </c:dPt>
           <c:dPt>
             <c:idx val="2"/>
@@ -275,6 +284,11 @@
               </a:ln>
               <a:effectLst/>
             </c:spPr>
+            <c:extLst>
+              <c:ext xmlns:c16="http://schemas.microsoft.com/office/drawing/2014/chart" uri="{C3380CC4-5D6E-409C-BE32-E72D297353CC}">
+                <c16:uniqueId val="{00000005-FA76-4146-88CF-7C6C8AF5EFA1}"/>
+              </c:ext>
+            </c:extLst>
           </c:dPt>
           <c:dPt>
             <c:idx val="3"/>
@@ -290,6 +304,11 @@
               </a:ln>
               <a:effectLst/>
             </c:spPr>
+            <c:extLst>
+              <c:ext xmlns:c16="http://schemas.microsoft.com/office/drawing/2014/chart" uri="{C3380CC4-5D6E-409C-BE32-E72D297353CC}">
+                <c16:uniqueId val="{00000007-FA76-4146-88CF-7C6C8AF5EFA1}"/>
+              </c:ext>
+            </c:extLst>
           </c:dPt>
           <c:cat>
             <c:strRef>
@@ -4726,197 +4745,6 @@
       </p:grpSpPr>
       <p:sp>
         <p:nvSpPr>
-          <p:cNvPr id="2" name="Заголовок 1">
-            <a:extLst>
-              <a:ext uri="{FF2B5EF4-FFF2-40B4-BE49-F238E27FC236}">
-                <a16:creationId xmlns:a16="http://schemas.microsoft.com/office/drawing/2014/main" id="{14260471-CF37-41A6-A525-02DD85A555CF}"/>
-              </a:ext>
-            </a:extLst>
-          </p:cNvPr>
-          <p:cNvSpPr>
-            <a:spLocks noGrp="1"/>
-          </p:cNvSpPr>
-          <p:nvPr>
-            <p:ph type="title"/>
-          </p:nvPr>
-        </p:nvSpPr>
-        <p:spPr/>
-        <p:txBody>
-          <a:bodyPr/>
-          <a:lstStyle/>
-          <a:p>
-            <a:r>
-              <a:rPr lang="ru-RU" dirty="0"/>
-              <a:t>Сильные стороны проекта</a:t>
-            </a:r>
-          </a:p>
-        </p:txBody>
-      </p:sp>
-      <p:sp>
-        <p:nvSpPr>
-          <p:cNvPr id="4" name="Нижний колонтитул 4">
-            <a:extLst>
-              <a:ext uri="{FF2B5EF4-FFF2-40B4-BE49-F238E27FC236}">
-                <a16:creationId xmlns:a16="http://schemas.microsoft.com/office/drawing/2014/main" id="{E08C957F-4112-4133-9044-85BF400516CF}"/>
-              </a:ext>
-            </a:extLst>
-          </p:cNvPr>
-          <p:cNvSpPr>
-            <a:spLocks noGrp="1"/>
-          </p:cNvSpPr>
-          <p:nvPr>
-            <p:ph type="ftr" sz="quarter" idx="11"/>
-          </p:nvPr>
-        </p:nvSpPr>
-        <p:spPr>
-          <a:xfrm>
-            <a:off x="2271000" y="6590454"/>
-            <a:ext cx="7650000" cy="365126"/>
-          </a:xfrm>
-        </p:spPr>
-        <p:txBody>
-          <a:bodyPr/>
-          <a:lstStyle/>
-          <a:p>
-            <a:r>
-              <a:rPr lang="ru-RU" dirty="0">
-                <a:solidFill>
-                  <a:schemeClr val="tx1"/>
-                </a:solidFill>
-              </a:rPr>
-              <a:t>Шаблоны презентаций с сайта </a:t>
-            </a:r>
-            <a:r>
-              <a:rPr lang="en-US" dirty="0">
-                <a:hlinkClick r:id="rId2">
-                  <a:extLst>
-                    <a:ext uri="{A12FA001-AC4F-418D-AE19-62706E023703}">
-                      <ahyp:hlinkClr xmlns:ahyp="http://schemas.microsoft.com/office/drawing/2018/hyperlinkcolor" val="tx"/>
-                    </a:ext>
-                  </a:extLst>
-                </a:hlinkClick>
-              </a:rPr>
-              <a:t>presentation-creation.ru</a:t>
-            </a:r>
-            <a:endParaRPr lang="ru-RU" dirty="0"/>
-          </a:p>
-        </p:txBody>
-      </p:sp>
-      <p:sp>
-        <p:nvSpPr>
-          <p:cNvPr id="3" name="TextBox 2">
-            <a:extLst>
-              <a:ext uri="{FF2B5EF4-FFF2-40B4-BE49-F238E27FC236}">
-                <a16:creationId xmlns:a16="http://schemas.microsoft.com/office/drawing/2014/main" id="{AA504A93-B98E-7B6F-424E-255FACCF13FA}"/>
-              </a:ext>
-            </a:extLst>
-          </p:cNvPr>
-          <p:cNvSpPr txBox="1"/>
-          <p:nvPr/>
-        </p:nvSpPr>
-        <p:spPr>
-          <a:xfrm>
-            <a:off x="390618" y="1855432"/>
-            <a:ext cx="8673483" cy="3046988"/>
-          </a:xfrm>
-          <a:prstGeom prst="rect">
-            <a:avLst/>
-          </a:prstGeom>
-          <a:noFill/>
-        </p:spPr>
-        <p:txBody>
-          <a:bodyPr wrap="square" rtlCol="0">
-            <a:spAutoFit/>
-          </a:bodyPr>
-          <a:lstStyle/>
-          <a:p>
-            <a:r>
-              <a:rPr lang="ru-RU" sz="2400" dirty="0"/>
-              <a:t>Очень точные прогноз</a:t>
-            </a:r>
-            <a:r>
-              <a:rPr lang="en-US" sz="2400" dirty="0"/>
-              <a:t>:</a:t>
-            </a:r>
-          </a:p>
-          <a:p>
-            <a:r>
-              <a:rPr lang="ru-RU" sz="2400" dirty="0"/>
-              <a:t>	Из за локальной работы сервиса прогноз становиться 	крайне точным</a:t>
-            </a:r>
-          </a:p>
-          <a:p>
-            <a:r>
-              <a:rPr lang="ru-RU" sz="2400" dirty="0"/>
-              <a:t>Один из немногих Российских аналогов</a:t>
-            </a:r>
-            <a:r>
-              <a:rPr lang="en-US" sz="2400" dirty="0"/>
-              <a:t>:</a:t>
-            </a:r>
-          </a:p>
-          <a:p>
-            <a:r>
-              <a:rPr lang="en-US" sz="2400" dirty="0"/>
-              <a:t>	</a:t>
-            </a:r>
-            <a:r>
-              <a:rPr lang="ru-RU" sz="2400" dirty="0"/>
-              <a:t>Основную конкуренцию составляют только иностранные 	аналоги </a:t>
-            </a:r>
-          </a:p>
-          <a:p>
-            <a:endParaRPr lang="ru-RU" sz="2400" dirty="0"/>
-          </a:p>
-          <a:p>
-            <a:endParaRPr lang="ru-RU" sz="2400" dirty="0"/>
-          </a:p>
-        </p:txBody>
-      </p:sp>
-    </p:spTree>
-    <p:extLst>
-      <p:ext uri="{BB962C8B-B14F-4D97-AF65-F5344CB8AC3E}">
-        <p14:creationId xmlns:p14="http://schemas.microsoft.com/office/powerpoint/2010/main" val="2086386438"/>
-      </p:ext>
-    </p:extLst>
-  </p:cSld>
-  <p:clrMapOvr>
-    <a:masterClrMapping/>
-  </p:clrMapOvr>
-  <mc:AlternateContent xmlns:mc="http://schemas.openxmlformats.org/markup-compatibility/2006" xmlns:p14="http://schemas.microsoft.com/office/powerpoint/2010/main">
-    <mc:Choice Requires="p14">
-      <p:transition spd="med" p14:dur="700">
-        <p:fade/>
-      </p:transition>
-    </mc:Choice>
-    <mc:Fallback xmlns="">
-      <p:transition spd="med">
-        <p:fade/>
-      </p:transition>
-    </mc:Fallback>
-  </mc:AlternateContent>
-</p:sld>
-</file>
-
-<file path=ppt/slides/slide11.xml><?xml version="1.0" encoding="utf-8"?>
-<p:sld xmlns:a="http://schemas.openxmlformats.org/drawingml/2006/main" xmlns:r="http://schemas.openxmlformats.org/officeDocument/2006/relationships" xmlns:p="http://schemas.openxmlformats.org/presentationml/2006/main">
-  <p:cSld>
-    <p:spTree>
-      <p:nvGrpSpPr>
-        <p:cNvPr id="1" name=""/>
-        <p:cNvGrpSpPr/>
-        <p:nvPr/>
-      </p:nvGrpSpPr>
-      <p:grpSpPr>
-        <a:xfrm>
-          <a:off x="0" y="0"/>
-          <a:ext cx="0" cy="0"/>
-          <a:chOff x="0" y="0"/>
-          <a:chExt cx="0" cy="0"/>
-        </a:xfrm>
-      </p:grpSpPr>
-      <p:sp>
-        <p:nvSpPr>
           <p:cNvPr id="4" name="Заголовок 9">
             <a:extLst>
               <a:ext uri="{FF2B5EF4-FFF2-40B4-BE49-F238E27FC236}">
@@ -5183,6 +5011,78 @@
           </a:p>
         </p:txBody>
       </p:sp>
+      <p:pic>
+        <p:nvPicPr>
+          <p:cNvPr id="3" name="Рисунок 2">
+            <a:extLst>
+              <a:ext uri="{FF2B5EF4-FFF2-40B4-BE49-F238E27FC236}">
+                <a16:creationId xmlns:a16="http://schemas.microsoft.com/office/drawing/2014/main" id="{82AD868C-C44C-6DC2-FF1A-5C2E3A61AE1C}"/>
+              </a:ext>
+            </a:extLst>
+          </p:cNvPr>
+          <p:cNvPicPr>
+            <a:picLocks noChangeAspect="1"/>
+          </p:cNvPicPr>
+          <p:nvPr/>
+        </p:nvPicPr>
+        <p:blipFill>
+          <a:blip r:embed="rId2">
+            <a:extLst>
+              <a:ext uri="{28A0092B-C50C-407E-A947-70E740481C1C}">
+                <a14:useLocalDpi xmlns:a14="http://schemas.microsoft.com/office/drawing/2010/main" val="0"/>
+              </a:ext>
+            </a:extLst>
+          </a:blip>
+          <a:stretch>
+            <a:fillRect/>
+          </a:stretch>
+        </p:blipFill>
+        <p:spPr>
+          <a:xfrm>
+            <a:off x="5314950" y="4886183"/>
+            <a:ext cx="1562100" cy="1562100"/>
+          </a:xfrm>
+          <a:prstGeom prst="rect">
+            <a:avLst/>
+          </a:prstGeom>
+        </p:spPr>
+      </p:pic>
+      <p:sp>
+        <p:nvSpPr>
+          <p:cNvPr id="5" name="TextBox 4">
+            <a:extLst>
+              <a:ext uri="{FF2B5EF4-FFF2-40B4-BE49-F238E27FC236}">
+                <a16:creationId xmlns:a16="http://schemas.microsoft.com/office/drawing/2014/main" id="{808E5EFA-47DB-3B55-3F30-8918A2AD61DD}"/>
+              </a:ext>
+            </a:extLst>
+          </p:cNvPr>
+          <p:cNvSpPr txBox="1"/>
+          <p:nvPr/>
+        </p:nvSpPr>
+        <p:spPr>
+          <a:xfrm>
+            <a:off x="5677468" y="4507453"/>
+            <a:ext cx="2620370" cy="369332"/>
+          </a:xfrm>
+          <a:prstGeom prst="rect">
+            <a:avLst/>
+          </a:prstGeom>
+          <a:noFill/>
+        </p:spPr>
+        <p:txBody>
+          <a:bodyPr wrap="square" rtlCol="0">
+            <a:spAutoFit/>
+          </a:bodyPr>
+          <a:lstStyle/>
+          <a:p>
+            <a:r>
+              <a:rPr lang="en-US" dirty="0"/>
+              <a:t>GitHub</a:t>
+            </a:r>
+            <a:endParaRPr lang="ru-RU" dirty="0"/>
+          </a:p>
+        </p:txBody>
+      </p:sp>
     </p:spTree>
     <p:extLst>
       <p:ext uri="{BB962C8B-B14F-4D97-AF65-F5344CB8AC3E}">
@@ -5230,7 +5130,7 @@
           <p:cNvPr id="2" name="Заголовок 1">
             <a:extLst>
               <a:ext uri="{FF2B5EF4-FFF2-40B4-BE49-F238E27FC236}">
-                <a16:creationId xmlns:a16="http://schemas.microsoft.com/office/drawing/2014/main" id="{14260471-CF37-41A6-A525-02DD85A555CF}"/>
+                <a16:creationId xmlns:a16="http://schemas.microsoft.com/office/drawing/2014/main" id="{CFD750F3-CB5C-E6A1-A656-E2879ADCD25D}"/>
               </a:ext>
             </a:extLst>
           </p:cNvPr>
@@ -5247,10 +5147,9 @@
           <a:lstStyle/>
           <a:p>
             <a:r>
-              <a:rPr lang="ru-RU" b="1" dirty="0"/>
-              <a:t>Проблема (Почему это важно?)</a:t>
-            </a:r>
-            <a:endParaRPr lang="ru-RU" dirty="0"/>
+              <a:rPr lang="ru-RU" dirty="0"/>
+              <a:t>Что это такое?</a:t>
+            </a:r>
           </a:p>
         </p:txBody>
       </p:sp>
@@ -5259,7 +5158,7 @@
           <p:cNvPr id="3" name="Объект 2">
             <a:extLst>
               <a:ext uri="{FF2B5EF4-FFF2-40B4-BE49-F238E27FC236}">
-                <a16:creationId xmlns:a16="http://schemas.microsoft.com/office/drawing/2014/main" id="{CB720475-F851-41C1-BF95-88BDC044B5EF}"/>
+                <a16:creationId xmlns:a16="http://schemas.microsoft.com/office/drawing/2014/main" id="{00B51551-3F67-17FD-BACF-504CC44DF82D}"/>
               </a:ext>
             </a:extLst>
           </p:cNvPr>
@@ -5270,97 +5169,63 @@
             <p:ph idx="1"/>
           </p:nvPr>
         </p:nvSpPr>
+        <p:spPr/>
+        <p:txBody>
+          <a:bodyPr/>
+          <a:lstStyle/>
+          <a:p>
+            <a:r>
+              <a:rPr lang="en-US" dirty="0"/>
+              <a:t>Air Project</a:t>
+            </a:r>
+            <a:r>
+              <a:rPr lang="ru-RU" dirty="0"/>
+              <a:t> – это приложение для прогноза качества воздуха в Кузбассе</a:t>
+            </a:r>
+            <a:br>
+              <a:rPr lang="ru-RU" dirty="0"/>
+            </a:br>
+            <a:r>
+              <a:rPr lang="ru-RU" dirty="0"/>
+              <a:t>Приложение представляет собой ИИ для прогноза качества воздуха с графическим интерфейсом</a:t>
+            </a:r>
+          </a:p>
+        </p:txBody>
+      </p:sp>
+      <p:pic>
+        <p:nvPicPr>
+          <p:cNvPr id="5" name="Рисунок 4">
+            <a:extLst>
+              <a:ext uri="{FF2B5EF4-FFF2-40B4-BE49-F238E27FC236}">
+                <a16:creationId xmlns:a16="http://schemas.microsoft.com/office/drawing/2014/main" id="{622842B1-867E-8137-EAF3-4F72AAB91A0C}"/>
+              </a:ext>
+            </a:extLst>
+          </p:cNvPr>
+          <p:cNvPicPr>
+            <a:picLocks noChangeAspect="1"/>
+          </p:cNvPicPr>
+          <p:nvPr/>
+        </p:nvPicPr>
+        <p:blipFill>
+          <a:blip r:embed="rId2"/>
+          <a:stretch>
+            <a:fillRect/>
+          </a:stretch>
+        </p:blipFill>
         <p:spPr>
           <a:xfrm>
-            <a:off x="149988" y="1815442"/>
-            <a:ext cx="9562722" cy="3022888"/>
+            <a:off x="2893457" y="3991111"/>
+            <a:ext cx="4075783" cy="2438237"/>
           </a:xfrm>
+          <a:prstGeom prst="rect">
+            <a:avLst/>
+          </a:prstGeom>
         </p:spPr>
-        <p:txBody>
-          <a:bodyPr>
-            <a:normAutofit lnSpcReduction="10000"/>
-          </a:bodyPr>
-          <a:lstStyle/>
-          <a:p>
-            <a:r>
-              <a:rPr lang="ru-RU" dirty="0"/>
-              <a:t>Традиционные сервисы показывают «посмертную» аналитику (то, что уже случилось).</a:t>
-            </a:r>
-          </a:p>
-          <a:p>
-            <a:r>
-              <a:rPr lang="ru-RU" dirty="0"/>
-              <a:t>Очень малое количество Российских аналогов</a:t>
-            </a:r>
-          </a:p>
-          <a:p>
-            <a:r>
-              <a:rPr lang="ru-RU" dirty="0"/>
-              <a:t>В промышленных регионах смог накрывает районы за 30-40 минут.</a:t>
-            </a:r>
-          </a:p>
-          <a:p>
-            <a:r>
-              <a:rPr lang="ru-RU" dirty="0"/>
-              <a:t>Жителям нужно планировать день: когда вести ребенка в сад, когда выходить на пробежку, а когда закрыть окна.</a:t>
-            </a:r>
-          </a:p>
-        </p:txBody>
-      </p:sp>
-      <p:sp>
-        <p:nvSpPr>
-          <p:cNvPr id="4" name="Нижний колонтитул 4">
-            <a:extLst>
-              <a:ext uri="{FF2B5EF4-FFF2-40B4-BE49-F238E27FC236}">
-                <a16:creationId xmlns:a16="http://schemas.microsoft.com/office/drawing/2014/main" id="{E08C957F-4112-4133-9044-85BF400516CF}"/>
-              </a:ext>
-            </a:extLst>
-          </p:cNvPr>
-          <p:cNvSpPr>
-            <a:spLocks noGrp="1"/>
-          </p:cNvSpPr>
-          <p:nvPr>
-            <p:ph type="ftr" sz="quarter" idx="11"/>
-          </p:nvPr>
-        </p:nvSpPr>
-        <p:spPr>
-          <a:xfrm>
-            <a:off x="2271000" y="6590454"/>
-            <a:ext cx="7650000" cy="365126"/>
-          </a:xfrm>
-        </p:spPr>
-        <p:txBody>
-          <a:bodyPr/>
-          <a:lstStyle/>
-          <a:p>
-            <a:r>
-              <a:rPr lang="ru-RU" dirty="0">
-                <a:solidFill>
-                  <a:schemeClr val="tx1"/>
-                </a:solidFill>
-              </a:rPr>
-              <a:t>Шаблоны презентаций с сайта </a:t>
-            </a:r>
-            <a:r>
-              <a:rPr lang="en-US" dirty="0">
-                <a:hlinkClick r:id="rId2">
-                  <a:extLst>
-                    <a:ext uri="{A12FA001-AC4F-418D-AE19-62706E023703}">
-                      <ahyp:hlinkClr xmlns:ahyp="http://schemas.microsoft.com/office/drawing/2018/hyperlinkcolor" val="tx"/>
-                    </a:ext>
-                  </a:extLst>
-                </a:hlinkClick>
-              </a:rPr>
-              <a:t>presentation-creation.ru</a:t>
-            </a:r>
-            <a:endParaRPr lang="ru-RU" dirty="0"/>
-          </a:p>
-        </p:txBody>
-      </p:sp>
+      </p:pic>
     </p:spTree>
     <p:extLst>
       <p:ext uri="{BB962C8B-B14F-4D97-AF65-F5344CB8AC3E}">
-        <p14:creationId xmlns:p14="http://schemas.microsoft.com/office/powerpoint/2010/main" val="1489880908"/>
+        <p14:creationId xmlns:p14="http://schemas.microsoft.com/office/powerpoint/2010/main" val="3847072863"/>
       </p:ext>
     </p:extLst>
   </p:cSld>
@@ -5404,7 +5269,7 @@
           <p:cNvPr id="2" name="Заголовок 1">
             <a:extLst>
               <a:ext uri="{FF2B5EF4-FFF2-40B4-BE49-F238E27FC236}">
-                <a16:creationId xmlns:a16="http://schemas.microsoft.com/office/drawing/2014/main" id="{F799E12B-8768-4CD4-9A08-9205187904FF}"/>
+                <a16:creationId xmlns:a16="http://schemas.microsoft.com/office/drawing/2014/main" id="{14260471-CF37-41A6-A525-02DD85A555CF}"/>
               </a:ext>
             </a:extLst>
           </p:cNvPr>
@@ -5422,7 +5287,7 @@
           <a:p>
             <a:r>
               <a:rPr lang="ru-RU" b="1" dirty="0"/>
-              <a:t>Решение</a:t>
+              <a:t>Проблема (Почему это важно?)</a:t>
             </a:r>
             <a:endParaRPr lang="ru-RU" dirty="0"/>
           </a:p>
@@ -5430,10 +5295,10 @@
       </p:sp>
       <p:sp>
         <p:nvSpPr>
-          <p:cNvPr id="4" name="Нижний колонтитул 4">
-            <a:extLst>
-              <a:ext uri="{FF2B5EF4-FFF2-40B4-BE49-F238E27FC236}">
-                <a16:creationId xmlns:a16="http://schemas.microsoft.com/office/drawing/2014/main" id="{F5A4AB3F-77F6-4967-BD2B-5B5543ECB440}"/>
+          <p:cNvPr id="3" name="Объект 2">
+            <a:extLst>
+              <a:ext uri="{FF2B5EF4-FFF2-40B4-BE49-F238E27FC236}">
+                <a16:creationId xmlns:a16="http://schemas.microsoft.com/office/drawing/2014/main" id="{CB720475-F851-41C1-BF95-88BDC044B5EF}"/>
               </a:ext>
             </a:extLst>
           </p:cNvPr>
@@ -5441,38 +5306,112 @@
             <a:spLocks noGrp="1"/>
           </p:cNvSpPr>
           <p:nvPr>
-            <p:ph type="ftr" sz="quarter" idx="11"/>
+            <p:ph idx="1"/>
           </p:nvPr>
         </p:nvSpPr>
         <p:spPr>
           <a:xfrm>
-            <a:off x="2271000" y="6590454"/>
-            <a:ext cx="7650000" cy="365126"/>
+            <a:off x="149988" y="1815442"/>
+            <a:ext cx="9562722" cy="3022888"/>
           </a:xfrm>
         </p:spPr>
         <p:txBody>
+          <a:bodyPr>
+            <a:normAutofit lnSpcReduction="10000"/>
+          </a:bodyPr>
+          <a:lstStyle/>
+          <a:p>
+            <a:r>
+              <a:rPr lang="ru-RU" dirty="0"/>
+              <a:t>Традиционные сервисы показывают «посмертную» аналитику (то, что уже случилось).</a:t>
+            </a:r>
+          </a:p>
+          <a:p>
+            <a:r>
+              <a:rPr lang="ru-RU" dirty="0"/>
+              <a:t>Очень малое количество Российских аналогов</a:t>
+            </a:r>
+          </a:p>
+          <a:p>
+            <a:r>
+              <a:rPr lang="ru-RU" dirty="0"/>
+              <a:t>В промышленных регионах смог накрывает районы за 30-40 минут.</a:t>
+            </a:r>
+          </a:p>
+          <a:p>
+            <a:r>
+              <a:rPr lang="ru-RU" dirty="0"/>
+              <a:t>Жителям нужно планировать день: когда вести ребенка в сад, когда выходить на пробежку, а когда закрыть окна.</a:t>
+            </a:r>
+          </a:p>
+        </p:txBody>
+      </p:sp>
+    </p:spTree>
+    <p:extLst>
+      <p:ext uri="{BB962C8B-B14F-4D97-AF65-F5344CB8AC3E}">
+        <p14:creationId xmlns:p14="http://schemas.microsoft.com/office/powerpoint/2010/main" val="1489880908"/>
+      </p:ext>
+    </p:extLst>
+  </p:cSld>
+  <p:clrMapOvr>
+    <a:masterClrMapping/>
+  </p:clrMapOvr>
+  <mc:AlternateContent xmlns:mc="http://schemas.openxmlformats.org/markup-compatibility/2006" xmlns:p14="http://schemas.microsoft.com/office/powerpoint/2010/main">
+    <mc:Choice Requires="p14">
+      <p:transition spd="med" p14:dur="700">
+        <p:fade/>
+      </p:transition>
+    </mc:Choice>
+    <mc:Fallback xmlns="">
+      <p:transition spd="med">
+        <p:fade/>
+      </p:transition>
+    </mc:Fallback>
+  </mc:AlternateContent>
+</p:sld>
+</file>
+
+<file path=ppt/slides/slide4.xml><?xml version="1.0" encoding="utf-8"?>
+<p:sld xmlns:a="http://schemas.openxmlformats.org/drawingml/2006/main" xmlns:r="http://schemas.openxmlformats.org/officeDocument/2006/relationships" xmlns:p="http://schemas.openxmlformats.org/presentationml/2006/main">
+  <p:cSld>
+    <p:spTree>
+      <p:nvGrpSpPr>
+        <p:cNvPr id="1" name=""/>
+        <p:cNvGrpSpPr/>
+        <p:nvPr/>
+      </p:nvGrpSpPr>
+      <p:grpSpPr>
+        <a:xfrm>
+          <a:off x="0" y="0"/>
+          <a:ext cx="0" cy="0"/>
+          <a:chOff x="0" y="0"/>
+          <a:chExt cx="0" cy="0"/>
+        </a:xfrm>
+      </p:grpSpPr>
+      <p:sp>
+        <p:nvSpPr>
+          <p:cNvPr id="2" name="Заголовок 1">
+            <a:extLst>
+              <a:ext uri="{FF2B5EF4-FFF2-40B4-BE49-F238E27FC236}">
+                <a16:creationId xmlns:a16="http://schemas.microsoft.com/office/drawing/2014/main" id="{F799E12B-8768-4CD4-9A08-9205187904FF}"/>
+              </a:ext>
+            </a:extLst>
+          </p:cNvPr>
+          <p:cNvSpPr>
+            <a:spLocks noGrp="1"/>
+          </p:cNvSpPr>
+          <p:nvPr>
+            <p:ph type="title"/>
+          </p:nvPr>
+        </p:nvSpPr>
+        <p:spPr/>
+        <p:txBody>
           <a:bodyPr/>
           <a:lstStyle/>
           <a:p>
             <a:r>
-              <a:rPr lang="ru-RU" dirty="0">
-                <a:solidFill>
-                  <a:schemeClr val="tx1"/>
-                </a:solidFill>
-              </a:rPr>
-              <a:t>Шаблоны презентаций с сайта </a:t>
-            </a:r>
-            <a:r>
-              <a:rPr lang="en-US" dirty="0">
-                <a:hlinkClick r:id="rId2">
-                  <a:extLst>
-                    <a:ext uri="{A12FA001-AC4F-418D-AE19-62706E023703}">
-                      <ahyp:hlinkClr xmlns:ahyp="http://schemas.microsoft.com/office/drawing/2018/hyperlinkcolor" val="tx"/>
-                    </a:ext>
-                  </a:extLst>
-                </a:hlinkClick>
-              </a:rPr>
-              <a:t>presentation-creation.ru</a:t>
+              <a:rPr lang="ru-RU" b="1" dirty="0"/>
+              <a:t>Решение</a:t>
             </a:r>
             <a:endParaRPr lang="ru-RU" dirty="0"/>
           </a:p>
@@ -6694,189 +6633,6 @@
 </p:sld>
 </file>
 
-<file path=ppt/slides/slide4.xml><?xml version="1.0" encoding="utf-8"?>
-<p:sld xmlns:a="http://schemas.openxmlformats.org/drawingml/2006/main" xmlns:r="http://schemas.openxmlformats.org/officeDocument/2006/relationships" xmlns:p="http://schemas.openxmlformats.org/presentationml/2006/main">
-  <p:cSld>
-    <p:spTree>
-      <p:nvGrpSpPr>
-        <p:cNvPr id="1" name=""/>
-        <p:cNvGrpSpPr/>
-        <p:nvPr/>
-      </p:nvGrpSpPr>
-      <p:grpSpPr>
-        <a:xfrm>
-          <a:off x="0" y="0"/>
-          <a:ext cx="0" cy="0"/>
-          <a:chOff x="0" y="0"/>
-          <a:chExt cx="0" cy="0"/>
-        </a:xfrm>
-      </p:grpSpPr>
-      <p:sp>
-        <p:nvSpPr>
-          <p:cNvPr id="2" name="Заголовок 1">
-            <a:extLst>
-              <a:ext uri="{FF2B5EF4-FFF2-40B4-BE49-F238E27FC236}">
-                <a16:creationId xmlns:a16="http://schemas.microsoft.com/office/drawing/2014/main" id="{14260471-CF37-41A6-A525-02DD85A555CF}"/>
-              </a:ext>
-            </a:extLst>
-          </p:cNvPr>
-          <p:cNvSpPr>
-            <a:spLocks noGrp="1"/>
-          </p:cNvSpPr>
-          <p:nvPr>
-            <p:ph type="title"/>
-          </p:nvPr>
-        </p:nvSpPr>
-        <p:spPr/>
-        <p:txBody>
-          <a:bodyPr/>
-          <a:lstStyle/>
-          <a:p>
-            <a:r>
-              <a:rPr lang="ru-RU" b="1" dirty="0"/>
-              <a:t>Как работает ИИ?</a:t>
-            </a:r>
-            <a:endParaRPr lang="ru-RU" dirty="0"/>
-          </a:p>
-        </p:txBody>
-      </p:sp>
-      <p:sp>
-        <p:nvSpPr>
-          <p:cNvPr id="4" name="Нижний колонтитул 4">
-            <a:extLst>
-              <a:ext uri="{FF2B5EF4-FFF2-40B4-BE49-F238E27FC236}">
-                <a16:creationId xmlns:a16="http://schemas.microsoft.com/office/drawing/2014/main" id="{E08C957F-4112-4133-9044-85BF400516CF}"/>
-              </a:ext>
-            </a:extLst>
-          </p:cNvPr>
-          <p:cNvSpPr>
-            <a:spLocks noGrp="1"/>
-          </p:cNvSpPr>
-          <p:nvPr>
-            <p:ph type="ftr" sz="quarter" idx="11"/>
-          </p:nvPr>
-        </p:nvSpPr>
-        <p:spPr>
-          <a:xfrm>
-            <a:off x="2271000" y="6590454"/>
-            <a:ext cx="7650000" cy="365126"/>
-          </a:xfrm>
-        </p:spPr>
-        <p:txBody>
-          <a:bodyPr/>
-          <a:lstStyle/>
-          <a:p>
-            <a:r>
-              <a:rPr lang="ru-RU" dirty="0">
-                <a:solidFill>
-                  <a:schemeClr val="tx1"/>
-                </a:solidFill>
-              </a:rPr>
-              <a:t>Шаблоны презентаций с сайта </a:t>
-            </a:r>
-            <a:r>
-              <a:rPr lang="en-US" dirty="0">
-                <a:hlinkClick r:id="rId2">
-                  <a:extLst>
-                    <a:ext uri="{A12FA001-AC4F-418D-AE19-62706E023703}">
-                      <ahyp:hlinkClr xmlns:ahyp="http://schemas.microsoft.com/office/drawing/2018/hyperlinkcolor" val="tx"/>
-                    </a:ext>
-                  </a:extLst>
-                </a:hlinkClick>
-              </a:rPr>
-              <a:t>presentation-creation.ru</a:t>
-            </a:r>
-            <a:endParaRPr lang="ru-RU" dirty="0"/>
-          </a:p>
-        </p:txBody>
-      </p:sp>
-      <p:sp>
-        <p:nvSpPr>
-          <p:cNvPr id="3" name="TextBox 2">
-            <a:extLst>
-              <a:ext uri="{FF2B5EF4-FFF2-40B4-BE49-F238E27FC236}">
-                <a16:creationId xmlns:a16="http://schemas.microsoft.com/office/drawing/2014/main" id="{C41EA150-1758-1AD2-F3F4-F616CD409D21}"/>
-              </a:ext>
-            </a:extLst>
-          </p:cNvPr>
-          <p:cNvSpPr txBox="1"/>
-          <p:nvPr/>
-        </p:nvSpPr>
-        <p:spPr>
-          <a:xfrm>
-            <a:off x="488272" y="2095130"/>
-            <a:ext cx="8078679" cy="4308872"/>
-          </a:xfrm>
-          <a:prstGeom prst="rect">
-            <a:avLst/>
-          </a:prstGeom>
-          <a:noFill/>
-        </p:spPr>
-        <p:txBody>
-          <a:bodyPr wrap="square" rtlCol="0">
-            <a:spAutoFit/>
-          </a:bodyPr>
-          <a:lstStyle/>
-          <a:p>
-            <a:r>
-              <a:rPr lang="ru-RU" sz="3200" b="1" dirty="0"/>
-              <a:t>Метеорология:</a:t>
-            </a:r>
-            <a:r>
-              <a:rPr lang="ru-RU" sz="3200" dirty="0"/>
-              <a:t> Учет инверсий температуры, скорости и направления ветра в Кемеровской котловине.</a:t>
-            </a:r>
-          </a:p>
-          <a:p>
-            <a:r>
-              <a:rPr lang="ru-RU" sz="3200" b="1" dirty="0"/>
-              <a:t>График выбросов:</a:t>
-            </a:r>
-            <a:r>
-              <a:rPr lang="ru-RU" sz="3200" dirty="0"/>
-              <a:t> Анализ циклов работы предприятий и интенсивности трафика.</a:t>
-            </a:r>
-          </a:p>
-          <a:p>
-            <a:r>
-              <a:rPr lang="ru-RU" sz="3200" b="1" dirty="0"/>
-              <a:t>ML-модель:</a:t>
-            </a:r>
-            <a:r>
-              <a:rPr lang="ru-RU" sz="3200" dirty="0"/>
-              <a:t> Нейросеть, обученная на исторических данных НМУ (черного неба) в Кузбассе за последние 5 лет</a:t>
-            </a:r>
-          </a:p>
-          <a:p>
-            <a:endParaRPr lang="ru-RU" dirty="0"/>
-          </a:p>
-        </p:txBody>
-      </p:sp>
-    </p:spTree>
-    <p:extLst>
-      <p:ext uri="{BB962C8B-B14F-4D97-AF65-F5344CB8AC3E}">
-        <p14:creationId xmlns:p14="http://schemas.microsoft.com/office/powerpoint/2010/main" val="4111276976"/>
-      </p:ext>
-    </p:extLst>
-  </p:cSld>
-  <p:clrMapOvr>
-    <a:masterClrMapping/>
-  </p:clrMapOvr>
-  <mc:AlternateContent xmlns:mc="http://schemas.openxmlformats.org/markup-compatibility/2006" xmlns:p14="http://schemas.microsoft.com/office/powerpoint/2010/main">
-    <mc:Choice Requires="p14">
-      <p:transition spd="med" p14:dur="700">
-        <p:fade/>
-      </p:transition>
-    </mc:Choice>
-    <mc:Fallback xmlns="">
-      <p:transition spd="med">
-        <p:fade/>
-      </p:transition>
-    </mc:Fallback>
-  </mc:AlternateContent>
-</p:sld>
-</file>
-
 <file path=ppt/slides/slide5.xml><?xml version="1.0" encoding="utf-8"?>
 <p:sld xmlns:a="http://schemas.openxmlformats.org/drawingml/2006/main" xmlns:r="http://schemas.openxmlformats.org/officeDocument/2006/relationships" xmlns:p="http://schemas.openxmlformats.org/presentationml/2006/main">
   <p:cSld>
@@ -6917,17 +6673,18 @@
           <a:p>
             <a:r>
               <a:rPr lang="ru-RU" b="1" dirty="0"/>
-              <a:t>Планирование для групп риска</a:t>
-            </a:r>
-          </a:p>
-        </p:txBody>
-      </p:sp>
-      <p:sp>
-        <p:nvSpPr>
-          <p:cNvPr id="6" name="TextBox 5">
-            <a:extLst>
-              <a:ext uri="{FF2B5EF4-FFF2-40B4-BE49-F238E27FC236}">
-                <a16:creationId xmlns:a16="http://schemas.microsoft.com/office/drawing/2014/main" id="{0ED57510-DE25-5BE3-8DF4-510683466432}"/>
+              <a:t>Как работает ИИ?</a:t>
+            </a:r>
+            <a:endParaRPr lang="ru-RU" dirty="0"/>
+          </a:p>
+        </p:txBody>
+      </p:sp>
+      <p:sp>
+        <p:nvSpPr>
+          <p:cNvPr id="3" name="TextBox 2">
+            <a:extLst>
+              <a:ext uri="{FF2B5EF4-FFF2-40B4-BE49-F238E27FC236}">
+                <a16:creationId xmlns:a16="http://schemas.microsoft.com/office/drawing/2014/main" id="{C41EA150-1758-1AD2-F3F4-F616CD409D21}"/>
               </a:ext>
             </a:extLst>
           </p:cNvPr>
@@ -6936,8 +6693,8 @@
         </p:nvSpPr>
         <p:spPr>
           <a:xfrm>
-            <a:off x="838200" y="1908699"/>
-            <a:ext cx="8971625" cy="3816429"/>
+            <a:off x="488272" y="2095130"/>
+            <a:ext cx="8078679" cy="4308872"/>
           </a:xfrm>
           <a:prstGeom prst="rect">
             <a:avLst/>
@@ -6952,41 +6709,31 @@
           <a:p>
             <a:r>
               <a:rPr lang="ru-RU" sz="3200" b="1" dirty="0"/>
-              <a:t>Польза:</a:t>
-            </a:r>
-            <a:endParaRPr lang="ru-RU" sz="3200" dirty="0"/>
-          </a:p>
-          <a:p>
-            <a:pPr lvl="1"/>
+              <a:t>Метеорология:</a:t>
+            </a:r>
+            <a:r>
+              <a:rPr lang="ru-RU" sz="3200" dirty="0"/>
+              <a:t> Учет инверсий температуры, скорости и направления ветра в Кемеровской котловине.</a:t>
+            </a:r>
+          </a:p>
+          <a:p>
             <a:r>
               <a:rPr lang="ru-RU" sz="3200" b="1" dirty="0"/>
-              <a:t>Для родителей:</a:t>
+              <a:t>График выбросов:</a:t>
             </a:r>
             <a:r>
               <a:rPr lang="ru-RU" sz="3200" dirty="0"/>
-              <a:t> Прогноз на время дневной прогулки.</a:t>
-            </a:r>
-          </a:p>
-          <a:p>
-            <a:pPr lvl="1"/>
+              <a:t> Анализ циклов работы предприятий и интенсивности трафика.</a:t>
+            </a:r>
+          </a:p>
+          <a:p>
             <a:r>
               <a:rPr lang="ru-RU" sz="3200" b="1" dirty="0"/>
-              <a:t>Для аллергиков:</a:t>
+              <a:t>ML-модель:</a:t>
             </a:r>
             <a:r>
               <a:rPr lang="ru-RU" sz="3200" dirty="0"/>
-              <a:t> Предупреждение о накоплении взвешенных частиц PM2.5.</a:t>
-            </a:r>
-          </a:p>
-          <a:p>
-            <a:pPr lvl="1"/>
-            <a:r>
-              <a:rPr lang="ru-RU" sz="3200" b="1" dirty="0"/>
-              <a:t>Для спортсменов:</a:t>
-            </a:r>
-            <a:r>
-              <a:rPr lang="ru-RU" sz="3200" dirty="0"/>
-              <a:t> Рекомендации о занятиях на улице.</a:t>
+              <a:t> Нейросеть, обученная на исторических данных НМУ (черного неба) в Кузбассе за последние 5 лет</a:t>
             </a:r>
           </a:p>
           <a:p>
@@ -6997,7 +6744,7 @@
     </p:spTree>
     <p:extLst>
       <p:ext uri="{BB962C8B-B14F-4D97-AF65-F5344CB8AC3E}">
-        <p14:creationId xmlns:p14="http://schemas.microsoft.com/office/powerpoint/2010/main" val="1623620019"/>
+        <p14:creationId xmlns:p14="http://schemas.microsoft.com/office/powerpoint/2010/main" val="4111276976"/>
       </p:ext>
     </p:extLst>
   </p:cSld>
@@ -7041,7 +6788,7 @@
           <p:cNvPr id="2" name="Заголовок 1">
             <a:extLst>
               <a:ext uri="{FF2B5EF4-FFF2-40B4-BE49-F238E27FC236}">
-                <a16:creationId xmlns:a16="http://schemas.microsoft.com/office/drawing/2014/main" id="{300FFB5B-1AC5-DE4D-D0A2-DDA71EF36D89}"/>
+                <a16:creationId xmlns:a16="http://schemas.microsoft.com/office/drawing/2014/main" id="{14260471-CF37-41A6-A525-02DD85A555CF}"/>
               </a:ext>
             </a:extLst>
           </p:cNvPr>
@@ -7058,49 +6805,18 @@
           <a:lstStyle/>
           <a:p>
             <a:r>
-              <a:rPr lang="ru-RU" dirty="0"/>
-              <a:t>Экономика</a:t>
-            </a:r>
-          </a:p>
-        </p:txBody>
-      </p:sp>
-      <p:graphicFrame>
-        <p:nvGraphicFramePr>
-          <p:cNvPr id="7" name="Объект 6">
-            <a:extLst>
-              <a:ext uri="{FF2B5EF4-FFF2-40B4-BE49-F238E27FC236}">
-                <a16:creationId xmlns:a16="http://schemas.microsoft.com/office/drawing/2014/main" id="{043BFE52-9438-6909-7380-C9806776671C}"/>
-              </a:ext>
-            </a:extLst>
-          </p:cNvPr>
-          <p:cNvGraphicFramePr>
-            <a:graphicFrameLocks noGrp="1"/>
-          </p:cNvGraphicFramePr>
-          <p:nvPr>
-            <p:ph idx="1"/>
-            <p:extLst>
-              <p:ext uri="{D42A27DB-BD31-4B8C-83A1-F6EECF244321}">
-                <p14:modId xmlns:p14="http://schemas.microsoft.com/office/powerpoint/2010/main" val="2809498876"/>
-              </p:ext>
-            </p:extLst>
-          </p:nvPr>
-        </p:nvGraphicFramePr>
-        <p:xfrm>
-          <a:off x="2798886" y="152501"/>
-          <a:ext cx="8307079" cy="3842450"/>
-        </p:xfrm>
-        <a:graphic>
-          <a:graphicData uri="http://schemas.openxmlformats.org/drawingml/2006/chart">
-            <c:chart xmlns:c="http://schemas.openxmlformats.org/drawingml/2006/chart" xmlns:r="http://schemas.openxmlformats.org/officeDocument/2006/relationships" r:id="rId2"/>
-          </a:graphicData>
-        </a:graphic>
-      </p:graphicFrame>
-      <p:sp>
-        <p:nvSpPr>
-          <p:cNvPr id="8" name="TextBox 7">
-            <a:extLst>
-              <a:ext uri="{FF2B5EF4-FFF2-40B4-BE49-F238E27FC236}">
-                <a16:creationId xmlns:a16="http://schemas.microsoft.com/office/drawing/2014/main" id="{0E5C3C2E-E2C5-74EA-FB49-1693003EB914}"/>
+              <a:rPr lang="ru-RU" b="1" dirty="0"/>
+              <a:t>Планирование для групп риска</a:t>
+            </a:r>
+          </a:p>
+        </p:txBody>
+      </p:sp>
+      <p:sp>
+        <p:nvSpPr>
+          <p:cNvPr id="6" name="TextBox 5">
+            <a:extLst>
+              <a:ext uri="{FF2B5EF4-FFF2-40B4-BE49-F238E27FC236}">
+                <a16:creationId xmlns:a16="http://schemas.microsoft.com/office/drawing/2014/main" id="{0ED57510-DE25-5BE3-8DF4-510683466432}"/>
               </a:ext>
             </a:extLst>
           </p:cNvPr>
@@ -7109,8 +6825,8 @@
         </p:nvSpPr>
         <p:spPr>
           <a:xfrm>
-            <a:off x="559293" y="1748901"/>
-            <a:ext cx="3302493" cy="1477328"/>
+            <a:off x="838200" y="1908699"/>
+            <a:ext cx="8971625" cy="3816429"/>
           </a:xfrm>
           <a:prstGeom prst="rect">
             <a:avLst/>
@@ -7124,194 +6840,53 @@
           <a:lstStyle/>
           <a:p>
             <a:r>
-              <a:rPr lang="ru-RU" dirty="0"/>
-              <a:t>Затраты</a:t>
-            </a:r>
-            <a:r>
-              <a:rPr lang="en-US" dirty="0"/>
-              <a:t>:</a:t>
-            </a:r>
-            <a:br>
-              <a:rPr lang="en-US" dirty="0"/>
-            </a:br>
-            <a:r>
-              <a:rPr lang="ru-RU" dirty="0"/>
-              <a:t>Реклама</a:t>
-            </a:r>
-            <a:r>
-              <a:rPr lang="en-US" dirty="0"/>
-              <a:t>: </a:t>
-            </a:r>
-            <a:r>
-              <a:rPr lang="ru-RU" dirty="0"/>
-              <a:t>200000р</a:t>
-            </a:r>
-          </a:p>
-          <a:p>
-            <a:r>
-              <a:rPr lang="ru-RU" dirty="0"/>
-              <a:t>Оборудование</a:t>
-            </a:r>
-            <a:r>
-              <a:rPr lang="en-US" dirty="0"/>
-              <a:t>: </a:t>
-            </a:r>
-            <a:r>
-              <a:rPr lang="ru-RU" dirty="0"/>
-              <a:t>30</a:t>
-            </a:r>
-            <a:r>
-              <a:rPr lang="en-US" dirty="0"/>
-              <a:t>0000</a:t>
-            </a:r>
-            <a:r>
-              <a:rPr lang="ru-RU" dirty="0"/>
-              <a:t>р</a:t>
-            </a:r>
-          </a:p>
-          <a:p>
-            <a:r>
-              <a:rPr lang="ru-RU" dirty="0"/>
-              <a:t>Разработка</a:t>
-            </a:r>
-            <a:r>
-              <a:rPr lang="en-US" dirty="0"/>
-              <a:t>: 300000</a:t>
-            </a:r>
-            <a:r>
-              <a:rPr lang="ru-RU" dirty="0"/>
-              <a:t>р</a:t>
-            </a:r>
-          </a:p>
-          <a:p>
-            <a:r>
-              <a:rPr lang="ru-RU" dirty="0"/>
-              <a:t>Сервера</a:t>
-            </a:r>
-            <a:r>
-              <a:rPr lang="en-US" dirty="0"/>
-              <a:t>:</a:t>
-            </a:r>
-            <a:r>
-              <a:rPr lang="ru-RU" dirty="0"/>
-              <a:t> 6</a:t>
-            </a:r>
-            <a:r>
-              <a:rPr lang="en-US" dirty="0"/>
-              <a:t>0000</a:t>
-            </a:r>
-            <a:r>
-              <a:rPr lang="ru-RU" dirty="0"/>
-              <a:t>р</a:t>
-            </a:r>
-          </a:p>
-        </p:txBody>
-      </p:sp>
-      <p:sp>
-        <p:nvSpPr>
-          <p:cNvPr id="9" name="TextBox 8">
-            <a:extLst>
-              <a:ext uri="{FF2B5EF4-FFF2-40B4-BE49-F238E27FC236}">
-                <a16:creationId xmlns:a16="http://schemas.microsoft.com/office/drawing/2014/main" id="{86BDA1E4-7254-81BF-25C7-AEFED712ACBD}"/>
-              </a:ext>
-            </a:extLst>
-          </p:cNvPr>
-          <p:cNvSpPr txBox="1"/>
-          <p:nvPr/>
-        </p:nvSpPr>
-        <p:spPr>
-          <a:xfrm>
-            <a:off x="559293" y="4279037"/>
-            <a:ext cx="3932808" cy="923330"/>
-          </a:xfrm>
-          <a:prstGeom prst="rect">
-            <a:avLst/>
-          </a:prstGeom>
-          <a:noFill/>
-        </p:spPr>
-        <p:txBody>
-          <a:bodyPr wrap="square" rtlCol="0">
-            <a:spAutoFit/>
-          </a:bodyPr>
-          <a:lstStyle/>
-          <a:p>
-            <a:r>
-              <a:rPr lang="ru-RU" dirty="0"/>
-              <a:t>Прибыль</a:t>
-            </a:r>
-            <a:r>
-              <a:rPr lang="en-US" dirty="0"/>
-              <a:t>:</a:t>
-            </a:r>
-          </a:p>
-          <a:p>
-            <a:r>
-              <a:rPr lang="en-US" dirty="0"/>
-              <a:t>B2C </a:t>
-            </a:r>
-            <a:r>
-              <a:rPr lang="ru-RU" dirty="0"/>
-              <a:t>Подписки</a:t>
-            </a:r>
-            <a:r>
-              <a:rPr lang="en-US" dirty="0"/>
-              <a:t>: 50000</a:t>
-            </a:r>
-            <a:r>
-              <a:rPr lang="ru-RU" dirty="0"/>
-              <a:t>р</a:t>
-            </a:r>
-            <a:r>
-              <a:rPr lang="en-US" dirty="0"/>
-              <a:t>/</a:t>
-            </a:r>
-            <a:r>
-              <a:rPr lang="ru-RU" dirty="0" err="1"/>
-              <a:t>мес</a:t>
-            </a:r>
+              <a:rPr lang="ru-RU" sz="3200" b="1" dirty="0"/>
+              <a:t>Польза:</a:t>
+            </a:r>
+            <a:endParaRPr lang="ru-RU" sz="3200" dirty="0"/>
+          </a:p>
+          <a:p>
+            <a:pPr lvl="1"/>
+            <a:r>
+              <a:rPr lang="ru-RU" sz="3200" b="1" dirty="0"/>
+              <a:t>Для родителей:</a:t>
+            </a:r>
+            <a:r>
+              <a:rPr lang="ru-RU" sz="3200" dirty="0"/>
+              <a:t> Прогноз на время дневной прогулки.</a:t>
+            </a:r>
+          </a:p>
+          <a:p>
+            <a:pPr lvl="1"/>
+            <a:r>
+              <a:rPr lang="ru-RU" sz="3200" b="1" dirty="0"/>
+              <a:t>Для аллергиков:</a:t>
+            </a:r>
+            <a:r>
+              <a:rPr lang="ru-RU" sz="3200" dirty="0"/>
+              <a:t> Предупреждение о накоплении взвешенных частиц PM2.5.</a:t>
+            </a:r>
+          </a:p>
+          <a:p>
+            <a:pPr lvl="1"/>
+            <a:r>
+              <a:rPr lang="ru-RU" sz="3200" b="1" dirty="0"/>
+              <a:t>Для спортсменов:</a:t>
+            </a:r>
+            <a:r>
+              <a:rPr lang="ru-RU" sz="3200" dirty="0"/>
+              <a:t> Рекомендации о занятиях на улице.</a:t>
+            </a:r>
+          </a:p>
+          <a:p>
             <a:endParaRPr lang="ru-RU" dirty="0"/>
-          </a:p>
-          <a:p>
-            <a:r>
-              <a:rPr lang="en-US" dirty="0"/>
-              <a:t>B2B </a:t>
-            </a:r>
-            <a:r>
-              <a:rPr lang="ru-RU" dirty="0"/>
-              <a:t>клиенты(компании)</a:t>
-            </a:r>
-            <a:r>
-              <a:rPr lang="en-US" dirty="0"/>
-              <a:t>: 10</a:t>
-            </a:r>
-            <a:r>
-              <a:rPr lang="ru-RU" dirty="0"/>
-              <a:t>0</a:t>
-            </a:r>
-            <a:r>
-              <a:rPr lang="en-US" dirty="0"/>
-              <a:t>000</a:t>
-            </a:r>
-            <a:r>
-              <a:rPr lang="ru-RU" dirty="0"/>
-              <a:t>р</a:t>
-            </a:r>
-            <a:r>
-              <a:rPr lang="en-US" dirty="0"/>
-              <a:t>/</a:t>
-            </a:r>
-            <a:r>
-              <a:rPr lang="ru-RU" dirty="0" err="1"/>
-              <a:t>мес</a:t>
-            </a:r>
-            <a:endParaRPr lang="en-US" dirty="0"/>
           </a:p>
         </p:txBody>
       </p:sp>
     </p:spTree>
     <p:extLst>
       <p:ext uri="{BB962C8B-B14F-4D97-AF65-F5344CB8AC3E}">
-        <p14:creationId xmlns:p14="http://schemas.microsoft.com/office/powerpoint/2010/main" val="3594709994"/>
+        <p14:creationId xmlns:p14="http://schemas.microsoft.com/office/powerpoint/2010/main" val="1623620019"/>
       </p:ext>
     </p:extLst>
   </p:cSld>
@@ -7355,6 +6930,320 @@
           <p:cNvPr id="2" name="Заголовок 1">
             <a:extLst>
               <a:ext uri="{FF2B5EF4-FFF2-40B4-BE49-F238E27FC236}">
+                <a16:creationId xmlns:a16="http://schemas.microsoft.com/office/drawing/2014/main" id="{300FFB5B-1AC5-DE4D-D0A2-DDA71EF36D89}"/>
+              </a:ext>
+            </a:extLst>
+          </p:cNvPr>
+          <p:cNvSpPr>
+            <a:spLocks noGrp="1"/>
+          </p:cNvSpPr>
+          <p:nvPr>
+            <p:ph type="title"/>
+          </p:nvPr>
+        </p:nvSpPr>
+        <p:spPr/>
+        <p:txBody>
+          <a:bodyPr/>
+          <a:lstStyle/>
+          <a:p>
+            <a:r>
+              <a:rPr lang="ru-RU" dirty="0"/>
+              <a:t>Экономика</a:t>
+            </a:r>
+          </a:p>
+        </p:txBody>
+      </p:sp>
+      <p:graphicFrame>
+        <p:nvGraphicFramePr>
+          <p:cNvPr id="7" name="Объект 6">
+            <a:extLst>
+              <a:ext uri="{FF2B5EF4-FFF2-40B4-BE49-F238E27FC236}">
+                <a16:creationId xmlns:a16="http://schemas.microsoft.com/office/drawing/2014/main" id="{043BFE52-9438-6909-7380-C9806776671C}"/>
+              </a:ext>
+            </a:extLst>
+          </p:cNvPr>
+          <p:cNvGraphicFramePr>
+            <a:graphicFrameLocks noGrp="1"/>
+          </p:cNvGraphicFramePr>
+          <p:nvPr>
+            <p:ph idx="1"/>
+            <p:extLst>
+              <p:ext uri="{D42A27DB-BD31-4B8C-83A1-F6EECF244321}">
+                <p14:modId xmlns:p14="http://schemas.microsoft.com/office/powerpoint/2010/main" val="2809498876"/>
+              </p:ext>
+            </p:extLst>
+          </p:nvPr>
+        </p:nvGraphicFramePr>
+        <p:xfrm>
+          <a:off x="2798886" y="152501"/>
+          <a:ext cx="8307079" cy="3842450"/>
+        </p:xfrm>
+        <a:graphic>
+          <a:graphicData uri="http://schemas.openxmlformats.org/drawingml/2006/chart">
+            <c:chart xmlns:c="http://schemas.openxmlformats.org/drawingml/2006/chart" xmlns:r="http://schemas.openxmlformats.org/officeDocument/2006/relationships" r:id="rId2"/>
+          </a:graphicData>
+        </a:graphic>
+      </p:graphicFrame>
+      <p:sp>
+        <p:nvSpPr>
+          <p:cNvPr id="8" name="TextBox 7">
+            <a:extLst>
+              <a:ext uri="{FF2B5EF4-FFF2-40B4-BE49-F238E27FC236}">
+                <a16:creationId xmlns:a16="http://schemas.microsoft.com/office/drawing/2014/main" id="{0E5C3C2E-E2C5-74EA-FB49-1693003EB914}"/>
+              </a:ext>
+            </a:extLst>
+          </p:cNvPr>
+          <p:cNvSpPr txBox="1"/>
+          <p:nvPr/>
+        </p:nvSpPr>
+        <p:spPr>
+          <a:xfrm>
+            <a:off x="559293" y="1748901"/>
+            <a:ext cx="3302493" cy="1477328"/>
+          </a:xfrm>
+          <a:prstGeom prst="rect">
+            <a:avLst/>
+          </a:prstGeom>
+          <a:noFill/>
+        </p:spPr>
+        <p:txBody>
+          <a:bodyPr wrap="square" rtlCol="0">
+            <a:spAutoFit/>
+          </a:bodyPr>
+          <a:lstStyle/>
+          <a:p>
+            <a:r>
+              <a:rPr lang="ru-RU" dirty="0"/>
+              <a:t>Затраты</a:t>
+            </a:r>
+            <a:r>
+              <a:rPr lang="en-US" dirty="0"/>
+              <a:t>:</a:t>
+            </a:r>
+            <a:br>
+              <a:rPr lang="en-US" dirty="0"/>
+            </a:br>
+            <a:r>
+              <a:rPr lang="ru-RU" dirty="0"/>
+              <a:t>Реклама</a:t>
+            </a:r>
+            <a:r>
+              <a:rPr lang="en-US" dirty="0"/>
+              <a:t>: </a:t>
+            </a:r>
+            <a:r>
+              <a:rPr lang="ru-RU" dirty="0"/>
+              <a:t>200000р</a:t>
+            </a:r>
+          </a:p>
+          <a:p>
+            <a:r>
+              <a:rPr lang="ru-RU" dirty="0"/>
+              <a:t>Оборудование</a:t>
+            </a:r>
+            <a:r>
+              <a:rPr lang="en-US" dirty="0"/>
+              <a:t>: </a:t>
+            </a:r>
+            <a:r>
+              <a:rPr lang="ru-RU" dirty="0"/>
+              <a:t>30</a:t>
+            </a:r>
+            <a:r>
+              <a:rPr lang="en-US" dirty="0"/>
+              <a:t>0000</a:t>
+            </a:r>
+            <a:r>
+              <a:rPr lang="ru-RU" dirty="0"/>
+              <a:t>р</a:t>
+            </a:r>
+          </a:p>
+          <a:p>
+            <a:r>
+              <a:rPr lang="ru-RU" dirty="0"/>
+              <a:t>Разработка</a:t>
+            </a:r>
+            <a:r>
+              <a:rPr lang="en-US" dirty="0"/>
+              <a:t>: 300000</a:t>
+            </a:r>
+            <a:r>
+              <a:rPr lang="ru-RU" dirty="0"/>
+              <a:t>р</a:t>
+            </a:r>
+          </a:p>
+          <a:p>
+            <a:r>
+              <a:rPr lang="ru-RU" dirty="0"/>
+              <a:t>Сервера</a:t>
+            </a:r>
+            <a:r>
+              <a:rPr lang="en-US" dirty="0"/>
+              <a:t>:</a:t>
+            </a:r>
+            <a:r>
+              <a:rPr lang="ru-RU" dirty="0"/>
+              <a:t> 6</a:t>
+            </a:r>
+            <a:r>
+              <a:rPr lang="en-US" dirty="0"/>
+              <a:t>0000</a:t>
+            </a:r>
+            <a:r>
+              <a:rPr lang="ru-RU" dirty="0"/>
+              <a:t>р</a:t>
+            </a:r>
+          </a:p>
+        </p:txBody>
+      </p:sp>
+      <p:sp>
+        <p:nvSpPr>
+          <p:cNvPr id="9" name="TextBox 8">
+            <a:extLst>
+              <a:ext uri="{FF2B5EF4-FFF2-40B4-BE49-F238E27FC236}">
+                <a16:creationId xmlns:a16="http://schemas.microsoft.com/office/drawing/2014/main" id="{86BDA1E4-7254-81BF-25C7-AEFED712ACBD}"/>
+              </a:ext>
+            </a:extLst>
+          </p:cNvPr>
+          <p:cNvSpPr txBox="1"/>
+          <p:nvPr/>
+        </p:nvSpPr>
+        <p:spPr>
+          <a:xfrm>
+            <a:off x="559293" y="4279037"/>
+            <a:ext cx="3932808" cy="923330"/>
+          </a:xfrm>
+          <a:prstGeom prst="rect">
+            <a:avLst/>
+          </a:prstGeom>
+          <a:noFill/>
+        </p:spPr>
+        <p:txBody>
+          <a:bodyPr wrap="square" rtlCol="0">
+            <a:spAutoFit/>
+          </a:bodyPr>
+          <a:lstStyle/>
+          <a:p>
+            <a:r>
+              <a:rPr lang="ru-RU" dirty="0"/>
+              <a:t>Прибыль</a:t>
+            </a:r>
+            <a:r>
+              <a:rPr lang="en-US" dirty="0"/>
+              <a:t>:</a:t>
+            </a:r>
+          </a:p>
+          <a:p>
+            <a:r>
+              <a:rPr lang="en-US" dirty="0"/>
+              <a:t>B2C </a:t>
+            </a:r>
+            <a:r>
+              <a:rPr lang="ru-RU" dirty="0"/>
+              <a:t>Подписки</a:t>
+            </a:r>
+            <a:r>
+              <a:rPr lang="en-US" dirty="0"/>
+              <a:t>: 50000</a:t>
+            </a:r>
+            <a:r>
+              <a:rPr lang="ru-RU" dirty="0"/>
+              <a:t>р</a:t>
+            </a:r>
+            <a:r>
+              <a:rPr lang="en-US" dirty="0"/>
+              <a:t>/</a:t>
+            </a:r>
+            <a:r>
+              <a:rPr lang="ru-RU" dirty="0" err="1"/>
+              <a:t>мес</a:t>
+            </a:r>
+            <a:endParaRPr lang="ru-RU" dirty="0"/>
+          </a:p>
+          <a:p>
+            <a:r>
+              <a:rPr lang="en-US" dirty="0"/>
+              <a:t>B2B </a:t>
+            </a:r>
+            <a:r>
+              <a:rPr lang="ru-RU" dirty="0"/>
+              <a:t>клиенты(компании)</a:t>
+            </a:r>
+            <a:r>
+              <a:rPr lang="en-US" dirty="0"/>
+              <a:t>: 10</a:t>
+            </a:r>
+            <a:r>
+              <a:rPr lang="ru-RU" dirty="0"/>
+              <a:t>0</a:t>
+            </a:r>
+            <a:r>
+              <a:rPr lang="en-US" dirty="0"/>
+              <a:t>000</a:t>
+            </a:r>
+            <a:r>
+              <a:rPr lang="ru-RU" dirty="0"/>
+              <a:t>р</a:t>
+            </a:r>
+            <a:r>
+              <a:rPr lang="en-US" dirty="0"/>
+              <a:t>/</a:t>
+            </a:r>
+            <a:r>
+              <a:rPr lang="ru-RU" dirty="0" err="1"/>
+              <a:t>мес</a:t>
+            </a:r>
+            <a:endParaRPr lang="en-US" dirty="0"/>
+          </a:p>
+        </p:txBody>
+      </p:sp>
+    </p:spTree>
+    <p:extLst>
+      <p:ext uri="{BB962C8B-B14F-4D97-AF65-F5344CB8AC3E}">
+        <p14:creationId xmlns:p14="http://schemas.microsoft.com/office/powerpoint/2010/main" val="3594709994"/>
+      </p:ext>
+    </p:extLst>
+  </p:cSld>
+  <p:clrMapOvr>
+    <a:masterClrMapping/>
+  </p:clrMapOvr>
+  <mc:AlternateContent xmlns:mc="http://schemas.openxmlformats.org/markup-compatibility/2006" xmlns:p14="http://schemas.microsoft.com/office/powerpoint/2010/main">
+    <mc:Choice Requires="p14">
+      <p:transition spd="med" p14:dur="700">
+        <p:fade/>
+      </p:transition>
+    </mc:Choice>
+    <mc:Fallback xmlns="">
+      <p:transition spd="med">
+        <p:fade/>
+      </p:transition>
+    </mc:Fallback>
+  </mc:AlternateContent>
+</p:sld>
+</file>
+
+<file path=ppt/slides/slide8.xml><?xml version="1.0" encoding="utf-8"?>
+<p:sld xmlns:a="http://schemas.openxmlformats.org/drawingml/2006/main" xmlns:r="http://schemas.openxmlformats.org/officeDocument/2006/relationships" xmlns:p="http://schemas.openxmlformats.org/presentationml/2006/main">
+  <p:cSld>
+    <p:spTree>
+      <p:nvGrpSpPr>
+        <p:cNvPr id="1" name=""/>
+        <p:cNvGrpSpPr/>
+        <p:nvPr/>
+      </p:nvGrpSpPr>
+      <p:grpSpPr>
+        <a:xfrm>
+          <a:off x="0" y="0"/>
+          <a:ext cx="0" cy="0"/>
+          <a:chOff x="0" y="0"/>
+          <a:chExt cx="0" cy="0"/>
+        </a:xfrm>
+      </p:grpSpPr>
+      <p:sp>
+        <p:nvSpPr>
+          <p:cNvPr id="2" name="Заголовок 1">
+            <a:extLst>
+              <a:ext uri="{FF2B5EF4-FFF2-40B4-BE49-F238E27FC236}">
                 <a16:creationId xmlns:a16="http://schemas.microsoft.com/office/drawing/2014/main" id="{16A7BA92-48F3-C9AC-93A9-511A781A5DEC}"/>
               </a:ext>
             </a:extLst>
@@ -7530,7 +7419,7 @@
 </p:sld>
 </file>
 
-<file path=ppt/slides/slide8.xml><?xml version="1.0" encoding="utf-8"?>
+<file path=ppt/slides/slide9.xml><?xml version="1.0" encoding="utf-8"?>
 <p:sld xmlns:a="http://schemas.openxmlformats.org/drawingml/2006/main" xmlns:r="http://schemas.openxmlformats.org/officeDocument/2006/relationships" xmlns:p="http://schemas.openxmlformats.org/presentationml/2006/main">
   <p:cSld>
     <p:spTree>
@@ -8091,220 +7980,6 @@
 </p:sld>
 </file>
 
-<file path=ppt/slides/slide9.xml><?xml version="1.0" encoding="utf-8"?>
-<p:sld xmlns:a="http://schemas.openxmlformats.org/drawingml/2006/main" xmlns:r="http://schemas.openxmlformats.org/officeDocument/2006/relationships" xmlns:p="http://schemas.openxmlformats.org/presentationml/2006/main">
-  <p:cSld>
-    <p:spTree>
-      <p:nvGrpSpPr>
-        <p:cNvPr id="1" name=""/>
-        <p:cNvGrpSpPr/>
-        <p:nvPr/>
-      </p:nvGrpSpPr>
-      <p:grpSpPr>
-        <a:xfrm>
-          <a:off x="0" y="0"/>
-          <a:ext cx="0" cy="0"/>
-          <a:chOff x="0" y="0"/>
-          <a:chExt cx="0" cy="0"/>
-        </a:xfrm>
-      </p:grpSpPr>
-      <p:sp>
-        <p:nvSpPr>
-          <p:cNvPr id="2" name="Заголовок 1">
-            <a:extLst>
-              <a:ext uri="{FF2B5EF4-FFF2-40B4-BE49-F238E27FC236}">
-                <a16:creationId xmlns:a16="http://schemas.microsoft.com/office/drawing/2014/main" id="{14260471-CF37-41A6-A525-02DD85A555CF}"/>
-              </a:ext>
-            </a:extLst>
-          </p:cNvPr>
-          <p:cNvSpPr>
-            <a:spLocks noGrp="1"/>
-          </p:cNvSpPr>
-          <p:nvPr>
-            <p:ph type="title"/>
-          </p:nvPr>
-        </p:nvSpPr>
-        <p:spPr/>
-        <p:txBody>
-          <a:bodyPr/>
-          <a:lstStyle/>
-          <a:p>
-            <a:r>
-              <a:rPr lang="ru-RU" dirty="0"/>
-              <a:t>Недостатки</a:t>
-            </a:r>
-          </a:p>
-        </p:txBody>
-      </p:sp>
-      <p:sp>
-        <p:nvSpPr>
-          <p:cNvPr id="4" name="Нижний колонтитул 4">
-            <a:extLst>
-              <a:ext uri="{FF2B5EF4-FFF2-40B4-BE49-F238E27FC236}">
-                <a16:creationId xmlns:a16="http://schemas.microsoft.com/office/drawing/2014/main" id="{E08C957F-4112-4133-9044-85BF400516CF}"/>
-              </a:ext>
-            </a:extLst>
-          </p:cNvPr>
-          <p:cNvSpPr>
-            <a:spLocks noGrp="1"/>
-          </p:cNvSpPr>
-          <p:nvPr>
-            <p:ph type="ftr" sz="quarter" idx="11"/>
-          </p:nvPr>
-        </p:nvSpPr>
-        <p:spPr>
-          <a:xfrm>
-            <a:off x="2271000" y="6590454"/>
-            <a:ext cx="7650000" cy="365126"/>
-          </a:xfrm>
-        </p:spPr>
-        <p:txBody>
-          <a:bodyPr/>
-          <a:lstStyle/>
-          <a:p>
-            <a:r>
-              <a:rPr lang="ru-RU" dirty="0">
-                <a:solidFill>
-                  <a:schemeClr val="tx1"/>
-                </a:solidFill>
-              </a:rPr>
-              <a:t>Шаблоны презентаций с сайта </a:t>
-            </a:r>
-            <a:r>
-              <a:rPr lang="en-US" dirty="0">
-                <a:hlinkClick r:id="rId2">
-                  <a:extLst>
-                    <a:ext uri="{A12FA001-AC4F-418D-AE19-62706E023703}">
-                      <ahyp:hlinkClr xmlns:ahyp="http://schemas.microsoft.com/office/drawing/2018/hyperlinkcolor" val="tx"/>
-                    </a:ext>
-                  </a:extLst>
-                </a:hlinkClick>
-              </a:rPr>
-              <a:t>presentation-creation.ru</a:t>
-            </a:r>
-            <a:endParaRPr lang="ru-RU" dirty="0"/>
-          </a:p>
-        </p:txBody>
-      </p:sp>
-      <p:sp>
-        <p:nvSpPr>
-          <p:cNvPr id="7" name="Объект 2">
-            <a:extLst>
-              <a:ext uri="{FF2B5EF4-FFF2-40B4-BE49-F238E27FC236}">
-                <a16:creationId xmlns:a16="http://schemas.microsoft.com/office/drawing/2014/main" id="{240D9285-B0C6-4610-955E-F20B74601DB9}"/>
-              </a:ext>
-            </a:extLst>
-          </p:cNvPr>
-          <p:cNvSpPr>
-            <a:spLocks noGrp="1"/>
-          </p:cNvSpPr>
-          <p:nvPr>
-            <p:ph idx="1"/>
-          </p:nvPr>
-        </p:nvSpPr>
-        <p:spPr>
-          <a:xfrm>
-            <a:off x="422941" y="2124386"/>
-            <a:ext cx="5794880" cy="3719196"/>
-          </a:xfrm>
-        </p:spPr>
-        <p:txBody>
-          <a:bodyPr>
-            <a:normAutofit/>
-          </a:bodyPr>
-          <a:lstStyle/>
-          <a:p>
-            <a:pPr marL="0" indent="0">
-              <a:buNone/>
-            </a:pPr>
-            <a:r>
-              <a:rPr lang="ru-RU" sz="2000" dirty="0"/>
-              <a:t>Очень сложно создавать прогноз для других городов</a:t>
-            </a:r>
-            <a:r>
-              <a:rPr lang="en-US" sz="2000" dirty="0"/>
-              <a:t>:</a:t>
-            </a:r>
-          </a:p>
-          <a:p>
-            <a:pPr marL="0" indent="0">
-              <a:buNone/>
-            </a:pPr>
-            <a:r>
-              <a:rPr lang="ru-RU" sz="2000" dirty="0"/>
-              <a:t>	Это связано с тем что ИИ учитывает 	мельчайшие детали характерные для 	определённых регионов</a:t>
-            </a:r>
-          </a:p>
-          <a:p>
-            <a:pPr marL="0" indent="0">
-              <a:buNone/>
-            </a:pPr>
-            <a:r>
-              <a:rPr lang="ru-RU" sz="2000" dirty="0"/>
-              <a:t>Сложность монетизации</a:t>
-            </a:r>
-            <a:r>
-              <a:rPr lang="en-US" sz="2000" dirty="0"/>
-              <a:t>:</a:t>
-            </a:r>
-          </a:p>
-          <a:p>
-            <a:pPr marL="0" indent="0">
-              <a:buNone/>
-            </a:pPr>
-            <a:r>
-              <a:rPr lang="en-US" sz="2000" dirty="0"/>
-              <a:t>	</a:t>
-            </a:r>
-            <a:r>
-              <a:rPr lang="ru-RU" sz="2000" dirty="0"/>
-              <a:t>Люди в промышленных городах уже 	привыкли к теме </a:t>
-            </a:r>
-            <a:r>
-              <a:rPr lang="en-US" sz="2000" dirty="0"/>
-              <a:t>’’</a:t>
-            </a:r>
-            <a:r>
-              <a:rPr lang="ru-RU" sz="2000" dirty="0"/>
-              <a:t>Чёрного неба</a:t>
-            </a:r>
-            <a:r>
-              <a:rPr lang="en-US" sz="2000" dirty="0"/>
-              <a:t>’’ </a:t>
-            </a:r>
-            <a:r>
-              <a:rPr lang="ru-RU" sz="2000" dirty="0"/>
-              <a:t>и не все 	готовы платить за эту информацию</a:t>
-            </a:r>
-            <a:endParaRPr lang="en-US" sz="2000" dirty="0"/>
-          </a:p>
-        </p:txBody>
-      </p:sp>
-    </p:spTree>
-    <p:extLst>
-      <p:ext uri="{BB962C8B-B14F-4D97-AF65-F5344CB8AC3E}">
-        <p14:creationId xmlns:p14="http://schemas.microsoft.com/office/powerpoint/2010/main" val="692898452"/>
-      </p:ext>
-    </p:extLst>
-  </p:cSld>
-  <p:clrMapOvr>
-    <a:masterClrMapping/>
-  </p:clrMapOvr>
-  <mc:AlternateContent xmlns:mc="http://schemas.openxmlformats.org/markup-compatibility/2006" xmlns:p14="http://schemas.microsoft.com/office/powerpoint/2010/main">
-    <mc:Choice Requires="p14">
-      <p:transition spd="med" p14:dur="700">
-        <p:fade/>
-      </p:transition>
-    </mc:Choice>
-    <mc:Fallback xmlns="">
-      <p:transition spd="med">
-        <p:fade/>
-      </p:transition>
-    </mc:Fallback>
-  </mc:AlternateContent>
-</p:sld>
-</file>
-
 <file path=ppt/theme/theme1.xml><?xml version="1.0" encoding="utf-8"?>
 <a:theme xmlns:a="http://schemas.openxmlformats.org/drawingml/2006/main" name="Тема Office">
   <a:themeElements>

--- a/Air Project.pptx
+++ b/Air Project.pptx
@@ -5317,7 +5317,7 @@
         </p:spPr>
         <p:txBody>
           <a:bodyPr>
-            <a:normAutofit lnSpcReduction="10000"/>
+            <a:normAutofit/>
           </a:bodyPr>
           <a:lstStyle/>
           <a:p>
@@ -5334,14 +5334,12 @@
           </a:p>
           <a:p>
             <a:r>
+              <a:rPr lang="ru-RU"/>
+              <a:t>Жителям </a:t>
+            </a:r>
+            <a:r>
               <a:rPr lang="ru-RU" dirty="0"/>
-              <a:t>В промышленных регионах смог накрывает районы за 30-40 минут.</a:t>
-            </a:r>
-          </a:p>
-          <a:p>
-            <a:r>
-              <a:rPr lang="ru-RU" dirty="0"/>
-              <a:t>Жителям нужно планировать день: когда вести ребенка в сад, когда выходить на пробежку, а когда закрыть окна.</a:t>
+              <a:t>нужно планировать день: когда вести ребенка в сад, когда выходить на пробежку, а когда закрыть окна.</a:t>
             </a:r>
           </a:p>
         </p:txBody>

--- a/Air Project.pptx
+++ b/Air Project.pptx
@@ -9,12 +9,11 @@
     <p:sldId id="269" r:id="rId3"/>
     <p:sldId id="258" r:id="rId4"/>
     <p:sldId id="259" r:id="rId5"/>
-    <p:sldId id="260" r:id="rId6"/>
-    <p:sldId id="261" r:id="rId7"/>
-    <p:sldId id="267" r:id="rId8"/>
-    <p:sldId id="268" r:id="rId9"/>
-    <p:sldId id="264" r:id="rId10"/>
-    <p:sldId id="266" r:id="rId11"/>
+    <p:sldId id="261" r:id="rId6"/>
+    <p:sldId id="267" r:id="rId7"/>
+    <p:sldId id="268" r:id="rId8"/>
+    <p:sldId id="264" r:id="rId9"/>
+    <p:sldId id="266" r:id="rId10"/>
   </p:sldIdLst>
   <p:sldSz cx="12192000" cy="6858000"/>
   <p:notesSz cx="6858000" cy="9144000"/>
@@ -4726,388 +4725,6 @@
 </p:sld>
 </file>
 
-<file path=ppt/slides/slide10.xml><?xml version="1.0" encoding="utf-8"?>
-<p:sld xmlns:a="http://schemas.openxmlformats.org/drawingml/2006/main" xmlns:r="http://schemas.openxmlformats.org/officeDocument/2006/relationships" xmlns:p="http://schemas.openxmlformats.org/presentationml/2006/main">
-  <p:cSld>
-    <p:spTree>
-      <p:nvGrpSpPr>
-        <p:cNvPr id="1" name=""/>
-        <p:cNvGrpSpPr/>
-        <p:nvPr/>
-      </p:nvGrpSpPr>
-      <p:grpSpPr>
-        <a:xfrm>
-          <a:off x="0" y="0"/>
-          <a:ext cx="0" cy="0"/>
-          <a:chOff x="0" y="0"/>
-          <a:chExt cx="0" cy="0"/>
-        </a:xfrm>
-      </p:grpSpPr>
-      <p:sp>
-        <p:nvSpPr>
-          <p:cNvPr id="4" name="Заголовок 9">
-            <a:extLst>
-              <a:ext uri="{FF2B5EF4-FFF2-40B4-BE49-F238E27FC236}">
-                <a16:creationId xmlns:a16="http://schemas.microsoft.com/office/drawing/2014/main" id="{D338E78D-9B63-4EB6-8A2B-E1CC8DD00C51}"/>
-              </a:ext>
-            </a:extLst>
-          </p:cNvPr>
-          <p:cNvSpPr txBox="1">
-            <a:spLocks/>
-          </p:cNvSpPr>
-          <p:nvPr/>
-        </p:nvSpPr>
-        <p:spPr>
-          <a:xfrm>
-            <a:off x="3334872" y="1548148"/>
-            <a:ext cx="5522258" cy="1150267"/>
-          </a:xfrm>
-          <a:prstGeom prst="rect">
-            <a:avLst/>
-          </a:prstGeom>
-          <a:effectLst>
-            <a:outerShdw blurRad="50800" dist="38100" dir="5400000" algn="t" rotWithShape="0">
-              <a:schemeClr val="accent4">
-                <a:lumMod val="50000"/>
-                <a:alpha val="40000"/>
-              </a:schemeClr>
-            </a:outerShdw>
-          </a:effectLst>
-        </p:spPr>
-        <p:txBody>
-          <a:bodyPr/>
-          <a:lstStyle>
-            <a:lvl1pPr algn="l" defTabSz="914400" rtl="0" eaLnBrk="1" latinLnBrk="0" hangingPunct="1">
-              <a:lnSpc>
-                <a:spcPct val="90000"/>
-              </a:lnSpc>
-              <a:spcBef>
-                <a:spcPct val="0"/>
-              </a:spcBef>
-              <a:buNone/>
-              <a:defRPr sz="4400" kern="1200">
-                <a:solidFill>
-                  <a:schemeClr val="tx1"/>
-                </a:solidFill>
-                <a:latin typeface="+mj-lt"/>
-                <a:ea typeface="+mj-ea"/>
-                <a:cs typeface="+mj-cs"/>
-              </a:defRPr>
-            </a:lvl1pPr>
-          </a:lstStyle>
-          <a:p>
-            <a:pPr algn="ctr"/>
-            <a:r>
-              <a:rPr lang="ru-RU" sz="6000" b="1" dirty="0">
-                <a:solidFill>
-                  <a:schemeClr val="accent1"/>
-                </a:solidFill>
-              </a:rPr>
-              <a:t>СПАСИБО ЗА ВНИМАНИЕ</a:t>
-            </a:r>
-          </a:p>
-        </p:txBody>
-      </p:sp>
-      <p:sp>
-        <p:nvSpPr>
-          <p:cNvPr id="8" name="Текст 11">
-            <a:extLst>
-              <a:ext uri="{FF2B5EF4-FFF2-40B4-BE49-F238E27FC236}">
-                <a16:creationId xmlns:a16="http://schemas.microsoft.com/office/drawing/2014/main" id="{DD74839E-6A64-467A-BA2F-9EF5F2388467}"/>
-              </a:ext>
-            </a:extLst>
-          </p:cNvPr>
-          <p:cNvSpPr txBox="1">
-            <a:spLocks/>
-          </p:cNvSpPr>
-          <p:nvPr/>
-        </p:nvSpPr>
-        <p:spPr>
-          <a:xfrm>
-            <a:off x="2608499" y="2885011"/>
-            <a:ext cx="6975002" cy="1705729"/>
-          </a:xfrm>
-          <a:prstGeom prst="rect">
-            <a:avLst/>
-          </a:prstGeom>
-        </p:spPr>
-        <p:txBody>
-          <a:bodyPr>
-            <a:noAutofit/>
-          </a:bodyPr>
-          <a:lstStyle>
-            <a:lvl1pPr marL="228600" indent="-228600" algn="l" defTabSz="914400" rtl="0" eaLnBrk="1" latinLnBrk="0" hangingPunct="1">
-              <a:lnSpc>
-                <a:spcPct val="90000"/>
-              </a:lnSpc>
-              <a:spcBef>
-                <a:spcPts val="1000"/>
-              </a:spcBef>
-              <a:buFont typeface="Arial" panose="020B0604020202020204" pitchFamily="34" charset="0"/>
-              <a:buChar char="•"/>
-              <a:defRPr sz="2800" kern="1200">
-                <a:solidFill>
-                  <a:schemeClr val="tx1"/>
-                </a:solidFill>
-                <a:latin typeface="+mn-lt"/>
-                <a:ea typeface="+mn-ea"/>
-                <a:cs typeface="+mn-cs"/>
-              </a:defRPr>
-            </a:lvl1pPr>
-            <a:lvl2pPr marL="685800" indent="-228600" algn="l" defTabSz="914400" rtl="0" eaLnBrk="1" latinLnBrk="0" hangingPunct="1">
-              <a:lnSpc>
-                <a:spcPct val="90000"/>
-              </a:lnSpc>
-              <a:spcBef>
-                <a:spcPts val="500"/>
-              </a:spcBef>
-              <a:buFont typeface="Arial" panose="020B0604020202020204" pitchFamily="34" charset="0"/>
-              <a:buChar char="•"/>
-              <a:defRPr sz="2400" kern="1200">
-                <a:solidFill>
-                  <a:schemeClr val="tx1"/>
-                </a:solidFill>
-                <a:latin typeface="+mn-lt"/>
-                <a:ea typeface="+mn-ea"/>
-                <a:cs typeface="+mn-cs"/>
-              </a:defRPr>
-            </a:lvl2pPr>
-            <a:lvl3pPr marL="1143000" indent="-228600" algn="l" defTabSz="914400" rtl="0" eaLnBrk="1" latinLnBrk="0" hangingPunct="1">
-              <a:lnSpc>
-                <a:spcPct val="90000"/>
-              </a:lnSpc>
-              <a:spcBef>
-                <a:spcPts val="500"/>
-              </a:spcBef>
-              <a:buFont typeface="Arial" panose="020B0604020202020204" pitchFamily="34" charset="0"/>
-              <a:buChar char="•"/>
-              <a:defRPr sz="2000" kern="1200">
-                <a:solidFill>
-                  <a:schemeClr val="tx1"/>
-                </a:solidFill>
-                <a:latin typeface="+mn-lt"/>
-                <a:ea typeface="+mn-ea"/>
-                <a:cs typeface="+mn-cs"/>
-              </a:defRPr>
-            </a:lvl3pPr>
-            <a:lvl4pPr marL="1600200" indent="-228600" algn="l" defTabSz="914400" rtl="0" eaLnBrk="1" latinLnBrk="0" hangingPunct="1">
-              <a:lnSpc>
-                <a:spcPct val="90000"/>
-              </a:lnSpc>
-              <a:spcBef>
-                <a:spcPts val="500"/>
-              </a:spcBef>
-              <a:buFont typeface="Arial" panose="020B0604020202020204" pitchFamily="34" charset="0"/>
-              <a:buChar char="•"/>
-              <a:defRPr sz="1800" kern="1200">
-                <a:solidFill>
-                  <a:schemeClr val="tx1"/>
-                </a:solidFill>
-                <a:latin typeface="+mn-lt"/>
-                <a:ea typeface="+mn-ea"/>
-                <a:cs typeface="+mn-cs"/>
-              </a:defRPr>
-            </a:lvl4pPr>
-            <a:lvl5pPr marL="2057400" indent="-228600" algn="l" defTabSz="914400" rtl="0" eaLnBrk="1" latinLnBrk="0" hangingPunct="1">
-              <a:lnSpc>
-                <a:spcPct val="90000"/>
-              </a:lnSpc>
-              <a:spcBef>
-                <a:spcPts val="500"/>
-              </a:spcBef>
-              <a:buFont typeface="Arial" panose="020B0604020202020204" pitchFamily="34" charset="0"/>
-              <a:buChar char="•"/>
-              <a:defRPr sz="1800" kern="1200">
-                <a:solidFill>
-                  <a:schemeClr val="tx1"/>
-                </a:solidFill>
-                <a:latin typeface="+mn-lt"/>
-                <a:ea typeface="+mn-ea"/>
-                <a:cs typeface="+mn-cs"/>
-              </a:defRPr>
-            </a:lvl5pPr>
-            <a:lvl6pPr marL="2514600" indent="-228600" algn="l" defTabSz="914400" rtl="0" eaLnBrk="1" latinLnBrk="0" hangingPunct="1">
-              <a:lnSpc>
-                <a:spcPct val="90000"/>
-              </a:lnSpc>
-              <a:spcBef>
-                <a:spcPts val="500"/>
-              </a:spcBef>
-              <a:buFont typeface="Arial" panose="020B0604020202020204" pitchFamily="34" charset="0"/>
-              <a:buChar char="•"/>
-              <a:defRPr sz="1800" kern="1200">
-                <a:solidFill>
-                  <a:schemeClr val="tx1"/>
-                </a:solidFill>
-                <a:latin typeface="+mn-lt"/>
-                <a:ea typeface="+mn-ea"/>
-                <a:cs typeface="+mn-cs"/>
-              </a:defRPr>
-            </a:lvl6pPr>
-            <a:lvl7pPr marL="2971800" indent="-228600" algn="l" defTabSz="914400" rtl="0" eaLnBrk="1" latinLnBrk="0" hangingPunct="1">
-              <a:lnSpc>
-                <a:spcPct val="90000"/>
-              </a:lnSpc>
-              <a:spcBef>
-                <a:spcPts val="500"/>
-              </a:spcBef>
-              <a:buFont typeface="Arial" panose="020B0604020202020204" pitchFamily="34" charset="0"/>
-              <a:buChar char="•"/>
-              <a:defRPr sz="1800" kern="1200">
-                <a:solidFill>
-                  <a:schemeClr val="tx1"/>
-                </a:solidFill>
-                <a:latin typeface="+mn-lt"/>
-                <a:ea typeface="+mn-ea"/>
-                <a:cs typeface="+mn-cs"/>
-              </a:defRPr>
-            </a:lvl7pPr>
-            <a:lvl8pPr marL="3429000" indent="-228600" algn="l" defTabSz="914400" rtl="0" eaLnBrk="1" latinLnBrk="0" hangingPunct="1">
-              <a:lnSpc>
-                <a:spcPct val="90000"/>
-              </a:lnSpc>
-              <a:spcBef>
-                <a:spcPts val="500"/>
-              </a:spcBef>
-              <a:buFont typeface="Arial" panose="020B0604020202020204" pitchFamily="34" charset="0"/>
-              <a:buChar char="•"/>
-              <a:defRPr sz="1800" kern="1200">
-                <a:solidFill>
-                  <a:schemeClr val="tx1"/>
-                </a:solidFill>
-                <a:latin typeface="+mn-lt"/>
-                <a:ea typeface="+mn-ea"/>
-                <a:cs typeface="+mn-cs"/>
-              </a:defRPr>
-            </a:lvl8pPr>
-            <a:lvl9pPr marL="3886200" indent="-228600" algn="l" defTabSz="914400" rtl="0" eaLnBrk="1" latinLnBrk="0" hangingPunct="1">
-              <a:lnSpc>
-                <a:spcPct val="90000"/>
-              </a:lnSpc>
-              <a:spcBef>
-                <a:spcPts val="500"/>
-              </a:spcBef>
-              <a:buFont typeface="Arial" panose="020B0604020202020204" pitchFamily="34" charset="0"/>
-              <a:buChar char="•"/>
-              <a:defRPr sz="1800" kern="1200">
-                <a:solidFill>
-                  <a:schemeClr val="tx1"/>
-                </a:solidFill>
-                <a:latin typeface="+mn-lt"/>
-                <a:ea typeface="+mn-ea"/>
-                <a:cs typeface="+mn-cs"/>
-              </a:defRPr>
-            </a:lvl9pPr>
-          </a:lstStyle>
-          <a:p>
-            <a:pPr marL="0" indent="0">
-              <a:buNone/>
-            </a:pPr>
-            <a:endParaRPr lang="ru-RU" sz="1600" dirty="0">
-              <a:solidFill>
-                <a:schemeClr val="accent1"/>
-              </a:solidFill>
-            </a:endParaRPr>
-          </a:p>
-        </p:txBody>
-      </p:sp>
-      <p:pic>
-        <p:nvPicPr>
-          <p:cNvPr id="3" name="Рисунок 2">
-            <a:extLst>
-              <a:ext uri="{FF2B5EF4-FFF2-40B4-BE49-F238E27FC236}">
-                <a16:creationId xmlns:a16="http://schemas.microsoft.com/office/drawing/2014/main" id="{82AD868C-C44C-6DC2-FF1A-5C2E3A61AE1C}"/>
-              </a:ext>
-            </a:extLst>
-          </p:cNvPr>
-          <p:cNvPicPr>
-            <a:picLocks noChangeAspect="1"/>
-          </p:cNvPicPr>
-          <p:nvPr/>
-        </p:nvPicPr>
-        <p:blipFill>
-          <a:blip r:embed="rId2">
-            <a:extLst>
-              <a:ext uri="{28A0092B-C50C-407E-A947-70E740481C1C}">
-                <a14:useLocalDpi xmlns:a14="http://schemas.microsoft.com/office/drawing/2010/main" val="0"/>
-              </a:ext>
-            </a:extLst>
-          </a:blip>
-          <a:stretch>
-            <a:fillRect/>
-          </a:stretch>
-        </p:blipFill>
-        <p:spPr>
-          <a:xfrm>
-            <a:off x="5314950" y="4886183"/>
-            <a:ext cx="1562100" cy="1562100"/>
-          </a:xfrm>
-          <a:prstGeom prst="rect">
-            <a:avLst/>
-          </a:prstGeom>
-        </p:spPr>
-      </p:pic>
-      <p:sp>
-        <p:nvSpPr>
-          <p:cNvPr id="5" name="TextBox 4">
-            <a:extLst>
-              <a:ext uri="{FF2B5EF4-FFF2-40B4-BE49-F238E27FC236}">
-                <a16:creationId xmlns:a16="http://schemas.microsoft.com/office/drawing/2014/main" id="{808E5EFA-47DB-3B55-3F30-8918A2AD61DD}"/>
-              </a:ext>
-            </a:extLst>
-          </p:cNvPr>
-          <p:cNvSpPr txBox="1"/>
-          <p:nvPr/>
-        </p:nvSpPr>
-        <p:spPr>
-          <a:xfrm>
-            <a:off x="5677468" y="4507453"/>
-            <a:ext cx="2620370" cy="369332"/>
-          </a:xfrm>
-          <a:prstGeom prst="rect">
-            <a:avLst/>
-          </a:prstGeom>
-          <a:noFill/>
-        </p:spPr>
-        <p:txBody>
-          <a:bodyPr wrap="square" rtlCol="0">
-            <a:spAutoFit/>
-          </a:bodyPr>
-          <a:lstStyle/>
-          <a:p>
-            <a:r>
-              <a:rPr lang="en-US" dirty="0"/>
-              <a:t>GitHub</a:t>
-            </a:r>
-            <a:endParaRPr lang="ru-RU" dirty="0"/>
-          </a:p>
-        </p:txBody>
-      </p:sp>
-    </p:spTree>
-    <p:extLst>
-      <p:ext uri="{BB962C8B-B14F-4D97-AF65-F5344CB8AC3E}">
-        <p14:creationId xmlns:p14="http://schemas.microsoft.com/office/powerpoint/2010/main" val="1922488827"/>
-      </p:ext>
-    </p:extLst>
-  </p:cSld>
-  <p:clrMapOvr>
-    <a:masterClrMapping/>
-  </p:clrMapOvr>
-  <mc:AlternateContent xmlns:mc="http://schemas.openxmlformats.org/markup-compatibility/2006" xmlns:p14="http://schemas.microsoft.com/office/powerpoint/2010/main">
-    <mc:Choice Requires="p14">
-      <p:transition spd="med" p14:dur="700">
-        <p:fade/>
-      </p:transition>
-    </mc:Choice>
-    <mc:Fallback xmlns="">
-      <p:transition spd="med">
-        <p:fade/>
-      </p:transition>
-    </mc:Fallback>
-  </mc:AlternateContent>
-</p:sld>
-</file>
-
 <file path=ppt/slides/slide2.xml><?xml version="1.0" encoding="utf-8"?>
 <p:sld xmlns:a="http://schemas.openxmlformats.org/drawingml/2006/main" xmlns:r="http://schemas.openxmlformats.org/officeDocument/2006/relationships" xmlns:p="http://schemas.openxmlformats.org/presentationml/2006/main">
   <p:cSld>
@@ -5334,12 +4951,8 @@
           </a:p>
           <a:p>
             <a:r>
-              <a:rPr lang="ru-RU"/>
-              <a:t>Жителям </a:t>
-            </a:r>
-            <a:r>
               <a:rPr lang="ru-RU" dirty="0"/>
-              <a:t>нужно планировать день: когда вести ребенка в сад, когда выходить на пробежку, а когда закрыть окна.</a:t>
+              <a:t>Жителям нужно планировать день: когда вести ребенка в сад, когда выходить на пробежку, а когда закрыть окна.</a:t>
             </a:r>
           </a:p>
         </p:txBody>
@@ -6671,18 +6284,17 @@
           <a:p>
             <a:r>
               <a:rPr lang="ru-RU" b="1" dirty="0"/>
-              <a:t>Как работает ИИ?</a:t>
-            </a:r>
-            <a:endParaRPr lang="ru-RU" dirty="0"/>
-          </a:p>
-        </p:txBody>
-      </p:sp>
-      <p:sp>
-        <p:nvSpPr>
-          <p:cNvPr id="3" name="TextBox 2">
-            <a:extLst>
-              <a:ext uri="{FF2B5EF4-FFF2-40B4-BE49-F238E27FC236}">
-                <a16:creationId xmlns:a16="http://schemas.microsoft.com/office/drawing/2014/main" id="{C41EA150-1758-1AD2-F3F4-F616CD409D21}"/>
+              <a:t>Планирование для групп риска</a:t>
+            </a:r>
+          </a:p>
+        </p:txBody>
+      </p:sp>
+      <p:sp>
+        <p:nvSpPr>
+          <p:cNvPr id="6" name="TextBox 5">
+            <a:extLst>
+              <a:ext uri="{FF2B5EF4-FFF2-40B4-BE49-F238E27FC236}">
+                <a16:creationId xmlns:a16="http://schemas.microsoft.com/office/drawing/2014/main" id="{0ED57510-DE25-5BE3-8DF4-510683466432}"/>
               </a:ext>
             </a:extLst>
           </p:cNvPr>
@@ -6691,8 +6303,8 @@
         </p:nvSpPr>
         <p:spPr>
           <a:xfrm>
-            <a:off x="488272" y="2095130"/>
-            <a:ext cx="8078679" cy="4308872"/>
+            <a:off x="838200" y="1908699"/>
+            <a:ext cx="8971625" cy="3816429"/>
           </a:xfrm>
           <a:prstGeom prst="rect">
             <a:avLst/>
@@ -6707,31 +6319,41 @@
           <a:p>
             <a:r>
               <a:rPr lang="ru-RU" sz="3200" b="1" dirty="0"/>
-              <a:t>Метеорология:</a:t>
+              <a:t>Польза:</a:t>
+            </a:r>
+            <a:endParaRPr lang="ru-RU" sz="3200" dirty="0"/>
+          </a:p>
+          <a:p>
+            <a:pPr lvl="1"/>
+            <a:r>
+              <a:rPr lang="ru-RU" sz="3200" b="1" dirty="0"/>
+              <a:t>Для родителей:</a:t>
             </a:r>
             <a:r>
               <a:rPr lang="ru-RU" sz="3200" dirty="0"/>
-              <a:t> Учет инверсий температуры, скорости и направления ветра в Кемеровской котловине.</a:t>
-            </a:r>
-          </a:p>
-          <a:p>
+              <a:t> Прогноз на время дневной прогулки.</a:t>
+            </a:r>
+          </a:p>
+          <a:p>
+            <a:pPr lvl="1"/>
             <a:r>
               <a:rPr lang="ru-RU" sz="3200" b="1" dirty="0"/>
-              <a:t>График выбросов:</a:t>
+              <a:t>Для аллергиков:</a:t>
             </a:r>
             <a:r>
               <a:rPr lang="ru-RU" sz="3200" dirty="0"/>
-              <a:t> Анализ циклов работы предприятий и интенсивности трафика.</a:t>
-            </a:r>
-          </a:p>
-          <a:p>
+              <a:t> Предупреждение о накоплении взвешенных частиц PM2.5.</a:t>
+            </a:r>
+          </a:p>
+          <a:p>
+            <a:pPr lvl="1"/>
             <a:r>
               <a:rPr lang="ru-RU" sz="3200" b="1" dirty="0"/>
-              <a:t>ML-модель:</a:t>
+              <a:t>Для спортсменов:</a:t>
             </a:r>
             <a:r>
               <a:rPr lang="ru-RU" sz="3200" dirty="0"/>
-              <a:t> Нейросеть, обученная на исторических данных НМУ (черного неба) в Кузбассе за последние 5 лет</a:t>
+              <a:t> Рекомендации о занятиях на улице.</a:t>
             </a:r>
           </a:p>
           <a:p>
@@ -6742,7 +6364,7 @@
     </p:spTree>
     <p:extLst>
       <p:ext uri="{BB962C8B-B14F-4D97-AF65-F5344CB8AC3E}">
-        <p14:creationId xmlns:p14="http://schemas.microsoft.com/office/powerpoint/2010/main" val="4111276976"/>
+        <p14:creationId xmlns:p14="http://schemas.microsoft.com/office/powerpoint/2010/main" val="1623620019"/>
       </p:ext>
     </p:extLst>
   </p:cSld>
@@ -6786,7 +6408,7 @@
           <p:cNvPr id="2" name="Заголовок 1">
             <a:extLst>
               <a:ext uri="{FF2B5EF4-FFF2-40B4-BE49-F238E27FC236}">
-                <a16:creationId xmlns:a16="http://schemas.microsoft.com/office/drawing/2014/main" id="{14260471-CF37-41A6-A525-02DD85A555CF}"/>
+                <a16:creationId xmlns:a16="http://schemas.microsoft.com/office/drawing/2014/main" id="{300FFB5B-1AC5-DE4D-D0A2-DDA71EF36D89}"/>
               </a:ext>
             </a:extLst>
           </p:cNvPr>
@@ -6803,18 +6425,49 @@
           <a:lstStyle/>
           <a:p>
             <a:r>
-              <a:rPr lang="ru-RU" b="1" dirty="0"/>
-              <a:t>Планирование для групп риска</a:t>
-            </a:r>
-          </a:p>
-        </p:txBody>
-      </p:sp>
-      <p:sp>
-        <p:nvSpPr>
-          <p:cNvPr id="6" name="TextBox 5">
-            <a:extLst>
-              <a:ext uri="{FF2B5EF4-FFF2-40B4-BE49-F238E27FC236}">
-                <a16:creationId xmlns:a16="http://schemas.microsoft.com/office/drawing/2014/main" id="{0ED57510-DE25-5BE3-8DF4-510683466432}"/>
+              <a:rPr lang="ru-RU" dirty="0"/>
+              <a:t>Экономика</a:t>
+            </a:r>
+          </a:p>
+        </p:txBody>
+      </p:sp>
+      <p:graphicFrame>
+        <p:nvGraphicFramePr>
+          <p:cNvPr id="7" name="Объект 6">
+            <a:extLst>
+              <a:ext uri="{FF2B5EF4-FFF2-40B4-BE49-F238E27FC236}">
+                <a16:creationId xmlns:a16="http://schemas.microsoft.com/office/drawing/2014/main" id="{043BFE52-9438-6909-7380-C9806776671C}"/>
+              </a:ext>
+            </a:extLst>
+          </p:cNvPr>
+          <p:cNvGraphicFramePr>
+            <a:graphicFrameLocks noGrp="1"/>
+          </p:cNvGraphicFramePr>
+          <p:nvPr>
+            <p:ph idx="1"/>
+            <p:extLst>
+              <p:ext uri="{D42A27DB-BD31-4B8C-83A1-F6EECF244321}">
+                <p14:modId xmlns:p14="http://schemas.microsoft.com/office/powerpoint/2010/main" val="2809498876"/>
+              </p:ext>
+            </p:extLst>
+          </p:nvPr>
+        </p:nvGraphicFramePr>
+        <p:xfrm>
+          <a:off x="2798886" y="152501"/>
+          <a:ext cx="8307079" cy="3842450"/>
+        </p:xfrm>
+        <a:graphic>
+          <a:graphicData uri="http://schemas.openxmlformats.org/drawingml/2006/chart">
+            <c:chart xmlns:c="http://schemas.openxmlformats.org/drawingml/2006/chart" xmlns:r="http://schemas.openxmlformats.org/officeDocument/2006/relationships" r:id="rId2"/>
+          </a:graphicData>
+        </a:graphic>
+      </p:graphicFrame>
+      <p:sp>
+        <p:nvSpPr>
+          <p:cNvPr id="8" name="TextBox 7">
+            <a:extLst>
+              <a:ext uri="{FF2B5EF4-FFF2-40B4-BE49-F238E27FC236}">
+                <a16:creationId xmlns:a16="http://schemas.microsoft.com/office/drawing/2014/main" id="{0E5C3C2E-E2C5-74EA-FB49-1693003EB914}"/>
               </a:ext>
             </a:extLst>
           </p:cNvPr>
@@ -6823,8 +6476,8 @@
         </p:nvSpPr>
         <p:spPr>
           <a:xfrm>
-            <a:off x="838200" y="1908699"/>
-            <a:ext cx="8971625" cy="3816429"/>
+            <a:off x="559293" y="1748901"/>
+            <a:ext cx="3302493" cy="1477328"/>
           </a:xfrm>
           <a:prstGeom prst="rect">
             <a:avLst/>
@@ -6838,53 +6491,194 @@
           <a:lstStyle/>
           <a:p>
             <a:r>
-              <a:rPr lang="ru-RU" sz="3200" b="1" dirty="0"/>
-              <a:t>Польза:</a:t>
-            </a:r>
-            <a:endParaRPr lang="ru-RU" sz="3200" dirty="0"/>
-          </a:p>
-          <a:p>
-            <a:pPr lvl="1"/>
-            <a:r>
-              <a:rPr lang="ru-RU" sz="3200" b="1" dirty="0"/>
-              <a:t>Для родителей:</a:t>
-            </a:r>
-            <a:r>
-              <a:rPr lang="ru-RU" sz="3200" dirty="0"/>
-              <a:t> Прогноз на время дневной прогулки.</a:t>
-            </a:r>
-          </a:p>
-          <a:p>
-            <a:pPr lvl="1"/>
-            <a:r>
-              <a:rPr lang="ru-RU" sz="3200" b="1" dirty="0"/>
-              <a:t>Для аллергиков:</a:t>
-            </a:r>
-            <a:r>
-              <a:rPr lang="ru-RU" sz="3200" dirty="0"/>
-              <a:t> Предупреждение о накоплении взвешенных частиц PM2.5.</a:t>
-            </a:r>
-          </a:p>
-          <a:p>
-            <a:pPr lvl="1"/>
-            <a:r>
-              <a:rPr lang="ru-RU" sz="3200" b="1" dirty="0"/>
-              <a:t>Для спортсменов:</a:t>
-            </a:r>
-            <a:r>
-              <a:rPr lang="ru-RU" sz="3200" dirty="0"/>
-              <a:t> Рекомендации о занятиях на улице.</a:t>
-            </a:r>
-          </a:p>
-          <a:p>
+              <a:rPr lang="ru-RU" dirty="0"/>
+              <a:t>Затраты</a:t>
+            </a:r>
+            <a:r>
+              <a:rPr lang="en-US" dirty="0"/>
+              <a:t>:</a:t>
+            </a:r>
+            <a:br>
+              <a:rPr lang="en-US" dirty="0"/>
+            </a:br>
+            <a:r>
+              <a:rPr lang="ru-RU" dirty="0"/>
+              <a:t>Реклама</a:t>
+            </a:r>
+            <a:r>
+              <a:rPr lang="en-US" dirty="0"/>
+              <a:t>: </a:t>
+            </a:r>
+            <a:r>
+              <a:rPr lang="ru-RU" dirty="0"/>
+              <a:t>200000р</a:t>
+            </a:r>
+          </a:p>
+          <a:p>
+            <a:r>
+              <a:rPr lang="ru-RU" dirty="0"/>
+              <a:t>Оборудование</a:t>
+            </a:r>
+            <a:r>
+              <a:rPr lang="en-US" dirty="0"/>
+              <a:t>: </a:t>
+            </a:r>
+            <a:r>
+              <a:rPr lang="ru-RU" dirty="0"/>
+              <a:t>30</a:t>
+            </a:r>
+            <a:r>
+              <a:rPr lang="en-US" dirty="0"/>
+              <a:t>0000</a:t>
+            </a:r>
+            <a:r>
+              <a:rPr lang="ru-RU" dirty="0"/>
+              <a:t>р</a:t>
+            </a:r>
+          </a:p>
+          <a:p>
+            <a:r>
+              <a:rPr lang="ru-RU" dirty="0"/>
+              <a:t>Разработка</a:t>
+            </a:r>
+            <a:r>
+              <a:rPr lang="en-US" dirty="0"/>
+              <a:t>: 300000</a:t>
+            </a:r>
+            <a:r>
+              <a:rPr lang="ru-RU" dirty="0"/>
+              <a:t>р</a:t>
+            </a:r>
+          </a:p>
+          <a:p>
+            <a:r>
+              <a:rPr lang="ru-RU" dirty="0"/>
+              <a:t>Сервера</a:t>
+            </a:r>
+            <a:r>
+              <a:rPr lang="en-US" dirty="0"/>
+              <a:t>:</a:t>
+            </a:r>
+            <a:r>
+              <a:rPr lang="ru-RU" dirty="0"/>
+              <a:t> 6</a:t>
+            </a:r>
+            <a:r>
+              <a:rPr lang="en-US" dirty="0"/>
+              <a:t>0000</a:t>
+            </a:r>
+            <a:r>
+              <a:rPr lang="ru-RU" dirty="0"/>
+              <a:t>р</a:t>
+            </a:r>
+          </a:p>
+        </p:txBody>
+      </p:sp>
+      <p:sp>
+        <p:nvSpPr>
+          <p:cNvPr id="9" name="TextBox 8">
+            <a:extLst>
+              <a:ext uri="{FF2B5EF4-FFF2-40B4-BE49-F238E27FC236}">
+                <a16:creationId xmlns:a16="http://schemas.microsoft.com/office/drawing/2014/main" id="{86BDA1E4-7254-81BF-25C7-AEFED712ACBD}"/>
+              </a:ext>
+            </a:extLst>
+          </p:cNvPr>
+          <p:cNvSpPr txBox="1"/>
+          <p:nvPr/>
+        </p:nvSpPr>
+        <p:spPr>
+          <a:xfrm>
+            <a:off x="559293" y="4279037"/>
+            <a:ext cx="3932808" cy="923330"/>
+          </a:xfrm>
+          <a:prstGeom prst="rect">
+            <a:avLst/>
+          </a:prstGeom>
+          <a:noFill/>
+        </p:spPr>
+        <p:txBody>
+          <a:bodyPr wrap="square" rtlCol="0">
+            <a:spAutoFit/>
+          </a:bodyPr>
+          <a:lstStyle/>
+          <a:p>
+            <a:r>
+              <a:rPr lang="ru-RU" dirty="0"/>
+              <a:t>Прибыль</a:t>
+            </a:r>
+            <a:r>
+              <a:rPr lang="en-US" dirty="0"/>
+              <a:t>:</a:t>
+            </a:r>
+          </a:p>
+          <a:p>
+            <a:r>
+              <a:rPr lang="en-US" dirty="0"/>
+              <a:t>B2C </a:t>
+            </a:r>
+            <a:r>
+              <a:rPr lang="ru-RU" dirty="0"/>
+              <a:t>Подписки</a:t>
+            </a:r>
+            <a:r>
+              <a:rPr lang="en-US" dirty="0"/>
+              <a:t>: 50000</a:t>
+            </a:r>
+            <a:r>
+              <a:rPr lang="ru-RU" dirty="0"/>
+              <a:t>р</a:t>
+            </a:r>
+            <a:r>
+              <a:rPr lang="en-US" dirty="0"/>
+              <a:t>/</a:t>
+            </a:r>
+            <a:r>
+              <a:rPr lang="ru-RU" dirty="0" err="1"/>
+              <a:t>мес</a:t>
+            </a:r>
             <a:endParaRPr lang="ru-RU" dirty="0"/>
+          </a:p>
+          <a:p>
+            <a:r>
+              <a:rPr lang="en-US" dirty="0"/>
+              <a:t>B2B </a:t>
+            </a:r>
+            <a:r>
+              <a:rPr lang="ru-RU" dirty="0"/>
+              <a:t>клиенты(компании)</a:t>
+            </a:r>
+            <a:r>
+              <a:rPr lang="en-US" dirty="0"/>
+              <a:t>: 10</a:t>
+            </a:r>
+            <a:r>
+              <a:rPr lang="ru-RU" dirty="0"/>
+              <a:t>0</a:t>
+            </a:r>
+            <a:r>
+              <a:rPr lang="en-US" dirty="0"/>
+              <a:t>000</a:t>
+            </a:r>
+            <a:r>
+              <a:rPr lang="ru-RU" dirty="0"/>
+              <a:t>р</a:t>
+            </a:r>
+            <a:r>
+              <a:rPr lang="en-US" dirty="0"/>
+              <a:t>/</a:t>
+            </a:r>
+            <a:r>
+              <a:rPr lang="ru-RU" dirty="0" err="1"/>
+              <a:t>мес</a:t>
+            </a:r>
+            <a:endParaRPr lang="en-US" dirty="0"/>
           </a:p>
         </p:txBody>
       </p:sp>
     </p:spTree>
     <p:extLst>
       <p:ext uri="{BB962C8B-B14F-4D97-AF65-F5344CB8AC3E}">
-        <p14:creationId xmlns:p14="http://schemas.microsoft.com/office/powerpoint/2010/main" val="1623620019"/>
+        <p14:creationId xmlns:p14="http://schemas.microsoft.com/office/powerpoint/2010/main" val="3594709994"/>
       </p:ext>
     </p:extLst>
   </p:cSld>
@@ -6928,320 +6722,6 @@
           <p:cNvPr id="2" name="Заголовок 1">
             <a:extLst>
               <a:ext uri="{FF2B5EF4-FFF2-40B4-BE49-F238E27FC236}">
-                <a16:creationId xmlns:a16="http://schemas.microsoft.com/office/drawing/2014/main" id="{300FFB5B-1AC5-DE4D-D0A2-DDA71EF36D89}"/>
-              </a:ext>
-            </a:extLst>
-          </p:cNvPr>
-          <p:cNvSpPr>
-            <a:spLocks noGrp="1"/>
-          </p:cNvSpPr>
-          <p:nvPr>
-            <p:ph type="title"/>
-          </p:nvPr>
-        </p:nvSpPr>
-        <p:spPr/>
-        <p:txBody>
-          <a:bodyPr/>
-          <a:lstStyle/>
-          <a:p>
-            <a:r>
-              <a:rPr lang="ru-RU" dirty="0"/>
-              <a:t>Экономика</a:t>
-            </a:r>
-          </a:p>
-        </p:txBody>
-      </p:sp>
-      <p:graphicFrame>
-        <p:nvGraphicFramePr>
-          <p:cNvPr id="7" name="Объект 6">
-            <a:extLst>
-              <a:ext uri="{FF2B5EF4-FFF2-40B4-BE49-F238E27FC236}">
-                <a16:creationId xmlns:a16="http://schemas.microsoft.com/office/drawing/2014/main" id="{043BFE52-9438-6909-7380-C9806776671C}"/>
-              </a:ext>
-            </a:extLst>
-          </p:cNvPr>
-          <p:cNvGraphicFramePr>
-            <a:graphicFrameLocks noGrp="1"/>
-          </p:cNvGraphicFramePr>
-          <p:nvPr>
-            <p:ph idx="1"/>
-            <p:extLst>
-              <p:ext uri="{D42A27DB-BD31-4B8C-83A1-F6EECF244321}">
-                <p14:modId xmlns:p14="http://schemas.microsoft.com/office/powerpoint/2010/main" val="2809498876"/>
-              </p:ext>
-            </p:extLst>
-          </p:nvPr>
-        </p:nvGraphicFramePr>
-        <p:xfrm>
-          <a:off x="2798886" y="152501"/>
-          <a:ext cx="8307079" cy="3842450"/>
-        </p:xfrm>
-        <a:graphic>
-          <a:graphicData uri="http://schemas.openxmlformats.org/drawingml/2006/chart">
-            <c:chart xmlns:c="http://schemas.openxmlformats.org/drawingml/2006/chart" xmlns:r="http://schemas.openxmlformats.org/officeDocument/2006/relationships" r:id="rId2"/>
-          </a:graphicData>
-        </a:graphic>
-      </p:graphicFrame>
-      <p:sp>
-        <p:nvSpPr>
-          <p:cNvPr id="8" name="TextBox 7">
-            <a:extLst>
-              <a:ext uri="{FF2B5EF4-FFF2-40B4-BE49-F238E27FC236}">
-                <a16:creationId xmlns:a16="http://schemas.microsoft.com/office/drawing/2014/main" id="{0E5C3C2E-E2C5-74EA-FB49-1693003EB914}"/>
-              </a:ext>
-            </a:extLst>
-          </p:cNvPr>
-          <p:cNvSpPr txBox="1"/>
-          <p:nvPr/>
-        </p:nvSpPr>
-        <p:spPr>
-          <a:xfrm>
-            <a:off x="559293" y="1748901"/>
-            <a:ext cx="3302493" cy="1477328"/>
-          </a:xfrm>
-          <a:prstGeom prst="rect">
-            <a:avLst/>
-          </a:prstGeom>
-          <a:noFill/>
-        </p:spPr>
-        <p:txBody>
-          <a:bodyPr wrap="square" rtlCol="0">
-            <a:spAutoFit/>
-          </a:bodyPr>
-          <a:lstStyle/>
-          <a:p>
-            <a:r>
-              <a:rPr lang="ru-RU" dirty="0"/>
-              <a:t>Затраты</a:t>
-            </a:r>
-            <a:r>
-              <a:rPr lang="en-US" dirty="0"/>
-              <a:t>:</a:t>
-            </a:r>
-            <a:br>
-              <a:rPr lang="en-US" dirty="0"/>
-            </a:br>
-            <a:r>
-              <a:rPr lang="ru-RU" dirty="0"/>
-              <a:t>Реклама</a:t>
-            </a:r>
-            <a:r>
-              <a:rPr lang="en-US" dirty="0"/>
-              <a:t>: </a:t>
-            </a:r>
-            <a:r>
-              <a:rPr lang="ru-RU" dirty="0"/>
-              <a:t>200000р</a:t>
-            </a:r>
-          </a:p>
-          <a:p>
-            <a:r>
-              <a:rPr lang="ru-RU" dirty="0"/>
-              <a:t>Оборудование</a:t>
-            </a:r>
-            <a:r>
-              <a:rPr lang="en-US" dirty="0"/>
-              <a:t>: </a:t>
-            </a:r>
-            <a:r>
-              <a:rPr lang="ru-RU" dirty="0"/>
-              <a:t>30</a:t>
-            </a:r>
-            <a:r>
-              <a:rPr lang="en-US" dirty="0"/>
-              <a:t>0000</a:t>
-            </a:r>
-            <a:r>
-              <a:rPr lang="ru-RU" dirty="0"/>
-              <a:t>р</a:t>
-            </a:r>
-          </a:p>
-          <a:p>
-            <a:r>
-              <a:rPr lang="ru-RU" dirty="0"/>
-              <a:t>Разработка</a:t>
-            </a:r>
-            <a:r>
-              <a:rPr lang="en-US" dirty="0"/>
-              <a:t>: 300000</a:t>
-            </a:r>
-            <a:r>
-              <a:rPr lang="ru-RU" dirty="0"/>
-              <a:t>р</a:t>
-            </a:r>
-          </a:p>
-          <a:p>
-            <a:r>
-              <a:rPr lang="ru-RU" dirty="0"/>
-              <a:t>Сервера</a:t>
-            </a:r>
-            <a:r>
-              <a:rPr lang="en-US" dirty="0"/>
-              <a:t>:</a:t>
-            </a:r>
-            <a:r>
-              <a:rPr lang="ru-RU" dirty="0"/>
-              <a:t> 6</a:t>
-            </a:r>
-            <a:r>
-              <a:rPr lang="en-US" dirty="0"/>
-              <a:t>0000</a:t>
-            </a:r>
-            <a:r>
-              <a:rPr lang="ru-RU" dirty="0"/>
-              <a:t>р</a:t>
-            </a:r>
-          </a:p>
-        </p:txBody>
-      </p:sp>
-      <p:sp>
-        <p:nvSpPr>
-          <p:cNvPr id="9" name="TextBox 8">
-            <a:extLst>
-              <a:ext uri="{FF2B5EF4-FFF2-40B4-BE49-F238E27FC236}">
-                <a16:creationId xmlns:a16="http://schemas.microsoft.com/office/drawing/2014/main" id="{86BDA1E4-7254-81BF-25C7-AEFED712ACBD}"/>
-              </a:ext>
-            </a:extLst>
-          </p:cNvPr>
-          <p:cNvSpPr txBox="1"/>
-          <p:nvPr/>
-        </p:nvSpPr>
-        <p:spPr>
-          <a:xfrm>
-            <a:off x="559293" y="4279037"/>
-            <a:ext cx="3932808" cy="923330"/>
-          </a:xfrm>
-          <a:prstGeom prst="rect">
-            <a:avLst/>
-          </a:prstGeom>
-          <a:noFill/>
-        </p:spPr>
-        <p:txBody>
-          <a:bodyPr wrap="square" rtlCol="0">
-            <a:spAutoFit/>
-          </a:bodyPr>
-          <a:lstStyle/>
-          <a:p>
-            <a:r>
-              <a:rPr lang="ru-RU" dirty="0"/>
-              <a:t>Прибыль</a:t>
-            </a:r>
-            <a:r>
-              <a:rPr lang="en-US" dirty="0"/>
-              <a:t>:</a:t>
-            </a:r>
-          </a:p>
-          <a:p>
-            <a:r>
-              <a:rPr lang="en-US" dirty="0"/>
-              <a:t>B2C </a:t>
-            </a:r>
-            <a:r>
-              <a:rPr lang="ru-RU" dirty="0"/>
-              <a:t>Подписки</a:t>
-            </a:r>
-            <a:r>
-              <a:rPr lang="en-US" dirty="0"/>
-              <a:t>: 50000</a:t>
-            </a:r>
-            <a:r>
-              <a:rPr lang="ru-RU" dirty="0"/>
-              <a:t>р</a:t>
-            </a:r>
-            <a:r>
-              <a:rPr lang="en-US" dirty="0"/>
-              <a:t>/</a:t>
-            </a:r>
-            <a:r>
-              <a:rPr lang="ru-RU" dirty="0" err="1"/>
-              <a:t>мес</a:t>
-            </a:r>
-            <a:endParaRPr lang="ru-RU" dirty="0"/>
-          </a:p>
-          <a:p>
-            <a:r>
-              <a:rPr lang="en-US" dirty="0"/>
-              <a:t>B2B </a:t>
-            </a:r>
-            <a:r>
-              <a:rPr lang="ru-RU" dirty="0"/>
-              <a:t>клиенты(компании)</a:t>
-            </a:r>
-            <a:r>
-              <a:rPr lang="en-US" dirty="0"/>
-              <a:t>: 10</a:t>
-            </a:r>
-            <a:r>
-              <a:rPr lang="ru-RU" dirty="0"/>
-              <a:t>0</a:t>
-            </a:r>
-            <a:r>
-              <a:rPr lang="en-US" dirty="0"/>
-              <a:t>000</a:t>
-            </a:r>
-            <a:r>
-              <a:rPr lang="ru-RU" dirty="0"/>
-              <a:t>р</a:t>
-            </a:r>
-            <a:r>
-              <a:rPr lang="en-US" dirty="0"/>
-              <a:t>/</a:t>
-            </a:r>
-            <a:r>
-              <a:rPr lang="ru-RU" dirty="0" err="1"/>
-              <a:t>мес</a:t>
-            </a:r>
-            <a:endParaRPr lang="en-US" dirty="0"/>
-          </a:p>
-        </p:txBody>
-      </p:sp>
-    </p:spTree>
-    <p:extLst>
-      <p:ext uri="{BB962C8B-B14F-4D97-AF65-F5344CB8AC3E}">
-        <p14:creationId xmlns:p14="http://schemas.microsoft.com/office/powerpoint/2010/main" val="3594709994"/>
-      </p:ext>
-    </p:extLst>
-  </p:cSld>
-  <p:clrMapOvr>
-    <a:masterClrMapping/>
-  </p:clrMapOvr>
-  <mc:AlternateContent xmlns:mc="http://schemas.openxmlformats.org/markup-compatibility/2006" xmlns:p14="http://schemas.microsoft.com/office/powerpoint/2010/main">
-    <mc:Choice Requires="p14">
-      <p:transition spd="med" p14:dur="700">
-        <p:fade/>
-      </p:transition>
-    </mc:Choice>
-    <mc:Fallback xmlns="">
-      <p:transition spd="med">
-        <p:fade/>
-      </p:transition>
-    </mc:Fallback>
-  </mc:AlternateContent>
-</p:sld>
-</file>
-
-<file path=ppt/slides/slide8.xml><?xml version="1.0" encoding="utf-8"?>
-<p:sld xmlns:a="http://schemas.openxmlformats.org/drawingml/2006/main" xmlns:r="http://schemas.openxmlformats.org/officeDocument/2006/relationships" xmlns:p="http://schemas.openxmlformats.org/presentationml/2006/main">
-  <p:cSld>
-    <p:spTree>
-      <p:nvGrpSpPr>
-        <p:cNvPr id="1" name=""/>
-        <p:cNvGrpSpPr/>
-        <p:nvPr/>
-      </p:nvGrpSpPr>
-      <p:grpSpPr>
-        <a:xfrm>
-          <a:off x="0" y="0"/>
-          <a:ext cx="0" cy="0"/>
-          <a:chOff x="0" y="0"/>
-          <a:chExt cx="0" cy="0"/>
-        </a:xfrm>
-      </p:grpSpPr>
-      <p:sp>
-        <p:nvSpPr>
-          <p:cNvPr id="2" name="Заголовок 1">
-            <a:extLst>
-              <a:ext uri="{FF2B5EF4-FFF2-40B4-BE49-F238E27FC236}">
                 <a16:creationId xmlns:a16="http://schemas.microsoft.com/office/drawing/2014/main" id="{16A7BA92-48F3-C9AC-93A9-511A781A5DEC}"/>
               </a:ext>
             </a:extLst>
@@ -7417,7 +6897,7 @@
 </p:sld>
 </file>
 
-<file path=ppt/slides/slide9.xml><?xml version="1.0" encoding="utf-8"?>
+<file path=ppt/slides/slide8.xml><?xml version="1.0" encoding="utf-8"?>
 <p:sld xmlns:a="http://schemas.openxmlformats.org/drawingml/2006/main" xmlns:r="http://schemas.openxmlformats.org/officeDocument/2006/relationships" xmlns:p="http://schemas.openxmlformats.org/presentationml/2006/main">
   <p:cSld>
     <p:spTree>
@@ -7978,6 +7458,388 @@
 </p:sld>
 </file>
 
+<file path=ppt/slides/slide9.xml><?xml version="1.0" encoding="utf-8"?>
+<p:sld xmlns:a="http://schemas.openxmlformats.org/drawingml/2006/main" xmlns:r="http://schemas.openxmlformats.org/officeDocument/2006/relationships" xmlns:p="http://schemas.openxmlformats.org/presentationml/2006/main">
+  <p:cSld>
+    <p:spTree>
+      <p:nvGrpSpPr>
+        <p:cNvPr id="1" name=""/>
+        <p:cNvGrpSpPr/>
+        <p:nvPr/>
+      </p:nvGrpSpPr>
+      <p:grpSpPr>
+        <a:xfrm>
+          <a:off x="0" y="0"/>
+          <a:ext cx="0" cy="0"/>
+          <a:chOff x="0" y="0"/>
+          <a:chExt cx="0" cy="0"/>
+        </a:xfrm>
+      </p:grpSpPr>
+      <p:sp>
+        <p:nvSpPr>
+          <p:cNvPr id="4" name="Заголовок 9">
+            <a:extLst>
+              <a:ext uri="{FF2B5EF4-FFF2-40B4-BE49-F238E27FC236}">
+                <a16:creationId xmlns:a16="http://schemas.microsoft.com/office/drawing/2014/main" id="{D338E78D-9B63-4EB6-8A2B-E1CC8DD00C51}"/>
+              </a:ext>
+            </a:extLst>
+          </p:cNvPr>
+          <p:cNvSpPr txBox="1">
+            <a:spLocks/>
+          </p:cNvSpPr>
+          <p:nvPr/>
+        </p:nvSpPr>
+        <p:spPr>
+          <a:xfrm>
+            <a:off x="3334872" y="1548148"/>
+            <a:ext cx="5522258" cy="1150267"/>
+          </a:xfrm>
+          <a:prstGeom prst="rect">
+            <a:avLst/>
+          </a:prstGeom>
+          <a:effectLst>
+            <a:outerShdw blurRad="50800" dist="38100" dir="5400000" algn="t" rotWithShape="0">
+              <a:schemeClr val="accent4">
+                <a:lumMod val="50000"/>
+                <a:alpha val="40000"/>
+              </a:schemeClr>
+            </a:outerShdw>
+          </a:effectLst>
+        </p:spPr>
+        <p:txBody>
+          <a:bodyPr/>
+          <a:lstStyle>
+            <a:lvl1pPr algn="l" defTabSz="914400" rtl="0" eaLnBrk="1" latinLnBrk="0" hangingPunct="1">
+              <a:lnSpc>
+                <a:spcPct val="90000"/>
+              </a:lnSpc>
+              <a:spcBef>
+                <a:spcPct val="0"/>
+              </a:spcBef>
+              <a:buNone/>
+              <a:defRPr sz="4400" kern="1200">
+                <a:solidFill>
+                  <a:schemeClr val="tx1"/>
+                </a:solidFill>
+                <a:latin typeface="+mj-lt"/>
+                <a:ea typeface="+mj-ea"/>
+                <a:cs typeface="+mj-cs"/>
+              </a:defRPr>
+            </a:lvl1pPr>
+          </a:lstStyle>
+          <a:p>
+            <a:pPr algn="ctr"/>
+            <a:r>
+              <a:rPr lang="ru-RU" sz="6000" b="1" dirty="0">
+                <a:solidFill>
+                  <a:schemeClr val="accent1"/>
+                </a:solidFill>
+              </a:rPr>
+              <a:t>СПАСИБО ЗА ВНИМАНИЕ</a:t>
+            </a:r>
+          </a:p>
+        </p:txBody>
+      </p:sp>
+      <p:sp>
+        <p:nvSpPr>
+          <p:cNvPr id="8" name="Текст 11">
+            <a:extLst>
+              <a:ext uri="{FF2B5EF4-FFF2-40B4-BE49-F238E27FC236}">
+                <a16:creationId xmlns:a16="http://schemas.microsoft.com/office/drawing/2014/main" id="{DD74839E-6A64-467A-BA2F-9EF5F2388467}"/>
+              </a:ext>
+            </a:extLst>
+          </p:cNvPr>
+          <p:cNvSpPr txBox="1">
+            <a:spLocks/>
+          </p:cNvSpPr>
+          <p:nvPr/>
+        </p:nvSpPr>
+        <p:spPr>
+          <a:xfrm>
+            <a:off x="2608499" y="2885011"/>
+            <a:ext cx="6975002" cy="1705729"/>
+          </a:xfrm>
+          <a:prstGeom prst="rect">
+            <a:avLst/>
+          </a:prstGeom>
+        </p:spPr>
+        <p:txBody>
+          <a:bodyPr>
+            <a:noAutofit/>
+          </a:bodyPr>
+          <a:lstStyle>
+            <a:lvl1pPr marL="228600" indent="-228600" algn="l" defTabSz="914400" rtl="0" eaLnBrk="1" latinLnBrk="0" hangingPunct="1">
+              <a:lnSpc>
+                <a:spcPct val="90000"/>
+              </a:lnSpc>
+              <a:spcBef>
+                <a:spcPts val="1000"/>
+              </a:spcBef>
+              <a:buFont typeface="Arial" panose="020B0604020202020204" pitchFamily="34" charset="0"/>
+              <a:buChar char="•"/>
+              <a:defRPr sz="2800" kern="1200">
+                <a:solidFill>
+                  <a:schemeClr val="tx1"/>
+                </a:solidFill>
+                <a:latin typeface="+mn-lt"/>
+                <a:ea typeface="+mn-ea"/>
+                <a:cs typeface="+mn-cs"/>
+              </a:defRPr>
+            </a:lvl1pPr>
+            <a:lvl2pPr marL="685800" indent="-228600" algn="l" defTabSz="914400" rtl="0" eaLnBrk="1" latinLnBrk="0" hangingPunct="1">
+              <a:lnSpc>
+                <a:spcPct val="90000"/>
+              </a:lnSpc>
+              <a:spcBef>
+                <a:spcPts val="500"/>
+              </a:spcBef>
+              <a:buFont typeface="Arial" panose="020B0604020202020204" pitchFamily="34" charset="0"/>
+              <a:buChar char="•"/>
+              <a:defRPr sz="2400" kern="1200">
+                <a:solidFill>
+                  <a:schemeClr val="tx1"/>
+                </a:solidFill>
+                <a:latin typeface="+mn-lt"/>
+                <a:ea typeface="+mn-ea"/>
+                <a:cs typeface="+mn-cs"/>
+              </a:defRPr>
+            </a:lvl2pPr>
+            <a:lvl3pPr marL="1143000" indent="-228600" algn="l" defTabSz="914400" rtl="0" eaLnBrk="1" latinLnBrk="0" hangingPunct="1">
+              <a:lnSpc>
+                <a:spcPct val="90000"/>
+              </a:lnSpc>
+              <a:spcBef>
+                <a:spcPts val="500"/>
+              </a:spcBef>
+              <a:buFont typeface="Arial" panose="020B0604020202020204" pitchFamily="34" charset="0"/>
+              <a:buChar char="•"/>
+              <a:defRPr sz="2000" kern="1200">
+                <a:solidFill>
+                  <a:schemeClr val="tx1"/>
+                </a:solidFill>
+                <a:latin typeface="+mn-lt"/>
+                <a:ea typeface="+mn-ea"/>
+                <a:cs typeface="+mn-cs"/>
+              </a:defRPr>
+            </a:lvl3pPr>
+            <a:lvl4pPr marL="1600200" indent="-228600" algn="l" defTabSz="914400" rtl="0" eaLnBrk="1" latinLnBrk="0" hangingPunct="1">
+              <a:lnSpc>
+                <a:spcPct val="90000"/>
+              </a:lnSpc>
+              <a:spcBef>
+                <a:spcPts val="500"/>
+              </a:spcBef>
+              <a:buFont typeface="Arial" panose="020B0604020202020204" pitchFamily="34" charset="0"/>
+              <a:buChar char="•"/>
+              <a:defRPr sz="1800" kern="1200">
+                <a:solidFill>
+                  <a:schemeClr val="tx1"/>
+                </a:solidFill>
+                <a:latin typeface="+mn-lt"/>
+                <a:ea typeface="+mn-ea"/>
+                <a:cs typeface="+mn-cs"/>
+              </a:defRPr>
+            </a:lvl4pPr>
+            <a:lvl5pPr marL="2057400" indent="-228600" algn="l" defTabSz="914400" rtl="0" eaLnBrk="1" latinLnBrk="0" hangingPunct="1">
+              <a:lnSpc>
+                <a:spcPct val="90000"/>
+              </a:lnSpc>
+              <a:spcBef>
+                <a:spcPts val="500"/>
+              </a:spcBef>
+              <a:buFont typeface="Arial" panose="020B0604020202020204" pitchFamily="34" charset="0"/>
+              <a:buChar char="•"/>
+              <a:defRPr sz="1800" kern="1200">
+                <a:solidFill>
+                  <a:schemeClr val="tx1"/>
+                </a:solidFill>
+                <a:latin typeface="+mn-lt"/>
+                <a:ea typeface="+mn-ea"/>
+                <a:cs typeface="+mn-cs"/>
+              </a:defRPr>
+            </a:lvl5pPr>
+            <a:lvl6pPr marL="2514600" indent="-228600" algn="l" defTabSz="914400" rtl="0" eaLnBrk="1" latinLnBrk="0" hangingPunct="1">
+              <a:lnSpc>
+                <a:spcPct val="90000"/>
+              </a:lnSpc>
+              <a:spcBef>
+                <a:spcPts val="500"/>
+              </a:spcBef>
+              <a:buFont typeface="Arial" panose="020B0604020202020204" pitchFamily="34" charset="0"/>
+              <a:buChar char="•"/>
+              <a:defRPr sz="1800" kern="1200">
+                <a:solidFill>
+                  <a:schemeClr val="tx1"/>
+                </a:solidFill>
+                <a:latin typeface="+mn-lt"/>
+                <a:ea typeface="+mn-ea"/>
+                <a:cs typeface="+mn-cs"/>
+              </a:defRPr>
+            </a:lvl6pPr>
+            <a:lvl7pPr marL="2971800" indent="-228600" algn="l" defTabSz="914400" rtl="0" eaLnBrk="1" latinLnBrk="0" hangingPunct="1">
+              <a:lnSpc>
+                <a:spcPct val="90000"/>
+              </a:lnSpc>
+              <a:spcBef>
+                <a:spcPts val="500"/>
+              </a:spcBef>
+              <a:buFont typeface="Arial" panose="020B0604020202020204" pitchFamily="34" charset="0"/>
+              <a:buChar char="•"/>
+              <a:defRPr sz="1800" kern="1200">
+                <a:solidFill>
+                  <a:schemeClr val="tx1"/>
+                </a:solidFill>
+                <a:latin typeface="+mn-lt"/>
+                <a:ea typeface="+mn-ea"/>
+                <a:cs typeface="+mn-cs"/>
+              </a:defRPr>
+            </a:lvl7pPr>
+            <a:lvl8pPr marL="3429000" indent="-228600" algn="l" defTabSz="914400" rtl="0" eaLnBrk="1" latinLnBrk="0" hangingPunct="1">
+              <a:lnSpc>
+                <a:spcPct val="90000"/>
+              </a:lnSpc>
+              <a:spcBef>
+                <a:spcPts val="500"/>
+              </a:spcBef>
+              <a:buFont typeface="Arial" panose="020B0604020202020204" pitchFamily="34" charset="0"/>
+              <a:buChar char="•"/>
+              <a:defRPr sz="1800" kern="1200">
+                <a:solidFill>
+                  <a:schemeClr val="tx1"/>
+                </a:solidFill>
+                <a:latin typeface="+mn-lt"/>
+                <a:ea typeface="+mn-ea"/>
+                <a:cs typeface="+mn-cs"/>
+              </a:defRPr>
+            </a:lvl8pPr>
+            <a:lvl9pPr marL="3886200" indent="-228600" algn="l" defTabSz="914400" rtl="0" eaLnBrk="1" latinLnBrk="0" hangingPunct="1">
+              <a:lnSpc>
+                <a:spcPct val="90000"/>
+              </a:lnSpc>
+              <a:spcBef>
+                <a:spcPts val="500"/>
+              </a:spcBef>
+              <a:buFont typeface="Arial" panose="020B0604020202020204" pitchFamily="34" charset="0"/>
+              <a:buChar char="•"/>
+              <a:defRPr sz="1800" kern="1200">
+                <a:solidFill>
+                  <a:schemeClr val="tx1"/>
+                </a:solidFill>
+                <a:latin typeface="+mn-lt"/>
+                <a:ea typeface="+mn-ea"/>
+                <a:cs typeface="+mn-cs"/>
+              </a:defRPr>
+            </a:lvl9pPr>
+          </a:lstStyle>
+          <a:p>
+            <a:pPr marL="0" indent="0">
+              <a:buNone/>
+            </a:pPr>
+            <a:endParaRPr lang="ru-RU" sz="1600" dirty="0">
+              <a:solidFill>
+                <a:schemeClr val="accent1"/>
+              </a:solidFill>
+            </a:endParaRPr>
+          </a:p>
+        </p:txBody>
+      </p:sp>
+      <p:pic>
+        <p:nvPicPr>
+          <p:cNvPr id="3" name="Рисунок 2">
+            <a:extLst>
+              <a:ext uri="{FF2B5EF4-FFF2-40B4-BE49-F238E27FC236}">
+                <a16:creationId xmlns:a16="http://schemas.microsoft.com/office/drawing/2014/main" id="{82AD868C-C44C-6DC2-FF1A-5C2E3A61AE1C}"/>
+              </a:ext>
+            </a:extLst>
+          </p:cNvPr>
+          <p:cNvPicPr>
+            <a:picLocks noChangeAspect="1"/>
+          </p:cNvPicPr>
+          <p:nvPr/>
+        </p:nvPicPr>
+        <p:blipFill>
+          <a:blip r:embed="rId2">
+            <a:extLst>
+              <a:ext uri="{28A0092B-C50C-407E-A947-70E740481C1C}">
+                <a14:useLocalDpi xmlns:a14="http://schemas.microsoft.com/office/drawing/2010/main" val="0"/>
+              </a:ext>
+            </a:extLst>
+          </a:blip>
+          <a:stretch>
+            <a:fillRect/>
+          </a:stretch>
+        </p:blipFill>
+        <p:spPr>
+          <a:xfrm>
+            <a:off x="5314950" y="4886183"/>
+            <a:ext cx="1562100" cy="1562100"/>
+          </a:xfrm>
+          <a:prstGeom prst="rect">
+            <a:avLst/>
+          </a:prstGeom>
+        </p:spPr>
+      </p:pic>
+      <p:sp>
+        <p:nvSpPr>
+          <p:cNvPr id="5" name="TextBox 4">
+            <a:extLst>
+              <a:ext uri="{FF2B5EF4-FFF2-40B4-BE49-F238E27FC236}">
+                <a16:creationId xmlns:a16="http://schemas.microsoft.com/office/drawing/2014/main" id="{808E5EFA-47DB-3B55-3F30-8918A2AD61DD}"/>
+              </a:ext>
+            </a:extLst>
+          </p:cNvPr>
+          <p:cNvSpPr txBox="1"/>
+          <p:nvPr/>
+        </p:nvSpPr>
+        <p:spPr>
+          <a:xfrm>
+            <a:off x="5677468" y="4507453"/>
+            <a:ext cx="2620370" cy="369332"/>
+          </a:xfrm>
+          <a:prstGeom prst="rect">
+            <a:avLst/>
+          </a:prstGeom>
+          <a:noFill/>
+        </p:spPr>
+        <p:txBody>
+          <a:bodyPr wrap="square" rtlCol="0">
+            <a:spAutoFit/>
+          </a:bodyPr>
+          <a:lstStyle/>
+          <a:p>
+            <a:r>
+              <a:rPr lang="en-US" dirty="0"/>
+              <a:t>GitHub</a:t>
+            </a:r>
+            <a:endParaRPr lang="ru-RU" dirty="0"/>
+          </a:p>
+        </p:txBody>
+      </p:sp>
+    </p:spTree>
+    <p:extLst>
+      <p:ext uri="{BB962C8B-B14F-4D97-AF65-F5344CB8AC3E}">
+        <p14:creationId xmlns:p14="http://schemas.microsoft.com/office/powerpoint/2010/main" val="1922488827"/>
+      </p:ext>
+    </p:extLst>
+  </p:cSld>
+  <p:clrMapOvr>
+    <a:masterClrMapping/>
+  </p:clrMapOvr>
+  <mc:AlternateContent xmlns:mc="http://schemas.openxmlformats.org/markup-compatibility/2006" xmlns:p14="http://schemas.microsoft.com/office/powerpoint/2010/main">
+    <mc:Choice Requires="p14">
+      <p:transition spd="med" p14:dur="700">
+        <p:fade/>
+      </p:transition>
+    </mc:Choice>
+    <mc:Fallback xmlns="">
+      <p:transition spd="med">
+        <p:fade/>
+      </p:transition>
+    </mc:Fallback>
+  </mc:AlternateContent>
+</p:sld>
+</file>
+
 <file path=ppt/theme/theme1.xml><?xml version="1.0" encoding="utf-8"?>
 <a:theme xmlns:a="http://schemas.openxmlformats.org/drawingml/2006/main" name="Тема Office">
   <a:themeElements>
